--- a/Лекция2_Основы_SQL.pptx
+++ b/Лекция2_Основы_SQL.pptx
@@ -5,7 +5,7 @@
     <p:sldMasterId id="2147483648" r:id="rId1"/>
   </p:sldMasterIdLst>
   <p:notesMasterIdLst>
-    <p:notesMasterId r:id="rId13"/>
+    <p:notesMasterId r:id="rId33"/>
   </p:notesMasterIdLst>
   <p:sldIdLst>
     <p:sldId id="256" r:id="rId2"/>
@@ -19,11 +19,31 @@
     <p:sldId id="264" r:id="rId10"/>
     <p:sldId id="265" r:id="rId11"/>
     <p:sldId id="266" r:id="rId12"/>
+    <p:sldId id="267" r:id="rId13"/>
+    <p:sldId id="269" r:id="rId14"/>
+    <p:sldId id="268" r:id="rId15"/>
+    <p:sldId id="270" r:id="rId16"/>
+    <p:sldId id="271" r:id="rId17"/>
+    <p:sldId id="272" r:id="rId18"/>
+    <p:sldId id="273" r:id="rId19"/>
+    <p:sldId id="274" r:id="rId20"/>
+    <p:sldId id="275" r:id="rId21"/>
+    <p:sldId id="276" r:id="rId22"/>
+    <p:sldId id="277" r:id="rId23"/>
+    <p:sldId id="278" r:id="rId24"/>
+    <p:sldId id="279" r:id="rId25"/>
+    <p:sldId id="280" r:id="rId26"/>
+    <p:sldId id="281" r:id="rId27"/>
+    <p:sldId id="282" r:id="rId28"/>
+    <p:sldId id="285" r:id="rId29"/>
+    <p:sldId id="286" r:id="rId30"/>
+    <p:sldId id="283" r:id="rId31"/>
+    <p:sldId id="284" r:id="rId32"/>
   </p:sldIdLst>
   <p:sldSz cx="12192000" cy="6858000"/>
   <p:notesSz cx="6797675" cy="9926638"/>
   <p:custDataLst>
-    <p:tags r:id="rId14"/>
+    <p:tags r:id="rId34"/>
   </p:custDataLst>
   <p:defaultTextStyle>
     <a:defPPr>
@@ -243,7 +263,7 @@
           <a:p>
             <a:fld id="{05400FBA-3B4D-594C-9C95-852DB6F34EF1}" type="datetimeFigureOut">
               <a:rPr lang="ru-RU" smtClean="0"/>
-              <a:t>09.10.2026</a:t>
+              <a:t>12.10.2026</a:t>
             </a:fld>
             <a:endParaRPr lang="ru-RU"/>
           </a:p>
@@ -24084,7 +24104,7 @@
           <a:p>
             <a:fld id="{7684163B-8EE3-4356-93B8-70F784CB301D}" type="datetimeFigureOut">
               <a:rPr lang="en-US" smtClean="0"/>
-              <a:t>10/9/2026</a:t>
+              <a:t>10/12/2026</a:t>
             </a:fld>
             <a:endParaRPr lang="en-US"/>
           </a:p>
@@ -28779,10 +28799,1837 @@
           </a:prstGeom>
         </p:spPr>
       </p:pic>
+      <p:sp>
+        <p:nvSpPr>
+          <p:cNvPr id="5" name="TextBox 4">
+            <a:extLst>
+              <a:ext uri="{FF2B5EF4-FFF2-40B4-BE49-F238E27FC236}">
+                <a16:creationId xmlns:a16="http://schemas.microsoft.com/office/drawing/2014/main" id="{7E301618-123C-3F97-6E30-90C1D2A10AA1}"/>
+              </a:ext>
+            </a:extLst>
+          </p:cNvPr>
+          <p:cNvSpPr txBox="1"/>
+          <p:nvPr/>
+        </p:nvSpPr>
+        <p:spPr>
+          <a:xfrm>
+            <a:off x="6094998" y="5068604"/>
+            <a:ext cx="6097002" cy="646331"/>
+          </a:xfrm>
+          <a:prstGeom prst="rect">
+            <a:avLst/>
+          </a:prstGeom>
+          <a:noFill/>
+        </p:spPr>
+        <p:txBody>
+          <a:bodyPr wrap="square">
+            <a:spAutoFit/>
+          </a:bodyPr>
+          <a:lstStyle/>
+          <a:p>
+            <a:r>
+              <a:rPr lang="ru-RU" sz="1800" b="1" i="0" dirty="0">
+                <a:solidFill>
+                  <a:schemeClr val="tx1"/>
+                </a:solidFill>
+                <a:effectLst/>
+                <a:latin typeface="+mn-lt"/>
+              </a:rPr>
+              <a:t>Золотое правило:</a:t>
+            </a:r>
+            <a:r>
+              <a:rPr lang="ru-RU" sz="1800" b="0" i="0" dirty="0">
+                <a:solidFill>
+                  <a:schemeClr val="tx1"/>
+                </a:solidFill>
+                <a:effectLst/>
+                <a:latin typeface="+mn-lt"/>
+              </a:rPr>
+              <a:t> всё, что в </a:t>
+            </a:r>
+            <a:r>
+              <a:rPr lang="ru-RU" b="0" i="0" dirty="0">
+                <a:solidFill>
+                  <a:schemeClr val="tx1"/>
+                </a:solidFill>
+                <a:effectLst/>
+                <a:latin typeface="+mn-lt"/>
+              </a:rPr>
+              <a:t>SELECT</a:t>
+            </a:r>
+            <a:r>
+              <a:rPr lang="ru-RU" sz="1800" b="0" i="0" dirty="0">
+                <a:solidFill>
+                  <a:schemeClr val="tx1"/>
+                </a:solidFill>
+                <a:effectLst/>
+                <a:latin typeface="+mn-lt"/>
+              </a:rPr>
+              <a:t> не обёрнуто в агрегатную функцию, должно быть перечислено в </a:t>
+            </a:r>
+            <a:r>
+              <a:rPr lang="ru-RU" b="0" i="0" dirty="0">
+                <a:solidFill>
+                  <a:schemeClr val="tx1"/>
+                </a:solidFill>
+                <a:effectLst/>
+                <a:latin typeface="+mn-lt"/>
+              </a:rPr>
+              <a:t>GROUP BY</a:t>
+            </a:r>
+            <a:r>
+              <a:rPr lang="ru-RU" sz="1800" b="0" i="0" dirty="0">
+                <a:solidFill>
+                  <a:schemeClr val="tx1"/>
+                </a:solidFill>
+                <a:effectLst/>
+                <a:latin typeface="+mn-lt"/>
+              </a:rPr>
+              <a:t>. Если нарушить — база выдаст ошибку.</a:t>
+            </a:r>
+            <a:endParaRPr lang="ru-RU" dirty="0"/>
+          </a:p>
+        </p:txBody>
+      </p:sp>
     </p:spTree>
     <p:extLst>
       <p:ext uri="{BB962C8B-B14F-4D97-AF65-F5344CB8AC3E}">
         <p14:creationId xmlns:p14="http://schemas.microsoft.com/office/powerpoint/2010/main" val="2826659007"/>
+      </p:ext>
+    </p:extLst>
+  </p:cSld>
+  <p:clrMapOvr>
+    <a:masterClrMapping/>
+  </p:clrMapOvr>
+</p:sld>
+</file>
+
+<file path=ppt/slides/slide12.xml><?xml version="1.0" encoding="utf-8"?>
+<p:sld xmlns:a="http://schemas.openxmlformats.org/drawingml/2006/main" xmlns:r="http://schemas.openxmlformats.org/officeDocument/2006/relationships" xmlns:p="http://schemas.openxmlformats.org/presentationml/2006/main">
+  <p:cSld>
+    <p:spTree>
+      <p:nvGrpSpPr>
+        <p:cNvPr id="1" name="">
+          <a:extLst>
+            <a:ext uri="{FF2B5EF4-FFF2-40B4-BE49-F238E27FC236}">
+              <a16:creationId xmlns:a16="http://schemas.microsoft.com/office/drawing/2014/main" id="{8221C2BA-9A6D-8D94-C1F9-C19EEB440164}"/>
+            </a:ext>
+          </a:extLst>
+        </p:cNvPr>
+        <p:cNvGrpSpPr/>
+        <p:nvPr/>
+      </p:nvGrpSpPr>
+      <p:grpSpPr>
+        <a:xfrm>
+          <a:off x="0" y="0"/>
+          <a:ext cx="0" cy="0"/>
+          <a:chOff x="0" y="0"/>
+          <a:chExt cx="0" cy="0"/>
+        </a:xfrm>
+      </p:grpSpPr>
+      <p:sp>
+        <p:nvSpPr>
+          <p:cNvPr id="2" name="Title 1">
+            <a:extLst>
+              <a:ext uri="{FF2B5EF4-FFF2-40B4-BE49-F238E27FC236}">
+                <a16:creationId xmlns:a16="http://schemas.microsoft.com/office/drawing/2014/main" id="{9A3F9600-EAD4-5F6F-CF03-A5C8417E377C}"/>
+              </a:ext>
+            </a:extLst>
+          </p:cNvPr>
+          <p:cNvSpPr>
+            <a:spLocks noGrp="1"/>
+          </p:cNvSpPr>
+          <p:nvPr>
+            <p:ph type="title"/>
+          </p:nvPr>
+        </p:nvSpPr>
+        <p:spPr>
+          <a:xfrm>
+            <a:off x="808906" y="236622"/>
+            <a:ext cx="9072000" cy="332399"/>
+          </a:xfrm>
+        </p:spPr>
+        <p:txBody>
+          <a:bodyPr/>
+          <a:lstStyle/>
+          <a:p>
+            <a:r>
+              <a:rPr lang="en-US" dirty="0"/>
+              <a:t>Having – </a:t>
+            </a:r>
+            <a:r>
+              <a:rPr lang="ru-RU" dirty="0"/>
+              <a:t>фильтр для групп</a:t>
+            </a:r>
+            <a:endParaRPr lang="en-US" dirty="0"/>
+          </a:p>
+        </p:txBody>
+      </p:sp>
+      <p:pic>
+        <p:nvPicPr>
+          <p:cNvPr id="5" name="Рисунок 4">
+            <a:extLst>
+              <a:ext uri="{FF2B5EF4-FFF2-40B4-BE49-F238E27FC236}">
+                <a16:creationId xmlns:a16="http://schemas.microsoft.com/office/drawing/2014/main" id="{40C640F5-BCD2-83C6-2B2D-3068D55F68FF}"/>
+              </a:ext>
+            </a:extLst>
+          </p:cNvPr>
+          <p:cNvPicPr>
+            <a:picLocks noChangeAspect="1"/>
+          </p:cNvPicPr>
+          <p:nvPr/>
+        </p:nvPicPr>
+        <p:blipFill>
+          <a:blip r:embed="rId2"/>
+          <a:stretch>
+            <a:fillRect/>
+          </a:stretch>
+        </p:blipFill>
+        <p:spPr>
+          <a:xfrm>
+            <a:off x="1174332" y="3270083"/>
+            <a:ext cx="5800725" cy="3181350"/>
+          </a:xfrm>
+          <a:prstGeom prst="rect">
+            <a:avLst/>
+          </a:prstGeom>
+        </p:spPr>
+      </p:pic>
+      <p:sp>
+        <p:nvSpPr>
+          <p:cNvPr id="7" name="TextBox 6">
+            <a:extLst>
+              <a:ext uri="{FF2B5EF4-FFF2-40B4-BE49-F238E27FC236}">
+                <a16:creationId xmlns:a16="http://schemas.microsoft.com/office/drawing/2014/main" id="{A27535C0-3773-1F87-4310-658A1429F743}"/>
+              </a:ext>
+            </a:extLst>
+          </p:cNvPr>
+          <p:cNvSpPr txBox="1"/>
+          <p:nvPr/>
+        </p:nvSpPr>
+        <p:spPr>
+          <a:xfrm>
+            <a:off x="263191" y="1242743"/>
+            <a:ext cx="6097002" cy="1726114"/>
+          </a:xfrm>
+          <a:prstGeom prst="rect">
+            <a:avLst/>
+          </a:prstGeom>
+          <a:noFill/>
+        </p:spPr>
+        <p:txBody>
+          <a:bodyPr wrap="square">
+            <a:spAutoFit/>
+          </a:bodyPr>
+          <a:lstStyle/>
+          <a:p>
+            <a:pPr marL="0" marR="0" indent="0" algn="l">
+              <a:spcBef>
+                <a:spcPts val="1200"/>
+              </a:spcBef>
+              <a:spcAft>
+                <a:spcPts val="1200"/>
+              </a:spcAft>
+              <a:buNone/>
+            </a:pPr>
+            <a:r>
+              <a:rPr lang="ru-RU" sz="1800" b="1" i="0" dirty="0">
+                <a:solidFill>
+                  <a:schemeClr val="tx1"/>
+                </a:solidFill>
+                <a:effectLst/>
+                <a:latin typeface="+mn-lt"/>
+              </a:rPr>
+              <a:t>Чем </a:t>
+            </a:r>
+            <a:r>
+              <a:rPr lang="ru-RU" sz="1800" b="0" i="0" dirty="0">
+                <a:solidFill>
+                  <a:schemeClr val="tx1"/>
+                </a:solidFill>
+                <a:effectLst/>
+                <a:latin typeface="+mn-lt"/>
+              </a:rPr>
+              <a:t>HAVING</a:t>
+            </a:r>
+            <a:r>
+              <a:rPr lang="ru-RU" sz="1800" b="1" i="0" dirty="0">
+                <a:solidFill>
+                  <a:schemeClr val="tx1"/>
+                </a:solidFill>
+                <a:effectLst/>
+                <a:latin typeface="+mn-lt"/>
+              </a:rPr>
+              <a:t> отличается от</a:t>
+            </a:r>
+            <a:r>
+              <a:rPr lang="en-US" sz="1800" b="1" i="0" dirty="0">
+                <a:solidFill>
+                  <a:schemeClr val="tx1"/>
+                </a:solidFill>
+                <a:effectLst/>
+                <a:latin typeface="+mn-lt"/>
+              </a:rPr>
+              <a:t> </a:t>
+            </a:r>
+            <a:r>
+              <a:rPr lang="en-US" b="1" dirty="0"/>
+              <a:t>where</a:t>
+            </a:r>
+            <a:r>
+              <a:rPr lang="ru-RU" sz="1800" b="1" i="0" dirty="0">
+                <a:solidFill>
+                  <a:schemeClr val="tx1"/>
+                </a:solidFill>
+                <a:effectLst/>
+                <a:latin typeface="+mn-lt"/>
+              </a:rPr>
+              <a:t>?</a:t>
+            </a:r>
+            <a:r>
+              <a:rPr lang="en-US" sz="1800" b="1" i="0" dirty="0">
+                <a:solidFill>
+                  <a:schemeClr val="tx1"/>
+                </a:solidFill>
+                <a:effectLst/>
+                <a:latin typeface="+mn-lt"/>
+              </a:rPr>
+              <a:t>:</a:t>
+            </a:r>
+            <a:endParaRPr lang="en-US" b="1" dirty="0"/>
+          </a:p>
+          <a:p>
+            <a:pPr>
+              <a:spcBef>
+                <a:spcPts val="1200"/>
+              </a:spcBef>
+              <a:spcAft>
+                <a:spcPts val="1200"/>
+              </a:spcAft>
+            </a:pPr>
+            <a:r>
+              <a:rPr lang="en-US" sz="1800" b="1" i="0" dirty="0">
+                <a:solidFill>
+                  <a:schemeClr val="tx1"/>
+                </a:solidFill>
+                <a:effectLst/>
+                <a:latin typeface="+mn-lt"/>
+              </a:rPr>
+              <a:t>- </a:t>
+            </a:r>
+            <a:r>
+              <a:rPr lang="ru-RU" sz="1800" b="0" i="0" dirty="0">
+                <a:solidFill>
+                  <a:schemeClr val="tx1"/>
+                </a:solidFill>
+                <a:effectLst/>
+                <a:latin typeface="+mn-lt"/>
+              </a:rPr>
+              <a:t>WHERE фильтрует </a:t>
+            </a:r>
+            <a:r>
+              <a:rPr lang="ru-RU" sz="1800" b="1" i="0" dirty="0">
+                <a:solidFill>
+                  <a:schemeClr val="tx1"/>
+                </a:solidFill>
+                <a:effectLst/>
+                <a:latin typeface="+mn-lt"/>
+              </a:rPr>
+              <a:t>строки</a:t>
+            </a:r>
+            <a:r>
+              <a:rPr lang="ru-RU" sz="1800" b="0" i="0" dirty="0">
+                <a:solidFill>
+                  <a:schemeClr val="tx1"/>
+                </a:solidFill>
+                <a:effectLst/>
+                <a:latin typeface="+mn-lt"/>
+              </a:rPr>
+              <a:t> </a:t>
+            </a:r>
+            <a:r>
+              <a:rPr lang="ru-RU" sz="1800" b="0" i="1" dirty="0">
+                <a:solidFill>
+                  <a:schemeClr val="tx1"/>
+                </a:solidFill>
+                <a:effectLst/>
+                <a:latin typeface="+mn-lt"/>
+              </a:rPr>
+              <a:t>до</a:t>
+            </a:r>
+            <a:r>
+              <a:rPr lang="ru-RU" sz="1800" b="0" i="0" dirty="0">
+                <a:solidFill>
+                  <a:schemeClr val="tx1"/>
+                </a:solidFill>
+                <a:effectLst/>
+                <a:latin typeface="+mn-lt"/>
+              </a:rPr>
+              <a:t> группировки.</a:t>
+            </a:r>
+          </a:p>
+          <a:p>
+            <a:pPr marR="0" lvl="0" algn="l">
+              <a:spcBef>
+                <a:spcPts val="450"/>
+              </a:spcBef>
+              <a:spcAft>
+                <a:spcPts val="1200"/>
+              </a:spcAft>
+            </a:pPr>
+            <a:r>
+              <a:rPr lang="en-US" sz="1800" b="0" i="0" dirty="0">
+                <a:solidFill>
+                  <a:schemeClr val="tx1"/>
+                </a:solidFill>
+                <a:effectLst/>
+                <a:latin typeface="+mn-lt"/>
+              </a:rPr>
+              <a:t>- </a:t>
+            </a:r>
+            <a:r>
+              <a:rPr lang="ru-RU" sz="1800" b="0" i="0" dirty="0">
+                <a:solidFill>
+                  <a:schemeClr val="tx1"/>
+                </a:solidFill>
+                <a:effectLst/>
+                <a:latin typeface="+mn-lt"/>
+              </a:rPr>
+              <a:t>HAVING фильтрует </a:t>
+            </a:r>
+            <a:r>
+              <a:rPr lang="ru-RU" sz="1800" b="1" i="0" dirty="0">
+                <a:solidFill>
+                  <a:schemeClr val="tx1"/>
+                </a:solidFill>
+                <a:effectLst/>
+                <a:latin typeface="+mn-lt"/>
+              </a:rPr>
+              <a:t>группы</a:t>
+            </a:r>
+            <a:r>
+              <a:rPr lang="ru-RU" sz="1800" b="0" i="0" dirty="0">
+                <a:solidFill>
+                  <a:schemeClr val="tx1"/>
+                </a:solidFill>
+                <a:effectLst/>
+                <a:latin typeface="+mn-lt"/>
+              </a:rPr>
+              <a:t> </a:t>
+            </a:r>
+            <a:r>
+              <a:rPr lang="ru-RU" sz="1800" b="0" i="1" dirty="0">
+                <a:solidFill>
+                  <a:schemeClr val="tx1"/>
+                </a:solidFill>
+                <a:effectLst/>
+                <a:latin typeface="+mn-lt"/>
+              </a:rPr>
+              <a:t>после</a:t>
+            </a:r>
+            <a:r>
+              <a:rPr lang="ru-RU" sz="1800" b="0" i="0" dirty="0">
+                <a:solidFill>
+                  <a:schemeClr val="tx1"/>
+                </a:solidFill>
+                <a:effectLst/>
+                <a:latin typeface="+mn-lt"/>
+              </a:rPr>
+              <a:t> группировки, и с ним можно использовать агрегаты.</a:t>
+            </a:r>
+            <a:endParaRPr lang="ru-RU" sz="1200" b="0" i="0" dirty="0">
+              <a:solidFill>
+                <a:srgbClr val="F9FAFB"/>
+              </a:solidFill>
+              <a:effectLst/>
+              <a:latin typeface="quote-cjk-patch"/>
+            </a:endParaRPr>
+          </a:p>
+        </p:txBody>
+      </p:sp>
+    </p:spTree>
+    <p:extLst>
+      <p:ext uri="{BB962C8B-B14F-4D97-AF65-F5344CB8AC3E}">
+        <p14:creationId xmlns:p14="http://schemas.microsoft.com/office/powerpoint/2010/main" val="3123285442"/>
+      </p:ext>
+    </p:extLst>
+  </p:cSld>
+  <p:clrMapOvr>
+    <a:masterClrMapping/>
+  </p:clrMapOvr>
+</p:sld>
+</file>
+
+<file path=ppt/slides/slide13.xml><?xml version="1.0" encoding="utf-8"?>
+<p:sld xmlns:a="http://schemas.openxmlformats.org/drawingml/2006/main" xmlns:r="http://schemas.openxmlformats.org/officeDocument/2006/relationships" xmlns:p="http://schemas.openxmlformats.org/presentationml/2006/main">
+  <p:cSld>
+    <p:spTree>
+      <p:nvGrpSpPr>
+        <p:cNvPr id="1" name="">
+          <a:extLst>
+            <a:ext uri="{FF2B5EF4-FFF2-40B4-BE49-F238E27FC236}">
+              <a16:creationId xmlns:a16="http://schemas.microsoft.com/office/drawing/2014/main" id="{C66A3888-E28F-2B26-15D7-2FFD109A2886}"/>
+            </a:ext>
+          </a:extLst>
+        </p:cNvPr>
+        <p:cNvGrpSpPr/>
+        <p:nvPr/>
+      </p:nvGrpSpPr>
+      <p:grpSpPr>
+        <a:xfrm>
+          <a:off x="0" y="0"/>
+          <a:ext cx="0" cy="0"/>
+          <a:chOff x="0" y="0"/>
+          <a:chExt cx="0" cy="0"/>
+        </a:xfrm>
+      </p:grpSpPr>
+      <p:sp>
+        <p:nvSpPr>
+          <p:cNvPr id="2" name="Title 1">
+            <a:extLst>
+              <a:ext uri="{FF2B5EF4-FFF2-40B4-BE49-F238E27FC236}">
+                <a16:creationId xmlns:a16="http://schemas.microsoft.com/office/drawing/2014/main" id="{1168EA34-17BF-D602-47A3-DEEDA167E76E}"/>
+              </a:ext>
+            </a:extLst>
+          </p:cNvPr>
+          <p:cNvSpPr>
+            <a:spLocks noGrp="1"/>
+          </p:cNvSpPr>
+          <p:nvPr>
+            <p:ph type="title"/>
+          </p:nvPr>
+        </p:nvSpPr>
+        <p:spPr>
+          <a:xfrm>
+            <a:off x="808906" y="236622"/>
+            <a:ext cx="9072000" cy="332399"/>
+          </a:xfrm>
+        </p:spPr>
+        <p:txBody>
+          <a:bodyPr/>
+          <a:lstStyle/>
+          <a:p>
+            <a:r>
+              <a:rPr lang="ru-RU" dirty="0"/>
+              <a:t>Вспоминаем математику за 5-6 класс</a:t>
+            </a:r>
+            <a:endParaRPr lang="en-US" dirty="0"/>
+          </a:p>
+        </p:txBody>
+      </p:sp>
+      <p:pic>
+        <p:nvPicPr>
+          <p:cNvPr id="5" name="Рисунок 4">
+            <a:extLst>
+              <a:ext uri="{FF2B5EF4-FFF2-40B4-BE49-F238E27FC236}">
+                <a16:creationId xmlns:a16="http://schemas.microsoft.com/office/drawing/2014/main" id="{68FC0B5B-588D-D756-3730-58DCCAF21AAB}"/>
+              </a:ext>
+            </a:extLst>
+          </p:cNvPr>
+          <p:cNvPicPr>
+            <a:picLocks noChangeAspect="1"/>
+          </p:cNvPicPr>
+          <p:nvPr/>
+        </p:nvPicPr>
+        <p:blipFill>
+          <a:blip r:embed="rId2"/>
+          <a:stretch>
+            <a:fillRect/>
+          </a:stretch>
+        </p:blipFill>
+        <p:spPr>
+          <a:xfrm>
+            <a:off x="1733550" y="1347287"/>
+            <a:ext cx="5753100" cy="4524375"/>
+          </a:xfrm>
+          <a:prstGeom prst="rect">
+            <a:avLst/>
+          </a:prstGeom>
+        </p:spPr>
+      </p:pic>
+    </p:spTree>
+    <p:extLst>
+      <p:ext uri="{BB962C8B-B14F-4D97-AF65-F5344CB8AC3E}">
+        <p14:creationId xmlns:p14="http://schemas.microsoft.com/office/powerpoint/2010/main" val="1306985644"/>
+      </p:ext>
+    </p:extLst>
+  </p:cSld>
+  <p:clrMapOvr>
+    <a:masterClrMapping/>
+  </p:clrMapOvr>
+</p:sld>
+</file>
+
+<file path=ppt/slides/slide14.xml><?xml version="1.0" encoding="utf-8"?>
+<p:sld xmlns:a="http://schemas.openxmlformats.org/drawingml/2006/main" xmlns:r="http://schemas.openxmlformats.org/officeDocument/2006/relationships" xmlns:p="http://schemas.openxmlformats.org/presentationml/2006/main">
+  <p:cSld>
+    <p:spTree>
+      <p:nvGrpSpPr>
+        <p:cNvPr id="1" name="">
+          <a:extLst>
+            <a:ext uri="{FF2B5EF4-FFF2-40B4-BE49-F238E27FC236}">
+              <a16:creationId xmlns:a16="http://schemas.microsoft.com/office/drawing/2014/main" id="{56858B9C-2EB7-FE86-00EE-97898DA7C1A4}"/>
+            </a:ext>
+          </a:extLst>
+        </p:cNvPr>
+        <p:cNvGrpSpPr/>
+        <p:nvPr/>
+      </p:nvGrpSpPr>
+      <p:grpSpPr>
+        <a:xfrm>
+          <a:off x="0" y="0"/>
+          <a:ext cx="0" cy="0"/>
+          <a:chOff x="0" y="0"/>
+          <a:chExt cx="0" cy="0"/>
+        </a:xfrm>
+      </p:grpSpPr>
+      <p:sp>
+        <p:nvSpPr>
+          <p:cNvPr id="2" name="Title 1">
+            <a:extLst>
+              <a:ext uri="{FF2B5EF4-FFF2-40B4-BE49-F238E27FC236}">
+                <a16:creationId xmlns:a16="http://schemas.microsoft.com/office/drawing/2014/main" id="{258B31FE-A1F8-79EA-77BC-C0862465C69D}"/>
+              </a:ext>
+            </a:extLst>
+          </p:cNvPr>
+          <p:cNvSpPr>
+            <a:spLocks noGrp="1"/>
+          </p:cNvSpPr>
+          <p:nvPr>
+            <p:ph type="title"/>
+          </p:nvPr>
+        </p:nvSpPr>
+        <p:spPr>
+          <a:xfrm>
+            <a:off x="808906" y="236622"/>
+            <a:ext cx="9072000" cy="332399"/>
+          </a:xfrm>
+        </p:spPr>
+        <p:txBody>
+          <a:bodyPr/>
+          <a:lstStyle/>
+          <a:p>
+            <a:r>
+              <a:rPr lang="en-US" dirty="0"/>
+              <a:t>join – </a:t>
+            </a:r>
+            <a:r>
+              <a:rPr lang="ru-RU" dirty="0"/>
+              <a:t>соединение таблиц</a:t>
+            </a:r>
+            <a:endParaRPr lang="en-US" dirty="0"/>
+          </a:p>
+        </p:txBody>
+      </p:sp>
+      <p:pic>
+        <p:nvPicPr>
+          <p:cNvPr id="4" name="Рисунок 3">
+            <a:extLst>
+              <a:ext uri="{FF2B5EF4-FFF2-40B4-BE49-F238E27FC236}">
+                <a16:creationId xmlns:a16="http://schemas.microsoft.com/office/drawing/2014/main" id="{DC9C722C-616A-1D91-1B99-83132CDAEFC7}"/>
+              </a:ext>
+            </a:extLst>
+          </p:cNvPr>
+          <p:cNvPicPr>
+            <a:picLocks noChangeAspect="1"/>
+          </p:cNvPicPr>
+          <p:nvPr/>
+        </p:nvPicPr>
+        <p:blipFill>
+          <a:blip r:embed="rId2"/>
+          <a:stretch>
+            <a:fillRect/>
+          </a:stretch>
+        </p:blipFill>
+        <p:spPr>
+          <a:xfrm>
+            <a:off x="6209800" y="236622"/>
+            <a:ext cx="4335879" cy="1898391"/>
+          </a:xfrm>
+          <a:prstGeom prst="rect">
+            <a:avLst/>
+          </a:prstGeom>
+        </p:spPr>
+      </p:pic>
+      <p:sp>
+        <p:nvSpPr>
+          <p:cNvPr id="8" name="TextBox 7">
+            <a:extLst>
+              <a:ext uri="{FF2B5EF4-FFF2-40B4-BE49-F238E27FC236}">
+                <a16:creationId xmlns:a16="http://schemas.microsoft.com/office/drawing/2014/main" id="{74B339E3-98EC-B5B0-6749-D49394ED193A}"/>
+              </a:ext>
+            </a:extLst>
+          </p:cNvPr>
+          <p:cNvSpPr txBox="1"/>
+          <p:nvPr/>
+        </p:nvSpPr>
+        <p:spPr>
+          <a:xfrm>
+            <a:off x="5948111" y="2202857"/>
+            <a:ext cx="6097002" cy="2223686"/>
+          </a:xfrm>
+          <a:prstGeom prst="rect">
+            <a:avLst/>
+          </a:prstGeom>
+          <a:noFill/>
+        </p:spPr>
+        <p:txBody>
+          <a:bodyPr wrap="square">
+            <a:spAutoFit/>
+          </a:bodyPr>
+          <a:lstStyle/>
+          <a:p>
+            <a:pPr marL="0" marR="0" lvl="0" indent="-342900" algn="l">
+              <a:spcBef>
+                <a:spcPts val="1200"/>
+              </a:spcBef>
+              <a:spcAft>
+                <a:spcPts val="1200"/>
+              </a:spcAft>
+              <a:buFont typeface="Arial" panose="020B0604020202020204" pitchFamily="34" charset="0"/>
+              <a:buChar char="•"/>
+            </a:pPr>
+            <a:r>
+              <a:rPr lang="ru-RU" sz="1800" b="0" i="0" dirty="0" err="1">
+                <a:solidFill>
+                  <a:schemeClr val="tx1"/>
+                </a:solidFill>
+                <a:effectLst/>
+                <a:latin typeface="+mn-lt"/>
+              </a:rPr>
+              <a:t>student_id</a:t>
+            </a:r>
+            <a:r>
+              <a:rPr lang="ru-RU" sz="1800" b="0" i="0" dirty="0">
+                <a:solidFill>
+                  <a:schemeClr val="tx1"/>
+                </a:solidFill>
+                <a:effectLst/>
+                <a:latin typeface="+mn-lt"/>
+              </a:rPr>
+              <a:t> INT NOT NULL REFERENCES </a:t>
+            </a:r>
+            <a:r>
+              <a:rPr lang="ru-RU" sz="1800" b="0" i="0" dirty="0" err="1">
+                <a:solidFill>
+                  <a:schemeClr val="tx1"/>
+                </a:solidFill>
+                <a:effectLst/>
+                <a:latin typeface="+mn-lt"/>
+              </a:rPr>
+              <a:t>students</a:t>
+            </a:r>
+            <a:r>
+              <a:rPr lang="ru-RU" sz="1800" b="0" i="0" dirty="0">
+                <a:solidFill>
+                  <a:schemeClr val="tx1"/>
+                </a:solidFill>
+                <a:effectLst/>
+                <a:latin typeface="+mn-lt"/>
+              </a:rPr>
+              <a:t>(</a:t>
+            </a:r>
+            <a:r>
+              <a:rPr lang="ru-RU" sz="1800" b="0" i="0" dirty="0" err="1">
+                <a:solidFill>
+                  <a:schemeClr val="tx1"/>
+                </a:solidFill>
+                <a:effectLst/>
+                <a:latin typeface="+mn-lt"/>
+              </a:rPr>
+              <a:t>id</a:t>
+            </a:r>
+            <a:r>
+              <a:rPr lang="ru-RU" sz="1800" b="0" i="0" dirty="0">
+                <a:solidFill>
+                  <a:schemeClr val="tx1"/>
+                </a:solidFill>
+                <a:effectLst/>
+                <a:latin typeface="+mn-lt"/>
+              </a:rPr>
+              <a:t>) — внешний ключ. Он гарантирует, что заказ может ссылаться только на существующего студента.</a:t>
+            </a:r>
+          </a:p>
+          <a:p>
+            <a:pPr marL="0" marR="0" lvl="0" indent="-342900" algn="l">
+              <a:spcBef>
+                <a:spcPts val="450"/>
+              </a:spcBef>
+              <a:spcAft>
+                <a:spcPts val="1200"/>
+              </a:spcAft>
+              <a:buFont typeface="Arial" panose="020B0604020202020204" pitchFamily="34" charset="0"/>
+              <a:buChar char="•"/>
+            </a:pPr>
+            <a:r>
+              <a:rPr lang="ru-RU" sz="1800" b="0" i="0" dirty="0">
+                <a:solidFill>
+                  <a:schemeClr val="tx1"/>
+                </a:solidFill>
+                <a:effectLst/>
+                <a:latin typeface="+mn-lt"/>
+              </a:rPr>
+              <a:t>ON DELETE CASCADE — если студент будет удалён, все его заказы тоже удалятся. Это одна из стратегий ссылочной целостности </a:t>
+            </a:r>
+            <a:r>
+              <a:rPr lang="ru-RU" sz="1800" b="0" i="0" dirty="0" err="1">
+                <a:solidFill>
+                  <a:schemeClr val="tx1"/>
+                </a:solidFill>
+                <a:effectLst/>
+                <a:latin typeface="+mn-lt"/>
+              </a:rPr>
+              <a:t>PostgreSQL</a:t>
+            </a:r>
+            <a:r>
+              <a:rPr lang="ru-RU" sz="1800" b="0" i="0" dirty="0">
+                <a:solidFill>
+                  <a:schemeClr val="tx1"/>
+                </a:solidFill>
+                <a:effectLst/>
+                <a:latin typeface="+mn-lt"/>
+              </a:rPr>
+              <a:t>.</a:t>
+            </a:r>
+          </a:p>
+          <a:p>
+            <a:pPr marL="0" marR="0" lvl="0" indent="-342900" algn="l">
+              <a:spcBef>
+                <a:spcPts val="450"/>
+              </a:spcBef>
+              <a:spcAft>
+                <a:spcPts val="1200"/>
+              </a:spcAft>
+              <a:buFont typeface="Arial" panose="020B0604020202020204" pitchFamily="34" charset="0"/>
+              <a:buChar char="•"/>
+            </a:pPr>
+            <a:r>
+              <a:rPr lang="ru-RU" sz="1800" b="0" i="0" dirty="0">
+                <a:solidFill>
+                  <a:schemeClr val="tx1"/>
+                </a:solidFill>
+                <a:effectLst/>
+                <a:latin typeface="+mn-lt"/>
+              </a:rPr>
+              <a:t>NUMERIC(10, 2) — точный десятичный тип для денег (10 цифр всего, 2 после запятой). </a:t>
+            </a:r>
+            <a:r>
+              <a:rPr lang="ru-RU" sz="1800" b="1" i="0" dirty="0">
+                <a:solidFill>
+                  <a:schemeClr val="tx1"/>
+                </a:solidFill>
+                <a:effectLst/>
+                <a:latin typeface="+mn-lt"/>
+              </a:rPr>
+              <a:t>Важно:</a:t>
+            </a:r>
+            <a:r>
+              <a:rPr lang="ru-RU" sz="1800" b="0" i="0" dirty="0">
+                <a:solidFill>
+                  <a:schemeClr val="tx1"/>
+                </a:solidFill>
+                <a:effectLst/>
+                <a:latin typeface="+mn-lt"/>
+              </a:rPr>
+              <a:t> для денег никогда не используйте FLOAT — он неточен.</a:t>
+            </a:r>
+          </a:p>
+          <a:p>
+            <a:pPr marL="0" marR="0" lvl="0" indent="-342900" algn="l">
+              <a:spcBef>
+                <a:spcPts val="450"/>
+              </a:spcBef>
+              <a:spcAft>
+                <a:spcPts val="1200"/>
+              </a:spcAft>
+              <a:buFont typeface="Arial" panose="020B0604020202020204" pitchFamily="34" charset="0"/>
+              <a:buChar char="•"/>
+            </a:pPr>
+            <a:r>
+              <a:rPr lang="ru-RU" sz="1800" b="0" i="0" dirty="0" err="1">
+                <a:solidFill>
+                  <a:schemeClr val="tx1"/>
+                </a:solidFill>
+                <a:effectLst/>
+                <a:latin typeface="+mn-lt"/>
+              </a:rPr>
+              <a:t>created_at</a:t>
+            </a:r>
+            <a:r>
+              <a:rPr lang="ru-RU" sz="1800" b="0" i="0" dirty="0">
+                <a:solidFill>
+                  <a:schemeClr val="tx1"/>
+                </a:solidFill>
+                <a:effectLst/>
+                <a:latin typeface="+mn-lt"/>
+              </a:rPr>
+              <a:t> TIMESTAMPTZ DEFAULT NOW() — временная метка с часовым поясом, по умолчанию текущий момент.</a:t>
+            </a:r>
+            <a:endParaRPr lang="ru-RU" sz="1200" b="0" i="0" dirty="0">
+              <a:solidFill>
+                <a:srgbClr val="F9FAFB"/>
+              </a:solidFill>
+              <a:effectLst/>
+              <a:latin typeface="quote-cjk-patch"/>
+            </a:endParaRPr>
+          </a:p>
+        </p:txBody>
+      </p:sp>
+      <p:sp>
+        <p:nvSpPr>
+          <p:cNvPr id="10" name="TextBox 9">
+            <a:extLst>
+              <a:ext uri="{FF2B5EF4-FFF2-40B4-BE49-F238E27FC236}">
+                <a16:creationId xmlns:a16="http://schemas.microsoft.com/office/drawing/2014/main" id="{81BAA393-1CA8-ADBC-AE5D-A3E8FC9EBFE0}"/>
+              </a:ext>
+            </a:extLst>
+          </p:cNvPr>
+          <p:cNvSpPr txBox="1"/>
+          <p:nvPr/>
+        </p:nvSpPr>
+        <p:spPr>
+          <a:xfrm>
+            <a:off x="323349" y="757718"/>
+            <a:ext cx="6097002" cy="2031325"/>
+          </a:xfrm>
+          <a:prstGeom prst="rect">
+            <a:avLst/>
+          </a:prstGeom>
+          <a:noFill/>
+        </p:spPr>
+        <p:txBody>
+          <a:bodyPr wrap="square">
+            <a:spAutoFit/>
+          </a:bodyPr>
+          <a:lstStyle/>
+          <a:p>
+            <a:r>
+              <a:rPr lang="ru-RU" sz="1800" b="0" i="0" dirty="0">
+                <a:solidFill>
+                  <a:schemeClr val="tx1"/>
+                </a:solidFill>
+                <a:effectLst/>
+                <a:latin typeface="+mn-lt"/>
+              </a:rPr>
+              <a:t>До сих пор мы работали с одной таблицей. Но вся мощь реляционной модели — в </a:t>
+            </a:r>
+            <a:r>
+              <a:rPr lang="ru-RU" sz="1800" b="1" i="0" dirty="0">
+                <a:solidFill>
+                  <a:schemeClr val="tx1"/>
+                </a:solidFill>
+                <a:effectLst/>
+                <a:latin typeface="+mn-lt"/>
+              </a:rPr>
+              <a:t>связях между таблицами</a:t>
+            </a:r>
+            <a:r>
+              <a:rPr lang="ru-RU" sz="1800" b="0" i="0" dirty="0">
+                <a:solidFill>
+                  <a:schemeClr val="tx1"/>
+                </a:solidFill>
+                <a:effectLst/>
+                <a:latin typeface="+mn-lt"/>
+              </a:rPr>
+              <a:t>. И тут на сцену выходит </a:t>
+            </a:r>
+            <a:r>
+              <a:rPr lang="ru-RU" b="0" i="0" dirty="0">
+                <a:solidFill>
+                  <a:schemeClr val="tx1"/>
+                </a:solidFill>
+                <a:effectLst/>
+                <a:latin typeface="+mn-lt"/>
+              </a:rPr>
+              <a:t>JOIN</a:t>
+            </a:r>
+            <a:r>
+              <a:rPr lang="ru-RU" sz="1800" b="0" i="0" dirty="0">
+                <a:solidFill>
+                  <a:schemeClr val="tx1"/>
+                </a:solidFill>
+                <a:effectLst/>
+                <a:latin typeface="+mn-lt"/>
+              </a:rPr>
+              <a:t>.</a:t>
+            </a:r>
+          </a:p>
+          <a:p>
+            <a:endParaRPr lang="ru-RU" dirty="0"/>
+          </a:p>
+          <a:p>
+            <a:r>
+              <a:rPr lang="ru-RU" dirty="0"/>
+              <a:t>Заведем предварительно  еще одну таблицу (</a:t>
+            </a:r>
+            <a:br>
+              <a:rPr lang="ru-RU" dirty="0"/>
+            </a:br>
+            <a:r>
+              <a:rPr lang="ru-RU" dirty="0"/>
+              <a:t>допустим, заказов в университетской столовой) –</a:t>
+            </a:r>
+            <a:br>
+              <a:rPr lang="ru-RU" dirty="0"/>
+            </a:br>
+            <a:r>
+              <a:rPr lang="en-US" b="1" dirty="0"/>
+              <a:t>orders</a:t>
+            </a:r>
+            <a:r>
+              <a:rPr lang="en-US" dirty="0"/>
+              <a:t>.</a:t>
+            </a:r>
+            <a:endParaRPr lang="ru-RU" dirty="0"/>
+          </a:p>
+        </p:txBody>
+      </p:sp>
+      <p:pic>
+        <p:nvPicPr>
+          <p:cNvPr id="12" name="Рисунок 11">
+            <a:extLst>
+              <a:ext uri="{FF2B5EF4-FFF2-40B4-BE49-F238E27FC236}">
+                <a16:creationId xmlns:a16="http://schemas.microsoft.com/office/drawing/2014/main" id="{0C863ED1-2480-89B4-B7F0-18EBDA7D5AC1}"/>
+              </a:ext>
+            </a:extLst>
+          </p:cNvPr>
+          <p:cNvPicPr>
+            <a:picLocks noChangeAspect="1"/>
+          </p:cNvPicPr>
+          <p:nvPr/>
+        </p:nvPicPr>
+        <p:blipFill>
+          <a:blip r:embed="rId3"/>
+          <a:stretch>
+            <a:fillRect/>
+          </a:stretch>
+        </p:blipFill>
+        <p:spPr>
+          <a:xfrm>
+            <a:off x="374483" y="3513628"/>
+            <a:ext cx="4397962" cy="2586654"/>
+          </a:xfrm>
+          <a:prstGeom prst="rect">
+            <a:avLst/>
+          </a:prstGeom>
+        </p:spPr>
+      </p:pic>
+    </p:spTree>
+    <p:extLst>
+      <p:ext uri="{BB962C8B-B14F-4D97-AF65-F5344CB8AC3E}">
+        <p14:creationId xmlns:p14="http://schemas.microsoft.com/office/powerpoint/2010/main" val="3862043198"/>
+      </p:ext>
+    </p:extLst>
+  </p:cSld>
+  <p:clrMapOvr>
+    <a:masterClrMapping/>
+  </p:clrMapOvr>
+</p:sld>
+</file>
+
+<file path=ppt/slides/slide15.xml><?xml version="1.0" encoding="utf-8"?>
+<p:sld xmlns:a="http://schemas.openxmlformats.org/drawingml/2006/main" xmlns:r="http://schemas.openxmlformats.org/officeDocument/2006/relationships" xmlns:p="http://schemas.openxmlformats.org/presentationml/2006/main">
+  <p:cSld>
+    <p:spTree>
+      <p:nvGrpSpPr>
+        <p:cNvPr id="1" name="">
+          <a:extLst>
+            <a:ext uri="{FF2B5EF4-FFF2-40B4-BE49-F238E27FC236}">
+              <a16:creationId xmlns:a16="http://schemas.microsoft.com/office/drawing/2014/main" id="{DC7E991E-CFF4-D634-ECF2-D9399FBCC171}"/>
+            </a:ext>
+          </a:extLst>
+        </p:cNvPr>
+        <p:cNvGrpSpPr/>
+        <p:nvPr/>
+      </p:nvGrpSpPr>
+      <p:grpSpPr>
+        <a:xfrm>
+          <a:off x="0" y="0"/>
+          <a:ext cx="0" cy="0"/>
+          <a:chOff x="0" y="0"/>
+          <a:chExt cx="0" cy="0"/>
+        </a:xfrm>
+      </p:grpSpPr>
+      <p:sp>
+        <p:nvSpPr>
+          <p:cNvPr id="2" name="Title 1">
+            <a:extLst>
+              <a:ext uri="{FF2B5EF4-FFF2-40B4-BE49-F238E27FC236}">
+                <a16:creationId xmlns:a16="http://schemas.microsoft.com/office/drawing/2014/main" id="{8057BF08-206C-2043-A6DA-22725E21FCBC}"/>
+              </a:ext>
+            </a:extLst>
+          </p:cNvPr>
+          <p:cNvSpPr>
+            <a:spLocks noGrp="1"/>
+          </p:cNvSpPr>
+          <p:nvPr>
+            <p:ph type="title"/>
+          </p:nvPr>
+        </p:nvSpPr>
+        <p:spPr>
+          <a:xfrm>
+            <a:off x="808906" y="236622"/>
+            <a:ext cx="9072000" cy="332399"/>
+          </a:xfrm>
+        </p:spPr>
+        <p:txBody>
+          <a:bodyPr/>
+          <a:lstStyle/>
+          <a:p>
+            <a:r>
+              <a:rPr lang="en-US" dirty="0"/>
+              <a:t>Inner join – </a:t>
+            </a:r>
+            <a:r>
+              <a:rPr lang="ru-RU" dirty="0"/>
+              <a:t>только совпадения</a:t>
+            </a:r>
+            <a:endParaRPr lang="en-US" dirty="0"/>
+          </a:p>
+        </p:txBody>
+      </p:sp>
+      <p:pic>
+        <p:nvPicPr>
+          <p:cNvPr id="4" name="Рисунок 3">
+            <a:extLst>
+              <a:ext uri="{FF2B5EF4-FFF2-40B4-BE49-F238E27FC236}">
+                <a16:creationId xmlns:a16="http://schemas.microsoft.com/office/drawing/2014/main" id="{16E8BFD2-E780-3C2E-C165-4FE4ECB8921A}"/>
+              </a:ext>
+            </a:extLst>
+          </p:cNvPr>
+          <p:cNvPicPr>
+            <a:picLocks noChangeAspect="1"/>
+          </p:cNvPicPr>
+          <p:nvPr/>
+        </p:nvPicPr>
+        <p:blipFill>
+          <a:blip r:embed="rId2"/>
+          <a:stretch>
+            <a:fillRect/>
+          </a:stretch>
+        </p:blipFill>
+        <p:spPr>
+          <a:xfrm>
+            <a:off x="265696" y="3332246"/>
+            <a:ext cx="7658100" cy="3105150"/>
+          </a:xfrm>
+          <a:prstGeom prst="rect">
+            <a:avLst/>
+          </a:prstGeom>
+        </p:spPr>
+      </p:pic>
+      <p:sp>
+        <p:nvSpPr>
+          <p:cNvPr id="7" name="TextBox 6">
+            <a:extLst>
+              <a:ext uri="{FF2B5EF4-FFF2-40B4-BE49-F238E27FC236}">
+                <a16:creationId xmlns:a16="http://schemas.microsoft.com/office/drawing/2014/main" id="{3AFBE8E9-B332-0D24-C12C-9DADF20192F1}"/>
+              </a:ext>
+            </a:extLst>
+          </p:cNvPr>
+          <p:cNvSpPr txBox="1"/>
+          <p:nvPr/>
+        </p:nvSpPr>
+        <p:spPr>
+          <a:xfrm>
+            <a:off x="1015165" y="934944"/>
+            <a:ext cx="9072000" cy="1913344"/>
+          </a:xfrm>
+          <a:prstGeom prst="rect">
+            <a:avLst/>
+          </a:prstGeom>
+          <a:noFill/>
+        </p:spPr>
+        <p:txBody>
+          <a:bodyPr wrap="square">
+            <a:spAutoFit/>
+          </a:bodyPr>
+          <a:lstStyle/>
+          <a:p>
+            <a:pPr marL="0" marR="0" lvl="0" indent="-342900" algn="l">
+              <a:spcBef>
+                <a:spcPts val="1200"/>
+              </a:spcBef>
+              <a:spcAft>
+                <a:spcPts val="1200"/>
+              </a:spcAft>
+              <a:buFont typeface="Arial" panose="020B0604020202020204" pitchFamily="34" charset="0"/>
+              <a:buChar char="•"/>
+            </a:pPr>
+            <a:r>
+              <a:rPr lang="ru-RU" sz="1800" b="0" i="0" dirty="0">
+                <a:solidFill>
+                  <a:schemeClr val="tx1"/>
+                </a:solidFill>
+                <a:effectLst/>
+                <a:latin typeface="+mn-lt"/>
+              </a:rPr>
+              <a:t>s и o — </a:t>
+            </a:r>
+            <a:r>
+              <a:rPr lang="ru-RU" sz="1800" b="0" i="0" dirty="0" err="1">
+                <a:solidFill>
+                  <a:schemeClr val="tx1"/>
+                </a:solidFill>
+                <a:effectLst/>
+                <a:latin typeface="+mn-lt"/>
+              </a:rPr>
+              <a:t>алиасы</a:t>
+            </a:r>
+            <a:r>
+              <a:rPr lang="ru-RU" sz="1800" b="0" i="0" dirty="0">
+                <a:solidFill>
+                  <a:schemeClr val="tx1"/>
+                </a:solidFill>
+                <a:effectLst/>
+                <a:latin typeface="+mn-lt"/>
+              </a:rPr>
+              <a:t> таблиц, чтобы не писать полные имена.</a:t>
+            </a:r>
+          </a:p>
+          <a:p>
+            <a:pPr marL="0" marR="0" lvl="0" indent="-342900" algn="l">
+              <a:spcBef>
+                <a:spcPts val="450"/>
+              </a:spcBef>
+              <a:spcAft>
+                <a:spcPts val="1200"/>
+              </a:spcAft>
+              <a:buFont typeface="Arial" panose="020B0604020202020204" pitchFamily="34" charset="0"/>
+              <a:buChar char="•"/>
+            </a:pPr>
+            <a:r>
+              <a:rPr lang="ru-RU" sz="1800" b="0" i="0" dirty="0">
+                <a:solidFill>
+                  <a:schemeClr val="tx1"/>
+                </a:solidFill>
+                <a:effectLst/>
+                <a:latin typeface="+mn-lt"/>
+              </a:rPr>
+              <a:t>ON s.id = </a:t>
+            </a:r>
+            <a:r>
+              <a:rPr lang="ru-RU" sz="1800" b="0" i="0" dirty="0" err="1">
+                <a:solidFill>
+                  <a:schemeClr val="tx1"/>
+                </a:solidFill>
+                <a:effectLst/>
+                <a:latin typeface="+mn-lt"/>
+              </a:rPr>
+              <a:t>o.student_id</a:t>
+            </a:r>
+            <a:r>
+              <a:rPr lang="ru-RU" sz="1800" b="0" i="0" dirty="0">
+                <a:solidFill>
+                  <a:schemeClr val="tx1"/>
+                </a:solidFill>
+                <a:effectLst/>
+                <a:latin typeface="+mn-lt"/>
+              </a:rPr>
+              <a:t> — условие соединения (по какому признаку связываем строки).</a:t>
+            </a:r>
+          </a:p>
+          <a:p>
+            <a:pPr marL="0" marR="0" lvl="0" indent="-342900" algn="l">
+              <a:spcBef>
+                <a:spcPts val="450"/>
+              </a:spcBef>
+              <a:spcAft>
+                <a:spcPts val="1200"/>
+              </a:spcAft>
+              <a:buFont typeface="Arial" panose="020B0604020202020204" pitchFamily="34" charset="0"/>
+              <a:buChar char="•"/>
+            </a:pPr>
+            <a:r>
+              <a:rPr lang="ru-RU" sz="1800" b="0" i="0" dirty="0">
+                <a:solidFill>
+                  <a:schemeClr val="tx1"/>
+                </a:solidFill>
+                <a:effectLst/>
+                <a:latin typeface="+mn-lt"/>
+              </a:rPr>
+              <a:t>В результат попадут только те строки, где есть </a:t>
+            </a:r>
+            <a:r>
+              <a:rPr lang="ru-RU" sz="1800" b="1" i="0" dirty="0">
+                <a:solidFill>
+                  <a:schemeClr val="tx1"/>
+                </a:solidFill>
+                <a:effectLst/>
+                <a:latin typeface="+mn-lt"/>
+              </a:rPr>
+              <a:t>совпадение</a:t>
+            </a:r>
+            <a:r>
+              <a:rPr lang="ru-RU" sz="1800" b="0" i="0" dirty="0">
+                <a:solidFill>
+                  <a:schemeClr val="tx1"/>
+                </a:solidFill>
+                <a:effectLst/>
+                <a:latin typeface="+mn-lt"/>
+              </a:rPr>
+              <a:t> в обеих таблицах. Если у студента нет заказов, он не попадёт в результат.</a:t>
+            </a:r>
+            <a:endParaRPr lang="ru-RU" sz="1200" b="0" i="0" dirty="0">
+              <a:solidFill>
+                <a:srgbClr val="F9FAFB"/>
+              </a:solidFill>
+              <a:effectLst/>
+              <a:latin typeface="quote-cjk-patch"/>
+            </a:endParaRPr>
+          </a:p>
+        </p:txBody>
+      </p:sp>
+    </p:spTree>
+    <p:extLst>
+      <p:ext uri="{BB962C8B-B14F-4D97-AF65-F5344CB8AC3E}">
+        <p14:creationId xmlns:p14="http://schemas.microsoft.com/office/powerpoint/2010/main" val="934060775"/>
+      </p:ext>
+    </p:extLst>
+  </p:cSld>
+  <p:clrMapOvr>
+    <a:masterClrMapping/>
+  </p:clrMapOvr>
+</p:sld>
+</file>
+
+<file path=ppt/slides/slide16.xml><?xml version="1.0" encoding="utf-8"?>
+<p:sld xmlns:a="http://schemas.openxmlformats.org/drawingml/2006/main" xmlns:r="http://schemas.openxmlformats.org/officeDocument/2006/relationships" xmlns:p="http://schemas.openxmlformats.org/presentationml/2006/main">
+  <p:cSld>
+    <p:spTree>
+      <p:nvGrpSpPr>
+        <p:cNvPr id="1" name="">
+          <a:extLst>
+            <a:ext uri="{FF2B5EF4-FFF2-40B4-BE49-F238E27FC236}">
+              <a16:creationId xmlns:a16="http://schemas.microsoft.com/office/drawing/2014/main" id="{7C1092AE-5A41-493A-253B-8943387E8181}"/>
+            </a:ext>
+          </a:extLst>
+        </p:cNvPr>
+        <p:cNvGrpSpPr/>
+        <p:nvPr/>
+      </p:nvGrpSpPr>
+      <p:grpSpPr>
+        <a:xfrm>
+          <a:off x="0" y="0"/>
+          <a:ext cx="0" cy="0"/>
+          <a:chOff x="0" y="0"/>
+          <a:chExt cx="0" cy="0"/>
+        </a:xfrm>
+      </p:grpSpPr>
+      <p:sp>
+        <p:nvSpPr>
+          <p:cNvPr id="2" name="Title 1">
+            <a:extLst>
+              <a:ext uri="{FF2B5EF4-FFF2-40B4-BE49-F238E27FC236}">
+                <a16:creationId xmlns:a16="http://schemas.microsoft.com/office/drawing/2014/main" id="{DD333E5B-5C7D-F07D-51A6-062CC4119588}"/>
+              </a:ext>
+            </a:extLst>
+          </p:cNvPr>
+          <p:cNvSpPr>
+            <a:spLocks noGrp="1"/>
+          </p:cNvSpPr>
+          <p:nvPr>
+            <p:ph type="title"/>
+          </p:nvPr>
+        </p:nvSpPr>
+        <p:spPr>
+          <a:xfrm>
+            <a:off x="808906" y="236622"/>
+            <a:ext cx="9072000" cy="332399"/>
+          </a:xfrm>
+        </p:spPr>
+        <p:txBody>
+          <a:bodyPr/>
+          <a:lstStyle/>
+          <a:p>
+            <a:r>
+              <a:rPr lang="en-US" dirty="0"/>
+              <a:t>left join – </a:t>
+            </a:r>
+            <a:r>
+              <a:rPr lang="ru-RU" dirty="0"/>
+              <a:t>все строки левой таблицы</a:t>
+            </a:r>
+            <a:endParaRPr lang="en-US" dirty="0"/>
+          </a:p>
+        </p:txBody>
+      </p:sp>
+      <p:pic>
+        <p:nvPicPr>
+          <p:cNvPr id="5" name="Рисунок 4">
+            <a:extLst>
+              <a:ext uri="{FF2B5EF4-FFF2-40B4-BE49-F238E27FC236}">
+                <a16:creationId xmlns:a16="http://schemas.microsoft.com/office/drawing/2014/main" id="{655FCF4C-A447-7985-9AFC-8C839177382A}"/>
+              </a:ext>
+            </a:extLst>
+          </p:cNvPr>
+          <p:cNvPicPr>
+            <a:picLocks noChangeAspect="1"/>
+          </p:cNvPicPr>
+          <p:nvPr/>
+        </p:nvPicPr>
+        <p:blipFill>
+          <a:blip r:embed="rId2"/>
+          <a:stretch>
+            <a:fillRect/>
+          </a:stretch>
+        </p:blipFill>
+        <p:spPr>
+          <a:xfrm>
+            <a:off x="266950" y="3900215"/>
+            <a:ext cx="5646571" cy="2673538"/>
+          </a:xfrm>
+          <a:prstGeom prst="rect">
+            <a:avLst/>
+          </a:prstGeom>
+        </p:spPr>
+      </p:pic>
+      <p:sp>
+        <p:nvSpPr>
+          <p:cNvPr id="8" name="TextBox 7">
+            <a:extLst>
+              <a:ext uri="{FF2B5EF4-FFF2-40B4-BE49-F238E27FC236}">
+                <a16:creationId xmlns:a16="http://schemas.microsoft.com/office/drawing/2014/main" id="{A20B6115-C7A2-DFA7-A95A-0CAE606DE8ED}"/>
+              </a:ext>
+            </a:extLst>
+          </p:cNvPr>
+          <p:cNvSpPr txBox="1"/>
+          <p:nvPr/>
+        </p:nvSpPr>
+        <p:spPr>
+          <a:xfrm>
+            <a:off x="347411" y="1790336"/>
+            <a:ext cx="6097002" cy="1477328"/>
+          </a:xfrm>
+          <a:prstGeom prst="rect">
+            <a:avLst/>
+          </a:prstGeom>
+          <a:noFill/>
+        </p:spPr>
+        <p:txBody>
+          <a:bodyPr wrap="square">
+            <a:spAutoFit/>
+          </a:bodyPr>
+          <a:lstStyle/>
+          <a:p>
+            <a:r>
+              <a:rPr lang="ru-RU" sz="1800" b="0" i="0" dirty="0">
+                <a:solidFill>
+                  <a:schemeClr val="tx1"/>
+                </a:solidFill>
+                <a:effectLst/>
+                <a:latin typeface="+mn-lt"/>
+              </a:rPr>
+              <a:t>Здесь в результат попадут </a:t>
+            </a:r>
+            <a:r>
+              <a:rPr lang="ru-RU" sz="1800" b="1" i="0" dirty="0">
+                <a:solidFill>
+                  <a:schemeClr val="tx1"/>
+                </a:solidFill>
+                <a:effectLst/>
+                <a:latin typeface="+mn-lt"/>
+              </a:rPr>
+              <a:t>все</a:t>
+            </a:r>
+            <a:r>
+              <a:rPr lang="ru-RU" sz="1800" b="0" i="0" dirty="0">
+                <a:solidFill>
+                  <a:schemeClr val="tx1"/>
+                </a:solidFill>
+                <a:effectLst/>
+                <a:latin typeface="+mn-lt"/>
+              </a:rPr>
+              <a:t> студенты из левой таблицы</a:t>
+            </a:r>
+            <a:r>
+              <a:rPr lang="en-US" sz="1800" b="0" i="0" dirty="0">
+                <a:solidFill>
+                  <a:schemeClr val="tx1"/>
+                </a:solidFill>
+                <a:effectLst/>
+                <a:latin typeface="+mn-lt"/>
+              </a:rPr>
+              <a:t> (</a:t>
+            </a:r>
+            <a:r>
+              <a:rPr lang="en-US" dirty="0" err="1"/>
+              <a:t>university.students</a:t>
+            </a:r>
+            <a:r>
+              <a:rPr lang="en-US" dirty="0"/>
+              <a:t>)</a:t>
+            </a:r>
+            <a:r>
+              <a:rPr lang="ru-RU" sz="1800" b="0" i="0" dirty="0">
+                <a:solidFill>
+                  <a:schemeClr val="tx1"/>
+                </a:solidFill>
+                <a:effectLst/>
+                <a:latin typeface="+mn-lt"/>
+              </a:rPr>
+              <a:t>, даже если у них нет заказов. У таких студентов в столбце </a:t>
+            </a:r>
+            <a:r>
+              <a:rPr lang="ru-RU" b="0" i="0" dirty="0" err="1">
+                <a:solidFill>
+                  <a:schemeClr val="tx1"/>
+                </a:solidFill>
+                <a:effectLst/>
+                <a:latin typeface="+mn-lt"/>
+              </a:rPr>
+              <a:t>amount</a:t>
+            </a:r>
+            <a:r>
+              <a:rPr lang="ru-RU" sz="1800" b="0" i="0" dirty="0">
+                <a:solidFill>
+                  <a:schemeClr val="tx1"/>
+                </a:solidFill>
+                <a:effectLst/>
+                <a:latin typeface="+mn-lt"/>
+              </a:rPr>
+              <a:t> будет </a:t>
+            </a:r>
+            <a:r>
+              <a:rPr lang="ru-RU" b="0" i="0" dirty="0">
+                <a:solidFill>
+                  <a:schemeClr val="tx1"/>
+                </a:solidFill>
+                <a:effectLst/>
+                <a:latin typeface="+mn-lt"/>
+              </a:rPr>
+              <a:t>NULL</a:t>
+            </a:r>
+            <a:r>
+              <a:rPr lang="ru-RU" sz="1800" b="0" i="0" dirty="0">
+                <a:solidFill>
+                  <a:schemeClr val="tx1"/>
+                </a:solidFill>
+                <a:effectLst/>
+                <a:latin typeface="+mn-lt"/>
+              </a:rPr>
+              <a:t>. Это очень полезно, когда нужно найти, например, «студентов без заказов»:</a:t>
+            </a:r>
+            <a:endParaRPr lang="ru-RU" dirty="0"/>
+          </a:p>
+        </p:txBody>
+      </p:sp>
+    </p:spTree>
+    <p:extLst>
+      <p:ext uri="{BB962C8B-B14F-4D97-AF65-F5344CB8AC3E}">
+        <p14:creationId xmlns:p14="http://schemas.microsoft.com/office/powerpoint/2010/main" val="4106734674"/>
+      </p:ext>
+    </p:extLst>
+  </p:cSld>
+  <p:clrMapOvr>
+    <a:masterClrMapping/>
+  </p:clrMapOvr>
+</p:sld>
+</file>
+
+<file path=ppt/slides/slide17.xml><?xml version="1.0" encoding="utf-8"?>
+<p:sld xmlns:a="http://schemas.openxmlformats.org/drawingml/2006/main" xmlns:r="http://schemas.openxmlformats.org/officeDocument/2006/relationships" xmlns:p="http://schemas.openxmlformats.org/presentationml/2006/main">
+  <p:cSld>
+    <p:spTree>
+      <p:nvGrpSpPr>
+        <p:cNvPr id="1" name="">
+          <a:extLst>
+            <a:ext uri="{FF2B5EF4-FFF2-40B4-BE49-F238E27FC236}">
+              <a16:creationId xmlns:a16="http://schemas.microsoft.com/office/drawing/2014/main" id="{F4D50E2E-1737-FA5B-49EE-F3025EA6E80F}"/>
+            </a:ext>
+          </a:extLst>
+        </p:cNvPr>
+        <p:cNvGrpSpPr/>
+        <p:nvPr/>
+      </p:nvGrpSpPr>
+      <p:grpSpPr>
+        <a:xfrm>
+          <a:off x="0" y="0"/>
+          <a:ext cx="0" cy="0"/>
+          <a:chOff x="0" y="0"/>
+          <a:chExt cx="0" cy="0"/>
+        </a:xfrm>
+      </p:grpSpPr>
+      <p:sp>
+        <p:nvSpPr>
+          <p:cNvPr id="2" name="Title 1">
+            <a:extLst>
+              <a:ext uri="{FF2B5EF4-FFF2-40B4-BE49-F238E27FC236}">
+                <a16:creationId xmlns:a16="http://schemas.microsoft.com/office/drawing/2014/main" id="{DCE08BB7-E0C4-DE7C-5AEA-A095F3625521}"/>
+              </a:ext>
+            </a:extLst>
+          </p:cNvPr>
+          <p:cNvSpPr>
+            <a:spLocks noGrp="1"/>
+          </p:cNvSpPr>
+          <p:nvPr>
+            <p:ph type="title"/>
+          </p:nvPr>
+        </p:nvSpPr>
+        <p:spPr>
+          <a:xfrm>
+            <a:off x="808906" y="236622"/>
+            <a:ext cx="9072000" cy="332399"/>
+          </a:xfrm>
+        </p:spPr>
+        <p:txBody>
+          <a:bodyPr/>
+          <a:lstStyle/>
+          <a:p>
+            <a:r>
+              <a:rPr lang="en-US" dirty="0"/>
+              <a:t>Right join – </a:t>
+            </a:r>
+            <a:r>
+              <a:rPr lang="ru-RU" dirty="0"/>
+              <a:t>все строки правой таблицы</a:t>
+            </a:r>
+            <a:endParaRPr lang="en-US" dirty="0"/>
+          </a:p>
+        </p:txBody>
+      </p:sp>
+      <p:pic>
+        <p:nvPicPr>
+          <p:cNvPr id="4" name="Рисунок 3">
+            <a:extLst>
+              <a:ext uri="{FF2B5EF4-FFF2-40B4-BE49-F238E27FC236}">
+                <a16:creationId xmlns:a16="http://schemas.microsoft.com/office/drawing/2014/main" id="{9DA3EDE7-2966-B3FF-BC20-74EB466574D5}"/>
+              </a:ext>
+            </a:extLst>
+          </p:cNvPr>
+          <p:cNvPicPr>
+            <a:picLocks noChangeAspect="1"/>
+          </p:cNvPicPr>
+          <p:nvPr/>
+        </p:nvPicPr>
+        <p:blipFill>
+          <a:blip r:embed="rId2"/>
+          <a:stretch>
+            <a:fillRect/>
+          </a:stretch>
+        </p:blipFill>
+        <p:spPr>
+          <a:xfrm>
+            <a:off x="459991" y="3165809"/>
+            <a:ext cx="7391400" cy="3028950"/>
+          </a:xfrm>
+          <a:prstGeom prst="rect">
+            <a:avLst/>
+          </a:prstGeom>
+        </p:spPr>
+      </p:pic>
+    </p:spTree>
+    <p:extLst>
+      <p:ext uri="{BB962C8B-B14F-4D97-AF65-F5344CB8AC3E}">
+        <p14:creationId xmlns:p14="http://schemas.microsoft.com/office/powerpoint/2010/main" val="2723423470"/>
+      </p:ext>
+    </p:extLst>
+  </p:cSld>
+  <p:clrMapOvr>
+    <a:masterClrMapping/>
+  </p:clrMapOvr>
+</p:sld>
+</file>
+
+<file path=ppt/slides/slide18.xml><?xml version="1.0" encoding="utf-8"?>
+<p:sld xmlns:a="http://schemas.openxmlformats.org/drawingml/2006/main" xmlns:r="http://schemas.openxmlformats.org/officeDocument/2006/relationships" xmlns:p="http://schemas.openxmlformats.org/presentationml/2006/main">
+  <p:cSld>
+    <p:spTree>
+      <p:nvGrpSpPr>
+        <p:cNvPr id="1" name="">
+          <a:extLst>
+            <a:ext uri="{FF2B5EF4-FFF2-40B4-BE49-F238E27FC236}">
+              <a16:creationId xmlns:a16="http://schemas.microsoft.com/office/drawing/2014/main" id="{3F80E071-58F9-781A-8D24-57AE2D96B151}"/>
+            </a:ext>
+          </a:extLst>
+        </p:cNvPr>
+        <p:cNvGrpSpPr/>
+        <p:nvPr/>
+      </p:nvGrpSpPr>
+      <p:grpSpPr>
+        <a:xfrm>
+          <a:off x="0" y="0"/>
+          <a:ext cx="0" cy="0"/>
+          <a:chOff x="0" y="0"/>
+          <a:chExt cx="0" cy="0"/>
+        </a:xfrm>
+      </p:grpSpPr>
+      <p:sp>
+        <p:nvSpPr>
+          <p:cNvPr id="2" name="Title 1">
+            <a:extLst>
+              <a:ext uri="{FF2B5EF4-FFF2-40B4-BE49-F238E27FC236}">
+                <a16:creationId xmlns:a16="http://schemas.microsoft.com/office/drawing/2014/main" id="{CFF4815A-955D-52CE-9916-96C890074552}"/>
+              </a:ext>
+            </a:extLst>
+          </p:cNvPr>
+          <p:cNvSpPr>
+            <a:spLocks noGrp="1"/>
+          </p:cNvSpPr>
+          <p:nvPr>
+            <p:ph type="title"/>
+          </p:nvPr>
+        </p:nvSpPr>
+        <p:spPr>
+          <a:xfrm>
+            <a:off x="808906" y="236622"/>
+            <a:ext cx="9072000" cy="332399"/>
+          </a:xfrm>
+        </p:spPr>
+        <p:txBody>
+          <a:bodyPr/>
+          <a:lstStyle/>
+          <a:p>
+            <a:r>
+              <a:rPr lang="en-US" dirty="0"/>
+              <a:t>Full outer join – </a:t>
+            </a:r>
+            <a:r>
+              <a:rPr lang="ru-RU" dirty="0"/>
+              <a:t>все строки с обеих сторон</a:t>
+            </a:r>
+            <a:endParaRPr lang="en-US" dirty="0"/>
+          </a:p>
+        </p:txBody>
+      </p:sp>
+      <p:pic>
+        <p:nvPicPr>
+          <p:cNvPr id="5" name="Рисунок 4">
+            <a:extLst>
+              <a:ext uri="{FF2B5EF4-FFF2-40B4-BE49-F238E27FC236}">
+                <a16:creationId xmlns:a16="http://schemas.microsoft.com/office/drawing/2014/main" id="{51A56D82-6658-D2B9-5940-712E665CD505}"/>
+              </a:ext>
+            </a:extLst>
+          </p:cNvPr>
+          <p:cNvPicPr>
+            <a:picLocks noChangeAspect="1"/>
+          </p:cNvPicPr>
+          <p:nvPr/>
+        </p:nvPicPr>
+        <p:blipFill>
+          <a:blip r:embed="rId2"/>
+          <a:stretch>
+            <a:fillRect/>
+          </a:stretch>
+        </p:blipFill>
+        <p:spPr>
+          <a:xfrm>
+            <a:off x="567740" y="2578769"/>
+            <a:ext cx="8048625" cy="3276600"/>
+          </a:xfrm>
+          <a:prstGeom prst="rect">
+            <a:avLst/>
+          </a:prstGeom>
+        </p:spPr>
+      </p:pic>
+    </p:spTree>
+    <p:extLst>
+      <p:ext uri="{BB962C8B-B14F-4D97-AF65-F5344CB8AC3E}">
+        <p14:creationId xmlns:p14="http://schemas.microsoft.com/office/powerpoint/2010/main" val="1240239438"/>
+      </p:ext>
+    </p:extLst>
+  </p:cSld>
+  <p:clrMapOvr>
+    <a:masterClrMapping/>
+  </p:clrMapOvr>
+</p:sld>
+</file>
+
+<file path=ppt/slides/slide19.xml><?xml version="1.0" encoding="utf-8"?>
+<p:sld xmlns:a="http://schemas.openxmlformats.org/drawingml/2006/main" xmlns:r="http://schemas.openxmlformats.org/officeDocument/2006/relationships" xmlns:p="http://schemas.openxmlformats.org/presentationml/2006/main">
+  <p:cSld>
+    <p:spTree>
+      <p:nvGrpSpPr>
+        <p:cNvPr id="1" name="">
+          <a:extLst>
+            <a:ext uri="{FF2B5EF4-FFF2-40B4-BE49-F238E27FC236}">
+              <a16:creationId xmlns:a16="http://schemas.microsoft.com/office/drawing/2014/main" id="{478E6333-B749-7AB5-48A4-29C131F8D69D}"/>
+            </a:ext>
+          </a:extLst>
+        </p:cNvPr>
+        <p:cNvGrpSpPr/>
+        <p:nvPr/>
+      </p:nvGrpSpPr>
+      <p:grpSpPr>
+        <a:xfrm>
+          <a:off x="0" y="0"/>
+          <a:ext cx="0" cy="0"/>
+          <a:chOff x="0" y="0"/>
+          <a:chExt cx="0" cy="0"/>
+        </a:xfrm>
+      </p:grpSpPr>
+      <p:sp>
+        <p:nvSpPr>
+          <p:cNvPr id="2" name="Title 1">
+            <a:extLst>
+              <a:ext uri="{FF2B5EF4-FFF2-40B4-BE49-F238E27FC236}">
+                <a16:creationId xmlns:a16="http://schemas.microsoft.com/office/drawing/2014/main" id="{9158D102-1BD7-AFE1-61CE-D5DF187DCCC1}"/>
+              </a:ext>
+            </a:extLst>
+          </p:cNvPr>
+          <p:cNvSpPr>
+            <a:spLocks noGrp="1"/>
+          </p:cNvSpPr>
+          <p:nvPr>
+            <p:ph type="title"/>
+          </p:nvPr>
+        </p:nvSpPr>
+        <p:spPr>
+          <a:xfrm>
+            <a:off x="808906" y="236622"/>
+            <a:ext cx="9072000" cy="332399"/>
+          </a:xfrm>
+        </p:spPr>
+        <p:txBody>
+          <a:bodyPr/>
+          <a:lstStyle/>
+          <a:p>
+            <a:r>
+              <a:rPr lang="en-US" dirty="0"/>
+              <a:t>Cross join – </a:t>
+            </a:r>
+            <a:r>
+              <a:rPr lang="ru-RU" dirty="0"/>
+              <a:t>перекрестное соединение</a:t>
+            </a:r>
+            <a:endParaRPr lang="en-US" dirty="0"/>
+          </a:p>
+        </p:txBody>
+      </p:sp>
+      <p:pic>
+        <p:nvPicPr>
+          <p:cNvPr id="4" name="Рисунок 3">
+            <a:extLst>
+              <a:ext uri="{FF2B5EF4-FFF2-40B4-BE49-F238E27FC236}">
+                <a16:creationId xmlns:a16="http://schemas.microsoft.com/office/drawing/2014/main" id="{67B5CD96-F131-30FE-0DF1-6985AD4813F2}"/>
+              </a:ext>
+            </a:extLst>
+          </p:cNvPr>
+          <p:cNvPicPr>
+            <a:picLocks noChangeAspect="1"/>
+          </p:cNvPicPr>
+          <p:nvPr/>
+        </p:nvPicPr>
+        <p:blipFill>
+          <a:blip r:embed="rId2"/>
+          <a:stretch>
+            <a:fillRect/>
+          </a:stretch>
+        </p:blipFill>
+        <p:spPr>
+          <a:xfrm>
+            <a:off x="372856" y="2790574"/>
+            <a:ext cx="9944100" cy="3743325"/>
+          </a:xfrm>
+          <a:prstGeom prst="rect">
+            <a:avLst/>
+          </a:prstGeom>
+        </p:spPr>
+      </p:pic>
+    </p:spTree>
+    <p:extLst>
+      <p:ext uri="{BB962C8B-B14F-4D97-AF65-F5344CB8AC3E}">
+        <p14:creationId xmlns:p14="http://schemas.microsoft.com/office/powerpoint/2010/main" val="769719506"/>
       </p:ext>
     </p:extLst>
   </p:cSld>
@@ -29051,6 +30898,5304 @@
 </p:sld>
 </file>
 
+<file path=ppt/slides/slide20.xml><?xml version="1.0" encoding="utf-8"?>
+<p:sld xmlns:a="http://schemas.openxmlformats.org/drawingml/2006/main" xmlns:r="http://schemas.openxmlformats.org/officeDocument/2006/relationships" xmlns:p="http://schemas.openxmlformats.org/presentationml/2006/main">
+  <p:cSld>
+    <p:spTree>
+      <p:nvGrpSpPr>
+        <p:cNvPr id="1" name="">
+          <a:extLst>
+            <a:ext uri="{FF2B5EF4-FFF2-40B4-BE49-F238E27FC236}">
+              <a16:creationId xmlns:a16="http://schemas.microsoft.com/office/drawing/2014/main" id="{D227D97B-3C64-F364-C826-E3378D7DF179}"/>
+            </a:ext>
+          </a:extLst>
+        </p:cNvPr>
+        <p:cNvGrpSpPr/>
+        <p:nvPr/>
+      </p:nvGrpSpPr>
+      <p:grpSpPr>
+        <a:xfrm>
+          <a:off x="0" y="0"/>
+          <a:ext cx="0" cy="0"/>
+          <a:chOff x="0" y="0"/>
+          <a:chExt cx="0" cy="0"/>
+        </a:xfrm>
+      </p:grpSpPr>
+      <p:sp>
+        <p:nvSpPr>
+          <p:cNvPr id="2" name="Title 1">
+            <a:extLst>
+              <a:ext uri="{FF2B5EF4-FFF2-40B4-BE49-F238E27FC236}">
+                <a16:creationId xmlns:a16="http://schemas.microsoft.com/office/drawing/2014/main" id="{F22374AB-BA07-D16F-F081-CB68F1A6BFAB}"/>
+              </a:ext>
+            </a:extLst>
+          </p:cNvPr>
+          <p:cNvSpPr>
+            <a:spLocks noGrp="1"/>
+          </p:cNvSpPr>
+          <p:nvPr>
+            <p:ph type="title"/>
+          </p:nvPr>
+        </p:nvSpPr>
+        <p:spPr>
+          <a:xfrm>
+            <a:off x="808906" y="236622"/>
+            <a:ext cx="9072000" cy="332399"/>
+          </a:xfrm>
+        </p:spPr>
+        <p:txBody>
+          <a:bodyPr/>
+          <a:lstStyle/>
+          <a:p>
+            <a:r>
+              <a:rPr lang="ru-RU" dirty="0"/>
+              <a:t>Подзапросы: запрос внутри запроса </a:t>
+            </a:r>
+            <a:endParaRPr lang="en-US" dirty="0"/>
+          </a:p>
+        </p:txBody>
+      </p:sp>
+      <p:sp>
+        <p:nvSpPr>
+          <p:cNvPr id="5" name="TextBox 4">
+            <a:extLst>
+              <a:ext uri="{FF2B5EF4-FFF2-40B4-BE49-F238E27FC236}">
+                <a16:creationId xmlns:a16="http://schemas.microsoft.com/office/drawing/2014/main" id="{155AACC9-D9B7-E6A5-62C1-0DA6718A5C08}"/>
+              </a:ext>
+            </a:extLst>
+          </p:cNvPr>
+          <p:cNvSpPr txBox="1"/>
+          <p:nvPr/>
+        </p:nvSpPr>
+        <p:spPr>
+          <a:xfrm>
+            <a:off x="365459" y="1146784"/>
+            <a:ext cx="6097002" cy="461665"/>
+          </a:xfrm>
+          <a:prstGeom prst="rect">
+            <a:avLst/>
+          </a:prstGeom>
+          <a:noFill/>
+        </p:spPr>
+        <p:txBody>
+          <a:bodyPr wrap="square">
+            <a:spAutoFit/>
+          </a:bodyPr>
+          <a:lstStyle/>
+          <a:p>
+            <a:r>
+              <a:rPr lang="ru-RU" sz="1800" b="0" i="0" dirty="0">
+                <a:solidFill>
+                  <a:schemeClr val="tx1"/>
+                </a:solidFill>
+                <a:effectLst/>
+                <a:latin typeface="+mn-lt"/>
+              </a:rPr>
+              <a:t>Иногда нужно использовать результат одного запроса внутри другого. Например: найти студентов, чей возраст выше среднего.</a:t>
+            </a:r>
+            <a:endParaRPr lang="ru-RU" dirty="0"/>
+          </a:p>
+        </p:txBody>
+      </p:sp>
+      <p:pic>
+        <p:nvPicPr>
+          <p:cNvPr id="7" name="Рисунок 6">
+            <a:extLst>
+              <a:ext uri="{FF2B5EF4-FFF2-40B4-BE49-F238E27FC236}">
+                <a16:creationId xmlns:a16="http://schemas.microsoft.com/office/drawing/2014/main" id="{8B05F4FD-75A3-F876-5554-A9259A8549A5}"/>
+              </a:ext>
+            </a:extLst>
+          </p:cNvPr>
+          <p:cNvPicPr>
+            <a:picLocks noChangeAspect="1"/>
+          </p:cNvPicPr>
+          <p:nvPr/>
+        </p:nvPicPr>
+        <p:blipFill>
+          <a:blip r:embed="rId2"/>
+          <a:stretch>
+            <a:fillRect/>
+          </a:stretch>
+        </p:blipFill>
+        <p:spPr>
+          <a:xfrm>
+            <a:off x="303548" y="2694122"/>
+            <a:ext cx="5593932" cy="1971807"/>
+          </a:xfrm>
+          <a:prstGeom prst="rect">
+            <a:avLst/>
+          </a:prstGeom>
+        </p:spPr>
+      </p:pic>
+      <p:sp>
+        <p:nvSpPr>
+          <p:cNvPr id="9" name="TextBox 8">
+            <a:extLst>
+              <a:ext uri="{FF2B5EF4-FFF2-40B4-BE49-F238E27FC236}">
+                <a16:creationId xmlns:a16="http://schemas.microsoft.com/office/drawing/2014/main" id="{12D1D297-99E4-BFF3-DF9F-E631E6BD985D}"/>
+              </a:ext>
+            </a:extLst>
+          </p:cNvPr>
+          <p:cNvSpPr txBox="1"/>
+          <p:nvPr/>
+        </p:nvSpPr>
+        <p:spPr>
+          <a:xfrm>
+            <a:off x="732422" y="5117068"/>
+            <a:ext cx="6097002" cy="738664"/>
+          </a:xfrm>
+          <a:prstGeom prst="rect">
+            <a:avLst/>
+          </a:prstGeom>
+          <a:noFill/>
+        </p:spPr>
+        <p:txBody>
+          <a:bodyPr wrap="square">
+            <a:spAutoFit/>
+          </a:bodyPr>
+          <a:lstStyle/>
+          <a:p>
+            <a:r>
+              <a:rPr lang="ru-RU" sz="1800" b="0" i="0" dirty="0">
+                <a:solidFill>
+                  <a:schemeClr val="tx1"/>
+                </a:solidFill>
+                <a:effectLst/>
+                <a:latin typeface="+mn-lt"/>
+              </a:rPr>
+              <a:t>Внутренний запрос </a:t>
+            </a:r>
+            <a:r>
+              <a:rPr lang="ru-RU" b="0" i="0" dirty="0">
+                <a:solidFill>
+                  <a:schemeClr val="tx1"/>
+                </a:solidFill>
+                <a:effectLst/>
+                <a:latin typeface="+mn-lt"/>
+              </a:rPr>
+              <a:t>(SELECT AVG(</a:t>
+            </a:r>
+            <a:r>
+              <a:rPr lang="ru-RU" b="0" i="0" dirty="0" err="1">
+                <a:solidFill>
+                  <a:schemeClr val="tx1"/>
+                </a:solidFill>
+                <a:effectLst/>
+                <a:latin typeface="+mn-lt"/>
+              </a:rPr>
+              <a:t>age</a:t>
+            </a:r>
+            <a:r>
+              <a:rPr lang="ru-RU" b="0" i="0" dirty="0">
+                <a:solidFill>
+                  <a:schemeClr val="tx1"/>
+                </a:solidFill>
+                <a:effectLst/>
+                <a:latin typeface="+mn-lt"/>
+              </a:rPr>
+              <a:t>) FROM </a:t>
+            </a:r>
+            <a:r>
+              <a:rPr lang="ru-RU" b="0" i="0" dirty="0" err="1">
+                <a:solidFill>
+                  <a:schemeClr val="tx1"/>
+                </a:solidFill>
+                <a:effectLst/>
+                <a:latin typeface="+mn-lt"/>
+              </a:rPr>
+              <a:t>students</a:t>
+            </a:r>
+            <a:r>
+              <a:rPr lang="ru-RU" b="0" i="0" dirty="0">
+                <a:solidFill>
+                  <a:schemeClr val="tx1"/>
+                </a:solidFill>
+                <a:effectLst/>
+                <a:latin typeface="+mn-lt"/>
+              </a:rPr>
+              <a:t>)</a:t>
+            </a:r>
+            <a:r>
+              <a:rPr lang="ru-RU" sz="1800" b="0" i="0" dirty="0">
+                <a:solidFill>
+                  <a:schemeClr val="tx1"/>
+                </a:solidFill>
+                <a:effectLst/>
+                <a:latin typeface="+mn-lt"/>
+              </a:rPr>
+              <a:t> выполняется первым и возвращает одно число — средний возраст. Затем внешний запрос сравнивает с ним возраст каждого студента.</a:t>
+            </a:r>
+            <a:endParaRPr lang="ru-RU" dirty="0"/>
+          </a:p>
+        </p:txBody>
+      </p:sp>
+    </p:spTree>
+    <p:extLst>
+      <p:ext uri="{BB962C8B-B14F-4D97-AF65-F5344CB8AC3E}">
+        <p14:creationId xmlns:p14="http://schemas.microsoft.com/office/powerpoint/2010/main" val="1026491437"/>
+      </p:ext>
+    </p:extLst>
+  </p:cSld>
+  <p:clrMapOvr>
+    <a:masterClrMapping/>
+  </p:clrMapOvr>
+</p:sld>
+</file>
+
+<file path=ppt/slides/slide21.xml><?xml version="1.0" encoding="utf-8"?>
+<p:sld xmlns:a="http://schemas.openxmlformats.org/drawingml/2006/main" xmlns:r="http://schemas.openxmlformats.org/officeDocument/2006/relationships" xmlns:p="http://schemas.openxmlformats.org/presentationml/2006/main">
+  <p:cSld>
+    <p:spTree>
+      <p:nvGrpSpPr>
+        <p:cNvPr id="1" name="">
+          <a:extLst>
+            <a:ext uri="{FF2B5EF4-FFF2-40B4-BE49-F238E27FC236}">
+              <a16:creationId xmlns:a16="http://schemas.microsoft.com/office/drawing/2014/main" id="{28D462F1-CC9C-E7A6-B748-C1552F62C494}"/>
+            </a:ext>
+          </a:extLst>
+        </p:cNvPr>
+        <p:cNvGrpSpPr/>
+        <p:nvPr/>
+      </p:nvGrpSpPr>
+      <p:grpSpPr>
+        <a:xfrm>
+          <a:off x="0" y="0"/>
+          <a:ext cx="0" cy="0"/>
+          <a:chOff x="0" y="0"/>
+          <a:chExt cx="0" cy="0"/>
+        </a:xfrm>
+      </p:grpSpPr>
+      <p:sp>
+        <p:nvSpPr>
+          <p:cNvPr id="2" name="Title 1">
+            <a:extLst>
+              <a:ext uri="{FF2B5EF4-FFF2-40B4-BE49-F238E27FC236}">
+                <a16:creationId xmlns:a16="http://schemas.microsoft.com/office/drawing/2014/main" id="{4C431B97-8D32-6F7A-0026-48F6A6E93A77}"/>
+              </a:ext>
+            </a:extLst>
+          </p:cNvPr>
+          <p:cNvSpPr>
+            <a:spLocks noGrp="1"/>
+          </p:cNvSpPr>
+          <p:nvPr>
+            <p:ph type="title"/>
+          </p:nvPr>
+        </p:nvSpPr>
+        <p:spPr>
+          <a:xfrm>
+            <a:off x="808906" y="236622"/>
+            <a:ext cx="9072000" cy="332399"/>
+          </a:xfrm>
+        </p:spPr>
+        <p:txBody>
+          <a:bodyPr/>
+          <a:lstStyle/>
+          <a:p>
+            <a:r>
+              <a:rPr lang="ru-RU" dirty="0"/>
+              <a:t>Подзапросы: запрос внутри запроса </a:t>
+            </a:r>
+            <a:endParaRPr lang="en-US" dirty="0"/>
+          </a:p>
+        </p:txBody>
+      </p:sp>
+      <p:sp>
+        <p:nvSpPr>
+          <p:cNvPr id="4" name="TextBox 3">
+            <a:extLst>
+              <a:ext uri="{FF2B5EF4-FFF2-40B4-BE49-F238E27FC236}">
+                <a16:creationId xmlns:a16="http://schemas.microsoft.com/office/drawing/2014/main" id="{ED71739E-0845-1879-4AB9-4B730187AB4D}"/>
+              </a:ext>
+            </a:extLst>
+          </p:cNvPr>
+          <p:cNvSpPr txBox="1"/>
+          <p:nvPr/>
+        </p:nvSpPr>
+        <p:spPr>
+          <a:xfrm>
+            <a:off x="588043" y="1357042"/>
+            <a:ext cx="6097002" cy="1172116"/>
+          </a:xfrm>
+          <a:prstGeom prst="rect">
+            <a:avLst/>
+          </a:prstGeom>
+          <a:noFill/>
+        </p:spPr>
+        <p:txBody>
+          <a:bodyPr wrap="square">
+            <a:spAutoFit/>
+          </a:bodyPr>
+          <a:lstStyle/>
+          <a:p>
+            <a:pPr marL="0" marR="0" indent="0" algn="l">
+              <a:spcBef>
+                <a:spcPts val="1200"/>
+              </a:spcBef>
+              <a:spcAft>
+                <a:spcPts val="1200"/>
+              </a:spcAft>
+              <a:buNone/>
+            </a:pPr>
+            <a:r>
+              <a:rPr lang="ru-RU" sz="1800" b="0" i="0" dirty="0">
+                <a:solidFill>
+                  <a:schemeClr val="tx1"/>
+                </a:solidFill>
+                <a:effectLst/>
+                <a:latin typeface="+mn-lt"/>
+              </a:rPr>
+              <a:t>Подзапросы могут возвращать:</a:t>
+            </a:r>
+          </a:p>
+          <a:p>
+            <a:pPr marL="0" marR="0" lvl="0" indent="-342900" algn="l">
+              <a:spcBef>
+                <a:spcPts val="1200"/>
+              </a:spcBef>
+              <a:spcAft>
+                <a:spcPts val="1200"/>
+              </a:spcAft>
+              <a:buFont typeface="Arial" panose="020B0604020202020204" pitchFamily="34" charset="0"/>
+              <a:buChar char="•"/>
+            </a:pPr>
+            <a:r>
+              <a:rPr lang="ru-RU" sz="1800" b="0" i="0" dirty="0">
+                <a:solidFill>
+                  <a:schemeClr val="tx1"/>
+                </a:solidFill>
+                <a:effectLst/>
+                <a:latin typeface="+mn-lt"/>
+              </a:rPr>
+              <a:t>одно значение (как в примере выше);</a:t>
+            </a:r>
+          </a:p>
+          <a:p>
+            <a:pPr marL="0" marR="0" lvl="0" indent="-342900" algn="l">
+              <a:spcBef>
+                <a:spcPts val="450"/>
+              </a:spcBef>
+              <a:spcAft>
+                <a:spcPts val="1200"/>
+              </a:spcAft>
+              <a:buFont typeface="Arial" panose="020B0604020202020204" pitchFamily="34" charset="0"/>
+              <a:buChar char="•"/>
+            </a:pPr>
+            <a:r>
+              <a:rPr lang="ru-RU" sz="1800" b="0" i="0" dirty="0">
+                <a:solidFill>
+                  <a:schemeClr val="tx1"/>
+                </a:solidFill>
+                <a:effectLst/>
+                <a:latin typeface="+mn-lt"/>
+              </a:rPr>
+              <a:t>список значений (тогда используется с IN):</a:t>
+            </a:r>
+            <a:endParaRPr lang="ru-RU" sz="1200" b="0" i="0" dirty="0">
+              <a:solidFill>
+                <a:srgbClr val="F9FAFB"/>
+              </a:solidFill>
+              <a:effectLst/>
+              <a:latin typeface="quote-cjk-patch"/>
+            </a:endParaRPr>
+          </a:p>
+        </p:txBody>
+      </p:sp>
+      <p:pic>
+        <p:nvPicPr>
+          <p:cNvPr id="8" name="Рисунок 7">
+            <a:extLst>
+              <a:ext uri="{FF2B5EF4-FFF2-40B4-BE49-F238E27FC236}">
+                <a16:creationId xmlns:a16="http://schemas.microsoft.com/office/drawing/2014/main" id="{9C8B63BC-E195-5AD7-B375-C5062D387EDE}"/>
+              </a:ext>
+            </a:extLst>
+          </p:cNvPr>
+          <p:cNvPicPr>
+            <a:picLocks noChangeAspect="1"/>
+          </p:cNvPicPr>
+          <p:nvPr/>
+        </p:nvPicPr>
+        <p:blipFill>
+          <a:blip r:embed="rId2"/>
+          <a:stretch>
+            <a:fillRect/>
+          </a:stretch>
+        </p:blipFill>
+        <p:spPr>
+          <a:xfrm>
+            <a:off x="588043" y="3317179"/>
+            <a:ext cx="9858375" cy="3133725"/>
+          </a:xfrm>
+          <a:prstGeom prst="rect">
+            <a:avLst/>
+          </a:prstGeom>
+        </p:spPr>
+      </p:pic>
+    </p:spTree>
+    <p:extLst>
+      <p:ext uri="{BB962C8B-B14F-4D97-AF65-F5344CB8AC3E}">
+        <p14:creationId xmlns:p14="http://schemas.microsoft.com/office/powerpoint/2010/main" val="1679601421"/>
+      </p:ext>
+    </p:extLst>
+  </p:cSld>
+  <p:clrMapOvr>
+    <a:masterClrMapping/>
+  </p:clrMapOvr>
+</p:sld>
+</file>
+
+<file path=ppt/slides/slide22.xml><?xml version="1.0" encoding="utf-8"?>
+<p:sld xmlns:a="http://schemas.openxmlformats.org/drawingml/2006/main" xmlns:r="http://schemas.openxmlformats.org/officeDocument/2006/relationships" xmlns:p="http://schemas.openxmlformats.org/presentationml/2006/main">
+  <p:cSld>
+    <p:spTree>
+      <p:nvGrpSpPr>
+        <p:cNvPr id="1" name="">
+          <a:extLst>
+            <a:ext uri="{FF2B5EF4-FFF2-40B4-BE49-F238E27FC236}">
+              <a16:creationId xmlns:a16="http://schemas.microsoft.com/office/drawing/2014/main" id="{42A0F4EE-BCA6-457B-888D-ED6949ADC4C8}"/>
+            </a:ext>
+          </a:extLst>
+        </p:cNvPr>
+        <p:cNvGrpSpPr/>
+        <p:nvPr/>
+      </p:nvGrpSpPr>
+      <p:grpSpPr>
+        <a:xfrm>
+          <a:off x="0" y="0"/>
+          <a:ext cx="0" cy="0"/>
+          <a:chOff x="0" y="0"/>
+          <a:chExt cx="0" cy="0"/>
+        </a:xfrm>
+      </p:grpSpPr>
+      <p:sp>
+        <p:nvSpPr>
+          <p:cNvPr id="2" name="Title 1">
+            <a:extLst>
+              <a:ext uri="{FF2B5EF4-FFF2-40B4-BE49-F238E27FC236}">
+                <a16:creationId xmlns:a16="http://schemas.microsoft.com/office/drawing/2014/main" id="{C6531A0C-1C99-0C3D-9D64-DDB29993CA88}"/>
+              </a:ext>
+            </a:extLst>
+          </p:cNvPr>
+          <p:cNvSpPr>
+            <a:spLocks noGrp="1"/>
+          </p:cNvSpPr>
+          <p:nvPr>
+            <p:ph type="title"/>
+          </p:nvPr>
+        </p:nvSpPr>
+        <p:spPr>
+          <a:xfrm>
+            <a:off x="808906" y="236622"/>
+            <a:ext cx="9072000" cy="332399"/>
+          </a:xfrm>
+        </p:spPr>
+        <p:txBody>
+          <a:bodyPr/>
+          <a:lstStyle/>
+          <a:p>
+            <a:r>
+              <a:rPr lang="ru-RU" dirty="0"/>
+              <a:t>Подзапросы: запрос внутри запроса </a:t>
+            </a:r>
+            <a:endParaRPr lang="en-US" dirty="0"/>
+          </a:p>
+        </p:txBody>
+      </p:sp>
+      <p:sp>
+        <p:nvSpPr>
+          <p:cNvPr id="5" name="TextBox 4">
+            <a:extLst>
+              <a:ext uri="{FF2B5EF4-FFF2-40B4-BE49-F238E27FC236}">
+                <a16:creationId xmlns:a16="http://schemas.microsoft.com/office/drawing/2014/main" id="{62EBCF5B-D745-50F1-3B7C-70975440687C}"/>
+              </a:ext>
+            </a:extLst>
+          </p:cNvPr>
+          <p:cNvSpPr txBox="1"/>
+          <p:nvPr/>
+        </p:nvSpPr>
+        <p:spPr>
+          <a:xfrm>
+            <a:off x="750470" y="920280"/>
+            <a:ext cx="6097002" cy="276999"/>
+          </a:xfrm>
+          <a:prstGeom prst="rect">
+            <a:avLst/>
+          </a:prstGeom>
+          <a:noFill/>
+        </p:spPr>
+        <p:txBody>
+          <a:bodyPr wrap="square">
+            <a:spAutoFit/>
+          </a:bodyPr>
+          <a:lstStyle/>
+          <a:p>
+            <a:pPr marL="0" marR="0" lvl="0" indent="-342900" algn="l">
+              <a:spcBef>
+                <a:spcPts val="1200"/>
+              </a:spcBef>
+              <a:spcAft>
+                <a:spcPts val="1200"/>
+              </a:spcAft>
+              <a:buFont typeface="Arial" panose="020B0604020202020204" pitchFamily="34" charset="0"/>
+              <a:buChar char="•"/>
+            </a:pPr>
+            <a:r>
+              <a:rPr lang="ru-RU" sz="1800" b="0" i="0" dirty="0">
+                <a:solidFill>
+                  <a:schemeClr val="tx1"/>
+                </a:solidFill>
+                <a:effectLst/>
+                <a:latin typeface="+mn-lt"/>
+              </a:rPr>
+              <a:t>целую таблицу (тогда ставится в FROM):</a:t>
+            </a:r>
+            <a:endParaRPr lang="ru-RU" sz="1200" b="0" i="0" dirty="0">
+              <a:solidFill>
+                <a:srgbClr val="F9FAFB"/>
+              </a:solidFill>
+              <a:effectLst/>
+              <a:latin typeface="quote-cjk-patch"/>
+            </a:endParaRPr>
+          </a:p>
+        </p:txBody>
+      </p:sp>
+      <p:pic>
+        <p:nvPicPr>
+          <p:cNvPr id="7" name="Рисунок 6">
+            <a:extLst>
+              <a:ext uri="{FF2B5EF4-FFF2-40B4-BE49-F238E27FC236}">
+                <a16:creationId xmlns:a16="http://schemas.microsoft.com/office/drawing/2014/main" id="{C4A44DDA-33C9-3F08-70E3-0B4BA9270786}"/>
+              </a:ext>
+            </a:extLst>
+          </p:cNvPr>
+          <p:cNvPicPr>
+            <a:picLocks noChangeAspect="1"/>
+          </p:cNvPicPr>
+          <p:nvPr/>
+        </p:nvPicPr>
+        <p:blipFill>
+          <a:blip r:embed="rId2"/>
+          <a:stretch>
+            <a:fillRect/>
+          </a:stretch>
+        </p:blipFill>
+        <p:spPr>
+          <a:xfrm>
+            <a:off x="667753" y="1400175"/>
+            <a:ext cx="6934200" cy="3829050"/>
+          </a:xfrm>
+          <a:prstGeom prst="rect">
+            <a:avLst/>
+          </a:prstGeom>
+        </p:spPr>
+      </p:pic>
+      <p:sp>
+        <p:nvSpPr>
+          <p:cNvPr id="10" name="TextBox 9">
+            <a:extLst>
+              <a:ext uri="{FF2B5EF4-FFF2-40B4-BE49-F238E27FC236}">
+                <a16:creationId xmlns:a16="http://schemas.microsoft.com/office/drawing/2014/main" id="{D4C2C971-39F9-2EBB-81E1-6AFE7E75FC83}"/>
+              </a:ext>
+            </a:extLst>
+          </p:cNvPr>
+          <p:cNvSpPr txBox="1"/>
+          <p:nvPr/>
+        </p:nvSpPr>
+        <p:spPr>
+          <a:xfrm>
+            <a:off x="808906" y="5612459"/>
+            <a:ext cx="6097002" cy="553998"/>
+          </a:xfrm>
+          <a:prstGeom prst="rect">
+            <a:avLst/>
+          </a:prstGeom>
+          <a:noFill/>
+        </p:spPr>
+        <p:txBody>
+          <a:bodyPr wrap="square">
+            <a:spAutoFit/>
+          </a:bodyPr>
+          <a:lstStyle/>
+          <a:p>
+            <a:r>
+              <a:rPr lang="ru-RU" sz="1800" b="0" i="0" dirty="0">
+                <a:solidFill>
+                  <a:schemeClr val="tx1"/>
+                </a:solidFill>
+                <a:effectLst/>
+                <a:latin typeface="+mn-lt"/>
+              </a:rPr>
+              <a:t>В </a:t>
+            </a:r>
+            <a:r>
+              <a:rPr lang="ru-RU" sz="1800" b="0" i="0" dirty="0" err="1">
+                <a:solidFill>
+                  <a:schemeClr val="tx1"/>
+                </a:solidFill>
+                <a:effectLst/>
+                <a:latin typeface="+mn-lt"/>
+              </a:rPr>
+              <a:t>PostgreSQL</a:t>
+            </a:r>
+            <a:r>
+              <a:rPr lang="ru-RU" sz="1800" b="0" i="0" dirty="0">
+                <a:solidFill>
+                  <a:schemeClr val="tx1"/>
+                </a:solidFill>
+                <a:effectLst/>
+                <a:latin typeface="+mn-lt"/>
+              </a:rPr>
+              <a:t> у подзапроса в </a:t>
+            </a:r>
+            <a:r>
+              <a:rPr lang="ru-RU" b="0" i="0" dirty="0">
+                <a:solidFill>
+                  <a:schemeClr val="tx1"/>
+                </a:solidFill>
+                <a:effectLst/>
+                <a:latin typeface="+mn-lt"/>
+              </a:rPr>
+              <a:t>FROM</a:t>
+            </a:r>
+            <a:r>
+              <a:rPr lang="ru-RU" sz="1800" b="0" i="0" dirty="0">
+                <a:solidFill>
+                  <a:schemeClr val="tx1"/>
+                </a:solidFill>
+                <a:effectLst/>
+                <a:latin typeface="+mn-lt"/>
+              </a:rPr>
+              <a:t> </a:t>
+            </a:r>
+            <a:r>
+              <a:rPr lang="ru-RU" sz="1800" b="1" i="0" dirty="0">
+                <a:solidFill>
+                  <a:schemeClr val="tx1"/>
+                </a:solidFill>
+                <a:effectLst/>
+                <a:latin typeface="+mn-lt"/>
+              </a:rPr>
+              <a:t>обязательно</a:t>
+            </a:r>
+            <a:r>
+              <a:rPr lang="ru-RU" sz="1800" b="0" i="0" dirty="0">
+                <a:solidFill>
+                  <a:schemeClr val="tx1"/>
+                </a:solidFill>
+                <a:effectLst/>
+                <a:latin typeface="+mn-lt"/>
+              </a:rPr>
+              <a:t> должен быть </a:t>
+            </a:r>
+            <a:r>
+              <a:rPr lang="ru-RU" sz="1800" b="0" i="0" dirty="0" err="1">
+                <a:solidFill>
+                  <a:schemeClr val="tx1"/>
+                </a:solidFill>
+                <a:effectLst/>
+                <a:latin typeface="+mn-lt"/>
+              </a:rPr>
+              <a:t>алиас</a:t>
+            </a:r>
+            <a:r>
+              <a:rPr lang="ru-RU" sz="1800" b="0" i="0" dirty="0">
+                <a:solidFill>
+                  <a:schemeClr val="tx1"/>
+                </a:solidFill>
+                <a:effectLst/>
+                <a:latin typeface="+mn-lt"/>
+              </a:rPr>
+              <a:t> (</a:t>
+            </a:r>
+            <a:r>
+              <a:rPr lang="ru-RU" b="0" i="0" dirty="0" err="1">
+                <a:solidFill>
+                  <a:schemeClr val="tx1"/>
+                </a:solidFill>
+                <a:effectLst/>
+                <a:latin typeface="+mn-lt"/>
+              </a:rPr>
+              <a:t>city_stats</a:t>
+            </a:r>
+            <a:r>
+              <a:rPr lang="ru-RU" sz="1800" b="0" i="0" dirty="0">
+                <a:solidFill>
+                  <a:schemeClr val="tx1"/>
+                </a:solidFill>
+                <a:effectLst/>
+                <a:latin typeface="+mn-lt"/>
+              </a:rPr>
+              <a:t> в примере).</a:t>
+            </a:r>
+            <a:endParaRPr lang="ru-RU" dirty="0"/>
+          </a:p>
+        </p:txBody>
+      </p:sp>
+    </p:spTree>
+    <p:extLst>
+      <p:ext uri="{BB962C8B-B14F-4D97-AF65-F5344CB8AC3E}">
+        <p14:creationId xmlns:p14="http://schemas.microsoft.com/office/powerpoint/2010/main" val="2471538126"/>
+      </p:ext>
+    </p:extLst>
+  </p:cSld>
+  <p:clrMapOvr>
+    <a:masterClrMapping/>
+  </p:clrMapOvr>
+</p:sld>
+</file>
+
+<file path=ppt/slides/slide23.xml><?xml version="1.0" encoding="utf-8"?>
+<p:sld xmlns:a="http://schemas.openxmlformats.org/drawingml/2006/main" xmlns:r="http://schemas.openxmlformats.org/officeDocument/2006/relationships" xmlns:p="http://schemas.openxmlformats.org/presentationml/2006/main">
+  <p:cSld>
+    <p:spTree>
+      <p:nvGrpSpPr>
+        <p:cNvPr id="1" name="">
+          <a:extLst>
+            <a:ext uri="{FF2B5EF4-FFF2-40B4-BE49-F238E27FC236}">
+              <a16:creationId xmlns:a16="http://schemas.microsoft.com/office/drawing/2014/main" id="{BD8B71BF-D890-991D-E76D-75889981B238}"/>
+            </a:ext>
+          </a:extLst>
+        </p:cNvPr>
+        <p:cNvGrpSpPr/>
+        <p:nvPr/>
+      </p:nvGrpSpPr>
+      <p:grpSpPr>
+        <a:xfrm>
+          <a:off x="0" y="0"/>
+          <a:ext cx="0" cy="0"/>
+          <a:chOff x="0" y="0"/>
+          <a:chExt cx="0" cy="0"/>
+        </a:xfrm>
+      </p:grpSpPr>
+      <p:sp>
+        <p:nvSpPr>
+          <p:cNvPr id="2" name="Title 1">
+            <a:extLst>
+              <a:ext uri="{FF2B5EF4-FFF2-40B4-BE49-F238E27FC236}">
+                <a16:creationId xmlns:a16="http://schemas.microsoft.com/office/drawing/2014/main" id="{2F0F1FBA-ED68-5B7D-A892-383A643B22CC}"/>
+              </a:ext>
+            </a:extLst>
+          </p:cNvPr>
+          <p:cNvSpPr>
+            <a:spLocks noGrp="1"/>
+          </p:cNvSpPr>
+          <p:nvPr>
+            <p:ph type="title"/>
+          </p:nvPr>
+        </p:nvSpPr>
+        <p:spPr>
+          <a:xfrm>
+            <a:off x="808906" y="236622"/>
+            <a:ext cx="9072000" cy="332399"/>
+          </a:xfrm>
+        </p:spPr>
+        <p:txBody>
+          <a:bodyPr/>
+          <a:lstStyle/>
+          <a:p>
+            <a:r>
+              <a:rPr lang="en-US" dirty="0"/>
+              <a:t>Exists – </a:t>
+            </a:r>
+            <a:r>
+              <a:rPr lang="ru-RU" dirty="0"/>
+              <a:t>проверка существования</a:t>
+            </a:r>
+            <a:endParaRPr lang="en-US" dirty="0"/>
+          </a:p>
+        </p:txBody>
+      </p:sp>
+      <p:sp>
+        <p:nvSpPr>
+          <p:cNvPr id="4" name="TextBox 3">
+            <a:extLst>
+              <a:ext uri="{FF2B5EF4-FFF2-40B4-BE49-F238E27FC236}">
+                <a16:creationId xmlns:a16="http://schemas.microsoft.com/office/drawing/2014/main" id="{08531640-8A73-2AF4-10FB-2C1A5BA18155}"/>
+              </a:ext>
+            </a:extLst>
+          </p:cNvPr>
+          <p:cNvSpPr txBox="1"/>
+          <p:nvPr/>
+        </p:nvSpPr>
+        <p:spPr>
+          <a:xfrm>
+            <a:off x="808906" y="1094601"/>
+            <a:ext cx="6097002" cy="553998"/>
+          </a:xfrm>
+          <a:prstGeom prst="rect">
+            <a:avLst/>
+          </a:prstGeom>
+          <a:noFill/>
+        </p:spPr>
+        <p:txBody>
+          <a:bodyPr wrap="square">
+            <a:spAutoFit/>
+          </a:bodyPr>
+          <a:lstStyle/>
+          <a:p>
+            <a:r>
+              <a:rPr lang="ru-RU" sz="1800" b="0" i="0" dirty="0">
+                <a:solidFill>
+                  <a:schemeClr val="tx1"/>
+                </a:solidFill>
+                <a:effectLst/>
+                <a:latin typeface="+mn-lt"/>
+              </a:rPr>
+              <a:t>Отдельно стоит оператор </a:t>
+            </a:r>
+            <a:r>
+              <a:rPr lang="ru-RU" b="0" i="0" dirty="0">
+                <a:solidFill>
+                  <a:schemeClr val="tx1"/>
+                </a:solidFill>
+                <a:effectLst/>
+                <a:latin typeface="+mn-lt"/>
+              </a:rPr>
+              <a:t>EXISTS</a:t>
+            </a:r>
+            <a:r>
+              <a:rPr lang="ru-RU" sz="1800" b="0" i="0" dirty="0">
+                <a:solidFill>
+                  <a:schemeClr val="tx1"/>
+                </a:solidFill>
+                <a:effectLst/>
+                <a:latin typeface="+mn-lt"/>
+              </a:rPr>
+              <a:t>. Он проверяет, возвращает ли подзапрос хотя бы одну строку:</a:t>
+            </a:r>
+            <a:endParaRPr lang="ru-RU" dirty="0"/>
+          </a:p>
+        </p:txBody>
+      </p:sp>
+      <p:pic>
+        <p:nvPicPr>
+          <p:cNvPr id="8" name="Рисунок 7">
+            <a:extLst>
+              <a:ext uri="{FF2B5EF4-FFF2-40B4-BE49-F238E27FC236}">
+                <a16:creationId xmlns:a16="http://schemas.microsoft.com/office/drawing/2014/main" id="{3B628F51-C542-9617-969B-77132D74E3A0}"/>
+              </a:ext>
+            </a:extLst>
+          </p:cNvPr>
+          <p:cNvPicPr>
+            <a:picLocks noChangeAspect="1"/>
+          </p:cNvPicPr>
+          <p:nvPr/>
+        </p:nvPicPr>
+        <p:blipFill>
+          <a:blip r:embed="rId2"/>
+          <a:stretch>
+            <a:fillRect/>
+          </a:stretch>
+        </p:blipFill>
+        <p:spPr>
+          <a:xfrm>
+            <a:off x="619626" y="2174179"/>
+            <a:ext cx="9583153" cy="1989981"/>
+          </a:xfrm>
+          <a:prstGeom prst="rect">
+            <a:avLst/>
+          </a:prstGeom>
+        </p:spPr>
+      </p:pic>
+      <p:sp>
+        <p:nvSpPr>
+          <p:cNvPr id="11" name="TextBox 10">
+            <a:extLst>
+              <a:ext uri="{FF2B5EF4-FFF2-40B4-BE49-F238E27FC236}">
+                <a16:creationId xmlns:a16="http://schemas.microsoft.com/office/drawing/2014/main" id="{1D1F9990-F531-5082-A1AA-DD017AFF1D3B}"/>
+              </a:ext>
+            </a:extLst>
+          </p:cNvPr>
+          <p:cNvSpPr txBox="1"/>
+          <p:nvPr/>
+        </p:nvSpPr>
+        <p:spPr>
+          <a:xfrm>
+            <a:off x="808906" y="4884548"/>
+            <a:ext cx="6097002" cy="553998"/>
+          </a:xfrm>
+          <a:prstGeom prst="rect">
+            <a:avLst/>
+          </a:prstGeom>
+          <a:noFill/>
+        </p:spPr>
+        <p:txBody>
+          <a:bodyPr wrap="square">
+            <a:spAutoFit/>
+          </a:bodyPr>
+          <a:lstStyle/>
+          <a:p>
+            <a:r>
+              <a:rPr lang="ru-RU" sz="1800" b="0" i="0" dirty="0">
+                <a:solidFill>
+                  <a:schemeClr val="tx1"/>
+                </a:solidFill>
+                <a:effectLst/>
+                <a:latin typeface="+mn-lt"/>
+              </a:rPr>
+              <a:t>Это так называемый </a:t>
+            </a:r>
+            <a:r>
+              <a:rPr lang="ru-RU" sz="1800" b="1" i="0" dirty="0">
+                <a:solidFill>
+                  <a:schemeClr val="tx1"/>
+                </a:solidFill>
+                <a:effectLst/>
+                <a:latin typeface="+mn-lt"/>
+              </a:rPr>
+              <a:t>коррелированный подзапрос</a:t>
+            </a:r>
+            <a:r>
+              <a:rPr lang="ru-RU" sz="1800" b="0" i="0" dirty="0">
+                <a:solidFill>
+                  <a:schemeClr val="tx1"/>
+                </a:solidFill>
+                <a:effectLst/>
+                <a:latin typeface="+mn-lt"/>
+              </a:rPr>
+              <a:t> — он ссылается на </a:t>
+            </a:r>
+            <a:r>
+              <a:rPr lang="ru-RU" b="0" i="0" dirty="0">
+                <a:solidFill>
+                  <a:schemeClr val="tx1"/>
+                </a:solidFill>
+                <a:effectLst/>
+                <a:latin typeface="+mn-lt"/>
+              </a:rPr>
+              <a:t>s.id</a:t>
+            </a:r>
+            <a:r>
+              <a:rPr lang="ru-RU" sz="1800" b="0" i="0" dirty="0">
+                <a:solidFill>
+                  <a:schemeClr val="tx1"/>
+                </a:solidFill>
+                <a:effectLst/>
+                <a:latin typeface="+mn-lt"/>
+              </a:rPr>
+              <a:t> из внешнего запроса. Читается как «есть ли хотя бы один заказ у этого студента».</a:t>
+            </a:r>
+            <a:endParaRPr lang="ru-RU" dirty="0"/>
+          </a:p>
+        </p:txBody>
+      </p:sp>
+    </p:spTree>
+    <p:extLst>
+      <p:ext uri="{BB962C8B-B14F-4D97-AF65-F5344CB8AC3E}">
+        <p14:creationId xmlns:p14="http://schemas.microsoft.com/office/powerpoint/2010/main" val="3744466625"/>
+      </p:ext>
+    </p:extLst>
+  </p:cSld>
+  <p:clrMapOvr>
+    <a:masterClrMapping/>
+  </p:clrMapOvr>
+</p:sld>
+</file>
+
+<file path=ppt/slides/slide24.xml><?xml version="1.0" encoding="utf-8"?>
+<p:sld xmlns:a="http://schemas.openxmlformats.org/drawingml/2006/main" xmlns:r="http://schemas.openxmlformats.org/officeDocument/2006/relationships" xmlns:p="http://schemas.openxmlformats.org/presentationml/2006/main">
+  <p:cSld>
+    <p:spTree>
+      <p:nvGrpSpPr>
+        <p:cNvPr id="1" name="">
+          <a:extLst>
+            <a:ext uri="{FF2B5EF4-FFF2-40B4-BE49-F238E27FC236}">
+              <a16:creationId xmlns:a16="http://schemas.microsoft.com/office/drawing/2014/main" id="{F69720E7-E4F8-99E4-F1BB-34C378058822}"/>
+            </a:ext>
+          </a:extLst>
+        </p:cNvPr>
+        <p:cNvGrpSpPr/>
+        <p:nvPr/>
+      </p:nvGrpSpPr>
+      <p:grpSpPr>
+        <a:xfrm>
+          <a:off x="0" y="0"/>
+          <a:ext cx="0" cy="0"/>
+          <a:chOff x="0" y="0"/>
+          <a:chExt cx="0" cy="0"/>
+        </a:xfrm>
+      </p:grpSpPr>
+      <p:sp>
+        <p:nvSpPr>
+          <p:cNvPr id="2" name="Title 1">
+            <a:extLst>
+              <a:ext uri="{FF2B5EF4-FFF2-40B4-BE49-F238E27FC236}">
+                <a16:creationId xmlns:a16="http://schemas.microsoft.com/office/drawing/2014/main" id="{2E3433B7-1BD5-74B8-CDE6-0B9FEA904F24}"/>
+              </a:ext>
+            </a:extLst>
+          </p:cNvPr>
+          <p:cNvSpPr>
+            <a:spLocks noGrp="1"/>
+          </p:cNvSpPr>
+          <p:nvPr>
+            <p:ph type="title"/>
+          </p:nvPr>
+        </p:nvSpPr>
+        <p:spPr>
+          <a:xfrm>
+            <a:off x="808906" y="236622"/>
+            <a:ext cx="9072000" cy="332399"/>
+          </a:xfrm>
+        </p:spPr>
+        <p:txBody>
+          <a:bodyPr/>
+          <a:lstStyle/>
+          <a:p>
+            <a:r>
+              <a:rPr lang="ru-RU" dirty="0"/>
+              <a:t>Вопросы для самопроверки</a:t>
+            </a:r>
+            <a:endParaRPr lang="en-US" dirty="0"/>
+          </a:p>
+        </p:txBody>
+      </p:sp>
+      <p:sp>
+        <p:nvSpPr>
+          <p:cNvPr id="5" name="TextBox 4">
+            <a:extLst>
+              <a:ext uri="{FF2B5EF4-FFF2-40B4-BE49-F238E27FC236}">
+                <a16:creationId xmlns:a16="http://schemas.microsoft.com/office/drawing/2014/main" id="{F7A97F6B-CB7D-83F1-7EB1-7ADC579E3E51}"/>
+              </a:ext>
+            </a:extLst>
+          </p:cNvPr>
+          <p:cNvSpPr txBox="1"/>
+          <p:nvPr/>
+        </p:nvSpPr>
+        <p:spPr>
+          <a:xfrm>
+            <a:off x="684294" y="1161048"/>
+            <a:ext cx="8613079" cy="2844368"/>
+          </a:xfrm>
+          <a:prstGeom prst="rect">
+            <a:avLst/>
+          </a:prstGeom>
+          <a:noFill/>
+        </p:spPr>
+        <p:txBody>
+          <a:bodyPr wrap="square">
+            <a:spAutoFit/>
+          </a:bodyPr>
+          <a:lstStyle/>
+          <a:p>
+            <a:pPr marL="0" marR="0" lvl="0" indent="-342900" algn="l">
+              <a:spcBef>
+                <a:spcPts val="450"/>
+              </a:spcBef>
+              <a:spcAft>
+                <a:spcPts val="1200"/>
+              </a:spcAft>
+              <a:buFont typeface="+mj-lt"/>
+              <a:buAutoNum type="arabicPeriod"/>
+            </a:pPr>
+            <a:r>
+              <a:rPr lang="ru-RU" sz="1800" b="0" i="0" dirty="0">
+                <a:solidFill>
+                  <a:schemeClr val="tx1"/>
+                </a:solidFill>
+                <a:effectLst/>
+                <a:latin typeface="+mn-lt"/>
+              </a:rPr>
+              <a:t>Чем WHERE отличается от HAVING?</a:t>
+            </a:r>
+          </a:p>
+          <a:p>
+            <a:pPr marL="0" marR="0" lvl="0" indent="-342900" algn="l">
+              <a:spcBef>
+                <a:spcPts val="450"/>
+              </a:spcBef>
+              <a:spcAft>
+                <a:spcPts val="1200"/>
+              </a:spcAft>
+              <a:buFont typeface="+mj-lt"/>
+              <a:buAutoNum type="arabicPeriod"/>
+            </a:pPr>
+            <a:r>
+              <a:rPr lang="ru-RU" sz="1800" b="0" i="0" dirty="0">
+                <a:solidFill>
+                  <a:schemeClr val="tx1"/>
+                </a:solidFill>
+                <a:effectLst/>
+                <a:latin typeface="+mn-lt"/>
+              </a:rPr>
+              <a:t>В чём разница между INNER JOIN и LEFT JOIN?</a:t>
+            </a:r>
+          </a:p>
+          <a:p>
+            <a:pPr marL="0" marR="0" lvl="0" indent="-342900" algn="l">
+              <a:spcBef>
+                <a:spcPts val="450"/>
+              </a:spcBef>
+              <a:spcAft>
+                <a:spcPts val="1200"/>
+              </a:spcAft>
+              <a:buFont typeface="+mj-lt"/>
+              <a:buAutoNum type="arabicPeriod"/>
+            </a:pPr>
+            <a:r>
+              <a:rPr lang="ru-RU" sz="1800" b="0" i="0" dirty="0">
+                <a:solidFill>
+                  <a:schemeClr val="tx1"/>
+                </a:solidFill>
+                <a:effectLst/>
+                <a:latin typeface="+mn-lt"/>
+              </a:rPr>
+              <a:t>Что произойдёт, если выполнить DELETE FROM </a:t>
+            </a:r>
+            <a:r>
+              <a:rPr lang="ru-RU" sz="1800" b="0" i="0" dirty="0" err="1">
+                <a:solidFill>
+                  <a:schemeClr val="tx1"/>
+                </a:solidFill>
+                <a:effectLst/>
+                <a:latin typeface="+mn-lt"/>
+              </a:rPr>
+              <a:t>students</a:t>
+            </a:r>
+            <a:r>
+              <a:rPr lang="ru-RU" sz="1800" b="0" i="0" dirty="0">
+                <a:solidFill>
+                  <a:schemeClr val="tx1"/>
+                </a:solidFill>
+                <a:effectLst/>
+                <a:latin typeface="+mn-lt"/>
+              </a:rPr>
+              <a:t>; без WHERE?</a:t>
+            </a:r>
+          </a:p>
+          <a:p>
+            <a:pPr marL="0" marR="0" lvl="0" indent="-342900" algn="l">
+              <a:spcBef>
+                <a:spcPts val="450"/>
+              </a:spcBef>
+              <a:spcAft>
+                <a:spcPts val="1200"/>
+              </a:spcAft>
+              <a:buFont typeface="+mj-lt"/>
+              <a:buAutoNum type="arabicPeriod"/>
+            </a:pPr>
+            <a:r>
+              <a:rPr lang="ru-RU" sz="1800" b="0" i="0" dirty="0">
+                <a:solidFill>
+                  <a:schemeClr val="tx1"/>
+                </a:solidFill>
+                <a:effectLst/>
+                <a:latin typeface="+mn-lt"/>
+              </a:rPr>
+              <a:t>Зачем нужны ограничения вроде NOT NULL и CHECK?</a:t>
+            </a:r>
+          </a:p>
+          <a:p>
+            <a:pPr marL="0" marR="0" lvl="0" indent="-342900" algn="l">
+              <a:spcBef>
+                <a:spcPts val="450"/>
+              </a:spcBef>
+              <a:spcAft>
+                <a:spcPts val="1200"/>
+              </a:spcAft>
+              <a:buFont typeface="+mj-lt"/>
+              <a:buAutoNum type="arabicPeriod"/>
+            </a:pPr>
+            <a:r>
+              <a:rPr lang="ru-RU" sz="1800" b="0" i="0" dirty="0">
+                <a:solidFill>
+                  <a:schemeClr val="tx1"/>
+                </a:solidFill>
+                <a:effectLst/>
+                <a:latin typeface="+mn-lt"/>
+              </a:rPr>
+              <a:t>Почему для денег используют NUMERIC, а не FLOAT?</a:t>
+            </a:r>
+          </a:p>
+          <a:p>
+            <a:pPr marL="0" marR="0" lvl="0" indent="-342900" algn="l">
+              <a:spcBef>
+                <a:spcPts val="450"/>
+              </a:spcBef>
+              <a:spcAft>
+                <a:spcPts val="1200"/>
+              </a:spcAft>
+              <a:buFont typeface="+mj-lt"/>
+              <a:buAutoNum type="arabicPeriod"/>
+            </a:pPr>
+            <a:r>
+              <a:rPr lang="ru-RU" sz="1800" b="0" i="0" dirty="0">
+                <a:solidFill>
+                  <a:schemeClr val="tx1"/>
+                </a:solidFill>
+                <a:effectLst/>
+                <a:latin typeface="+mn-lt"/>
+              </a:rPr>
+              <a:t>Что произойдёт при DROP TABLE </a:t>
+            </a:r>
+            <a:r>
+              <a:rPr lang="ru-RU" sz="1800" b="0" i="0" dirty="0" err="1">
+                <a:solidFill>
+                  <a:schemeClr val="tx1"/>
+                </a:solidFill>
+                <a:effectLst/>
+                <a:latin typeface="+mn-lt"/>
+              </a:rPr>
+              <a:t>students</a:t>
+            </a:r>
+            <a:r>
+              <a:rPr lang="ru-RU" sz="1800" b="0" i="0" dirty="0">
+                <a:solidFill>
+                  <a:schemeClr val="tx1"/>
+                </a:solidFill>
+                <a:effectLst/>
+                <a:latin typeface="+mn-lt"/>
+              </a:rPr>
+              <a:t>;, если на неё ссылается </a:t>
+            </a:r>
+            <a:r>
+              <a:rPr lang="ru-RU" sz="1800" b="0" i="0" dirty="0" err="1">
+                <a:solidFill>
+                  <a:schemeClr val="tx1"/>
+                </a:solidFill>
+                <a:effectLst/>
+                <a:latin typeface="+mn-lt"/>
+              </a:rPr>
+              <a:t>orders</a:t>
+            </a:r>
+            <a:r>
+              <a:rPr lang="ru-RU" sz="1800" b="0" i="0" dirty="0">
+                <a:solidFill>
+                  <a:schemeClr val="tx1"/>
+                </a:solidFill>
+                <a:effectLst/>
+                <a:latin typeface="+mn-lt"/>
+              </a:rPr>
+              <a:t>?</a:t>
+            </a:r>
+            <a:endParaRPr lang="ru-RU" sz="1200" b="0" i="0" dirty="0">
+              <a:solidFill>
+                <a:srgbClr val="F9FAFB"/>
+              </a:solidFill>
+              <a:effectLst/>
+              <a:latin typeface="quote-cjk-patch"/>
+            </a:endParaRPr>
+          </a:p>
+        </p:txBody>
+      </p:sp>
+    </p:spTree>
+    <p:extLst>
+      <p:ext uri="{BB962C8B-B14F-4D97-AF65-F5344CB8AC3E}">
+        <p14:creationId xmlns:p14="http://schemas.microsoft.com/office/powerpoint/2010/main" val="4051577679"/>
+      </p:ext>
+    </p:extLst>
+  </p:cSld>
+  <p:clrMapOvr>
+    <a:masterClrMapping/>
+  </p:clrMapOvr>
+</p:sld>
+</file>
+
+<file path=ppt/slides/slide25.xml><?xml version="1.0" encoding="utf-8"?>
+<p:sld xmlns:a="http://schemas.openxmlformats.org/drawingml/2006/main" xmlns:r="http://schemas.openxmlformats.org/officeDocument/2006/relationships" xmlns:p="http://schemas.openxmlformats.org/presentationml/2006/main">
+  <p:cSld>
+    <p:spTree>
+      <p:nvGrpSpPr>
+        <p:cNvPr id="1" name="">
+          <a:extLst>
+            <a:ext uri="{FF2B5EF4-FFF2-40B4-BE49-F238E27FC236}">
+              <a16:creationId xmlns:a16="http://schemas.microsoft.com/office/drawing/2014/main" id="{C4FC89E4-A2D8-FED5-34ED-1DB94CFB5377}"/>
+            </a:ext>
+          </a:extLst>
+        </p:cNvPr>
+        <p:cNvGrpSpPr/>
+        <p:nvPr/>
+      </p:nvGrpSpPr>
+      <p:grpSpPr>
+        <a:xfrm>
+          <a:off x="0" y="0"/>
+          <a:ext cx="0" cy="0"/>
+          <a:chOff x="0" y="0"/>
+          <a:chExt cx="0" cy="0"/>
+        </a:xfrm>
+      </p:grpSpPr>
+      <p:sp>
+        <p:nvSpPr>
+          <p:cNvPr id="2" name="Title 1">
+            <a:extLst>
+              <a:ext uri="{FF2B5EF4-FFF2-40B4-BE49-F238E27FC236}">
+                <a16:creationId xmlns:a16="http://schemas.microsoft.com/office/drawing/2014/main" id="{0FE00C22-34DA-B635-68F7-1A8636BB8A4D}"/>
+              </a:ext>
+            </a:extLst>
+          </p:cNvPr>
+          <p:cNvSpPr>
+            <a:spLocks noGrp="1"/>
+          </p:cNvSpPr>
+          <p:nvPr>
+            <p:ph type="title"/>
+          </p:nvPr>
+        </p:nvSpPr>
+        <p:spPr>
+          <a:xfrm>
+            <a:off x="808906" y="236622"/>
+            <a:ext cx="9072000" cy="332399"/>
+          </a:xfrm>
+        </p:spPr>
+        <p:txBody>
+          <a:bodyPr/>
+          <a:lstStyle/>
+          <a:p>
+            <a:r>
+              <a:rPr lang="ru-RU" dirty="0"/>
+              <a:t>Материал к лабораторной работе №1</a:t>
+            </a:r>
+            <a:endParaRPr lang="en-US" dirty="0"/>
+          </a:p>
+        </p:txBody>
+      </p:sp>
+      <p:sp>
+        <p:nvSpPr>
+          <p:cNvPr id="4" name="TextBox 3">
+            <a:extLst>
+              <a:ext uri="{FF2B5EF4-FFF2-40B4-BE49-F238E27FC236}">
+                <a16:creationId xmlns:a16="http://schemas.microsoft.com/office/drawing/2014/main" id="{281D5C09-01A3-1CFC-D0AA-91643CB77D36}"/>
+              </a:ext>
+            </a:extLst>
+          </p:cNvPr>
+          <p:cNvSpPr txBox="1"/>
+          <p:nvPr/>
+        </p:nvSpPr>
+        <p:spPr>
+          <a:xfrm>
+            <a:off x="744454" y="792245"/>
+            <a:ext cx="6097002" cy="369332"/>
+          </a:xfrm>
+          <a:prstGeom prst="rect">
+            <a:avLst/>
+          </a:prstGeom>
+          <a:noFill/>
+        </p:spPr>
+        <p:txBody>
+          <a:bodyPr wrap="square">
+            <a:spAutoFit/>
+          </a:bodyPr>
+          <a:lstStyle/>
+          <a:p>
+            <a:pPr marL="0" marR="0" indent="0" algn="l" latinLnBrk="1">
+              <a:lnSpc>
+                <a:spcPct val="100000"/>
+              </a:lnSpc>
+              <a:buNone/>
+            </a:pPr>
+            <a:r>
+              <a:rPr lang="ru-RU" sz="1800" b="0" dirty="0">
+                <a:solidFill>
+                  <a:schemeClr val="tx1"/>
+                </a:solidFill>
+                <a:effectLst/>
+                <a:latin typeface="+mn-lt"/>
+              </a:rPr>
+              <a:t>CREATE DATABASE lab1;</a:t>
+            </a:r>
+            <a:endParaRPr lang="ru-RU" sz="975" b="0" dirty="0">
+              <a:solidFill>
+                <a:srgbClr val="F9FAFB"/>
+              </a:solidFill>
+              <a:effectLst/>
+              <a:latin typeface="Menlo"/>
+            </a:endParaRPr>
+          </a:p>
+        </p:txBody>
+      </p:sp>
+      <p:sp>
+        <p:nvSpPr>
+          <p:cNvPr id="7" name="TextBox 6">
+            <a:extLst>
+              <a:ext uri="{FF2B5EF4-FFF2-40B4-BE49-F238E27FC236}">
+                <a16:creationId xmlns:a16="http://schemas.microsoft.com/office/drawing/2014/main" id="{065128BD-C89E-97CB-CB1E-8C79F6614D88}"/>
+              </a:ext>
+            </a:extLst>
+          </p:cNvPr>
+          <p:cNvSpPr txBox="1"/>
+          <p:nvPr/>
+        </p:nvSpPr>
+        <p:spPr>
+          <a:xfrm>
+            <a:off x="353427" y="1643368"/>
+            <a:ext cx="6097002" cy="2380139"/>
+          </a:xfrm>
+          <a:prstGeom prst="rect">
+            <a:avLst/>
+          </a:prstGeom>
+          <a:noFill/>
+        </p:spPr>
+        <p:txBody>
+          <a:bodyPr wrap="square">
+            <a:spAutoFit/>
+          </a:bodyPr>
+          <a:lstStyle/>
+          <a:p>
+            <a:pPr marL="0" marR="0" indent="0" algn="l">
+              <a:spcBef>
+                <a:spcPts val="1200"/>
+              </a:spcBef>
+              <a:spcAft>
+                <a:spcPts val="1200"/>
+              </a:spcAft>
+              <a:buNone/>
+            </a:pPr>
+            <a:r>
+              <a:rPr lang="ru-RU" sz="1800" b="0" i="0" dirty="0">
+                <a:solidFill>
+                  <a:schemeClr val="tx1"/>
+                </a:solidFill>
+                <a:effectLst/>
+                <a:latin typeface="+mn-lt"/>
+              </a:rPr>
+              <a:t>Лабораторная имитирует базу данных университета. В ней </a:t>
+            </a:r>
+            <a:r>
+              <a:rPr lang="ru-RU" sz="1800" b="1" i="0" dirty="0">
+                <a:solidFill>
+                  <a:schemeClr val="tx1"/>
+                </a:solidFill>
+                <a:effectLst/>
+                <a:latin typeface="+mn-lt"/>
+              </a:rPr>
+              <a:t>пять таблиц</a:t>
+            </a:r>
+            <a:r>
+              <a:rPr lang="ru-RU" sz="1800" b="0" i="0" dirty="0">
+                <a:solidFill>
+                  <a:schemeClr val="tx1"/>
+                </a:solidFill>
+                <a:effectLst/>
+                <a:latin typeface="+mn-lt"/>
+              </a:rPr>
+              <a:t>:</a:t>
+            </a:r>
+          </a:p>
+          <a:p>
+            <a:pPr marL="0" marR="0" lvl="0" indent="-342900" algn="l">
+              <a:spcBef>
+                <a:spcPts val="1200"/>
+              </a:spcBef>
+              <a:spcAft>
+                <a:spcPts val="1200"/>
+              </a:spcAft>
+              <a:buFont typeface="Arial" panose="020B0604020202020204" pitchFamily="34" charset="0"/>
+              <a:buChar char="•"/>
+            </a:pPr>
+            <a:r>
+              <a:rPr lang="ru-RU" sz="1800" b="0" i="0" dirty="0" err="1">
+                <a:solidFill>
+                  <a:schemeClr val="tx1"/>
+                </a:solidFill>
+                <a:effectLst/>
+                <a:latin typeface="+mn-lt"/>
+              </a:rPr>
+              <a:t>students</a:t>
+            </a:r>
+            <a:r>
+              <a:rPr lang="ru-RU" sz="1800" b="0" i="0" dirty="0">
+                <a:solidFill>
+                  <a:schemeClr val="tx1"/>
+                </a:solidFill>
+                <a:effectLst/>
+                <a:latin typeface="+mn-lt"/>
+              </a:rPr>
+              <a:t> — студенты</a:t>
+            </a:r>
+          </a:p>
+          <a:p>
+            <a:pPr marL="0" marR="0" lvl="0" indent="-342900" algn="l">
+              <a:spcBef>
+                <a:spcPts val="450"/>
+              </a:spcBef>
+              <a:spcAft>
+                <a:spcPts val="1200"/>
+              </a:spcAft>
+              <a:buFont typeface="Arial" panose="020B0604020202020204" pitchFamily="34" charset="0"/>
+              <a:buChar char="•"/>
+            </a:pPr>
+            <a:r>
+              <a:rPr lang="ru-RU" sz="1800" b="0" i="0" dirty="0" err="1">
+                <a:solidFill>
+                  <a:schemeClr val="tx1"/>
+                </a:solidFill>
+                <a:effectLst/>
+                <a:latin typeface="+mn-lt"/>
+              </a:rPr>
+              <a:t>teachers</a:t>
+            </a:r>
+            <a:r>
+              <a:rPr lang="ru-RU" sz="1800" b="0" i="0" dirty="0">
+                <a:solidFill>
+                  <a:schemeClr val="tx1"/>
+                </a:solidFill>
+                <a:effectLst/>
+                <a:latin typeface="+mn-lt"/>
+              </a:rPr>
+              <a:t> — преподаватели</a:t>
+            </a:r>
+          </a:p>
+          <a:p>
+            <a:pPr marL="0" marR="0" lvl="0" indent="-342900" algn="l">
+              <a:spcBef>
+                <a:spcPts val="450"/>
+              </a:spcBef>
+              <a:spcAft>
+                <a:spcPts val="1200"/>
+              </a:spcAft>
+              <a:buFont typeface="Arial" panose="020B0604020202020204" pitchFamily="34" charset="0"/>
+              <a:buChar char="•"/>
+            </a:pPr>
+            <a:r>
+              <a:rPr lang="ru-RU" sz="1800" b="0" i="0" dirty="0" err="1">
+                <a:solidFill>
+                  <a:schemeClr val="tx1"/>
+                </a:solidFill>
+                <a:effectLst/>
+                <a:latin typeface="+mn-lt"/>
+              </a:rPr>
+              <a:t>courses</a:t>
+            </a:r>
+            <a:r>
+              <a:rPr lang="ru-RU" sz="1800" b="0" i="0" dirty="0">
+                <a:solidFill>
+                  <a:schemeClr val="tx1"/>
+                </a:solidFill>
+                <a:effectLst/>
+                <a:latin typeface="+mn-lt"/>
+              </a:rPr>
+              <a:t> — курсы</a:t>
+            </a:r>
+          </a:p>
+          <a:p>
+            <a:pPr marL="0" marR="0" lvl="0" indent="-342900" algn="l">
+              <a:spcBef>
+                <a:spcPts val="450"/>
+              </a:spcBef>
+              <a:spcAft>
+                <a:spcPts val="1200"/>
+              </a:spcAft>
+              <a:buFont typeface="Arial" panose="020B0604020202020204" pitchFamily="34" charset="0"/>
+              <a:buChar char="•"/>
+            </a:pPr>
+            <a:r>
+              <a:rPr lang="ru-RU" sz="1800" b="0" i="0" dirty="0" err="1">
+                <a:solidFill>
+                  <a:schemeClr val="tx1"/>
+                </a:solidFill>
+                <a:effectLst/>
+                <a:latin typeface="+mn-lt"/>
+              </a:rPr>
+              <a:t>enrollments</a:t>
+            </a:r>
+            <a:r>
+              <a:rPr lang="ru-RU" sz="1800" b="0" i="0" dirty="0">
+                <a:solidFill>
+                  <a:schemeClr val="tx1"/>
+                </a:solidFill>
+                <a:effectLst/>
+                <a:latin typeface="+mn-lt"/>
+              </a:rPr>
+              <a:t> — записи студентов на курсы</a:t>
+            </a:r>
+          </a:p>
+          <a:p>
+            <a:pPr marL="0" marR="0" lvl="0" indent="-342900" algn="l">
+              <a:spcBef>
+                <a:spcPts val="450"/>
+              </a:spcBef>
+              <a:spcAft>
+                <a:spcPts val="1200"/>
+              </a:spcAft>
+              <a:buFont typeface="Arial" panose="020B0604020202020204" pitchFamily="34" charset="0"/>
+              <a:buChar char="•"/>
+            </a:pPr>
+            <a:r>
+              <a:rPr lang="ru-RU" sz="1800" b="0" i="0" dirty="0" err="1">
+                <a:solidFill>
+                  <a:schemeClr val="tx1"/>
+                </a:solidFill>
+                <a:effectLst/>
+                <a:latin typeface="+mn-lt"/>
+              </a:rPr>
+              <a:t>grades</a:t>
+            </a:r>
+            <a:r>
+              <a:rPr lang="ru-RU" sz="1800" b="0" i="0" dirty="0">
+                <a:solidFill>
+                  <a:schemeClr val="tx1"/>
+                </a:solidFill>
+                <a:effectLst/>
+                <a:latin typeface="+mn-lt"/>
+              </a:rPr>
+              <a:t> — оценки студентов по курсам</a:t>
+            </a:r>
+            <a:endParaRPr lang="ru-RU" sz="1200" b="0" i="0" dirty="0">
+              <a:solidFill>
+                <a:srgbClr val="F9FAFB"/>
+              </a:solidFill>
+              <a:effectLst/>
+              <a:latin typeface="quote-cjk-patch"/>
+            </a:endParaRPr>
+          </a:p>
+        </p:txBody>
+      </p:sp>
+      <p:sp>
+        <p:nvSpPr>
+          <p:cNvPr id="9" name="TextBox 8">
+            <a:extLst>
+              <a:ext uri="{FF2B5EF4-FFF2-40B4-BE49-F238E27FC236}">
+                <a16:creationId xmlns:a16="http://schemas.microsoft.com/office/drawing/2014/main" id="{B58064AC-CE88-C92E-8203-A96D9D1775D7}"/>
+              </a:ext>
+            </a:extLst>
+          </p:cNvPr>
+          <p:cNvSpPr txBox="1"/>
+          <p:nvPr/>
+        </p:nvSpPr>
+        <p:spPr>
+          <a:xfrm>
+            <a:off x="7999496" y="1808383"/>
+            <a:ext cx="2943225" cy="369332"/>
+          </a:xfrm>
+          <a:prstGeom prst="rect">
+            <a:avLst/>
+          </a:prstGeom>
+          <a:noFill/>
+        </p:spPr>
+        <p:txBody>
+          <a:bodyPr wrap="square">
+            <a:spAutoFit/>
+          </a:bodyPr>
+          <a:lstStyle/>
+          <a:p>
+            <a:r>
+              <a:rPr lang="ru-RU" sz="1800" b="1" i="0" dirty="0">
+                <a:solidFill>
+                  <a:schemeClr val="tx1"/>
+                </a:solidFill>
+                <a:effectLst/>
+                <a:latin typeface="+mn-lt"/>
+              </a:rPr>
+              <a:t>Схема связей:</a:t>
+            </a:r>
+            <a:endParaRPr lang="ru-RU" dirty="0"/>
+          </a:p>
+        </p:txBody>
+      </p:sp>
+      <p:sp>
+        <p:nvSpPr>
+          <p:cNvPr id="11" name="TextBox 10">
+            <a:extLst>
+              <a:ext uri="{FF2B5EF4-FFF2-40B4-BE49-F238E27FC236}">
+                <a16:creationId xmlns:a16="http://schemas.microsoft.com/office/drawing/2014/main" id="{1A203BA8-EF5B-28ED-2568-D23C8954324C}"/>
+              </a:ext>
+            </a:extLst>
+          </p:cNvPr>
+          <p:cNvSpPr txBox="1"/>
+          <p:nvPr/>
+        </p:nvSpPr>
+        <p:spPr>
+          <a:xfrm>
+            <a:off x="5863892" y="2659506"/>
+            <a:ext cx="6097002" cy="1200329"/>
+          </a:xfrm>
+          <a:prstGeom prst="rect">
+            <a:avLst/>
+          </a:prstGeom>
+          <a:noFill/>
+        </p:spPr>
+        <p:txBody>
+          <a:bodyPr wrap="square">
+            <a:spAutoFit/>
+          </a:bodyPr>
+          <a:lstStyle/>
+          <a:p>
+            <a:r>
+              <a:rPr lang="ru-RU" dirty="0" err="1"/>
+              <a:t>teachers</a:t>
+            </a:r>
+            <a:r>
+              <a:rPr lang="ru-RU" dirty="0"/>
+              <a:t> (1) ───&lt; </a:t>
+            </a:r>
+            <a:r>
+              <a:rPr lang="ru-RU" dirty="0" err="1"/>
+              <a:t>courses</a:t>
+            </a:r>
+            <a:r>
+              <a:rPr lang="ru-RU" dirty="0"/>
+              <a:t> (1) ───&lt; </a:t>
+            </a:r>
+            <a:r>
+              <a:rPr lang="ru-RU" dirty="0" err="1"/>
+              <a:t>enrollments</a:t>
+            </a:r>
+            <a:r>
+              <a:rPr lang="ru-RU" dirty="0"/>
+              <a:t> &gt;─── (1) </a:t>
+            </a:r>
+            <a:r>
+              <a:rPr lang="ru-RU" dirty="0" err="1"/>
+              <a:t>students</a:t>
+            </a:r>
+            <a:endParaRPr lang="ru-RU" dirty="0"/>
+          </a:p>
+          <a:p>
+            <a:r>
+              <a:rPr lang="ru-RU" dirty="0"/>
+              <a:t>                                          │</a:t>
+            </a:r>
+          </a:p>
+          <a:p>
+            <a:r>
+              <a:rPr lang="ru-RU" dirty="0"/>
+              <a:t>                                          └───&lt; </a:t>
+            </a:r>
+            <a:r>
+              <a:rPr lang="ru-RU" dirty="0" err="1"/>
+              <a:t>grades</a:t>
+            </a:r>
+            <a:endParaRPr lang="ru-RU" dirty="0"/>
+          </a:p>
+        </p:txBody>
+      </p:sp>
+      <p:sp>
+        <p:nvSpPr>
+          <p:cNvPr id="13" name="TextBox 12">
+            <a:extLst>
+              <a:ext uri="{FF2B5EF4-FFF2-40B4-BE49-F238E27FC236}">
+                <a16:creationId xmlns:a16="http://schemas.microsoft.com/office/drawing/2014/main" id="{C20D1DA2-2BF3-B268-1B3B-80AD727A1A47}"/>
+              </a:ext>
+            </a:extLst>
+          </p:cNvPr>
+          <p:cNvSpPr txBox="1"/>
+          <p:nvPr/>
+        </p:nvSpPr>
+        <p:spPr>
+          <a:xfrm>
+            <a:off x="5533022" y="4010456"/>
+            <a:ext cx="6658978" cy="2408352"/>
+          </a:xfrm>
+          <a:prstGeom prst="rect">
+            <a:avLst/>
+          </a:prstGeom>
+          <a:noFill/>
+        </p:spPr>
+        <p:txBody>
+          <a:bodyPr wrap="square">
+            <a:spAutoFit/>
+          </a:bodyPr>
+          <a:lstStyle/>
+          <a:p>
+            <a:pPr marL="0" marR="0" lvl="0" indent="-342900" algn="l">
+              <a:spcBef>
+                <a:spcPts val="1200"/>
+              </a:spcBef>
+              <a:spcAft>
+                <a:spcPts val="1200"/>
+              </a:spcAft>
+              <a:buFont typeface="Arial" panose="020B0604020202020204" pitchFamily="34" charset="0"/>
+              <a:buChar char="•"/>
+            </a:pPr>
+            <a:r>
+              <a:rPr lang="ru-RU" sz="1800" b="0" i="0" dirty="0">
+                <a:solidFill>
+                  <a:schemeClr val="tx1"/>
+                </a:solidFill>
+                <a:effectLst/>
+                <a:latin typeface="+mn-lt"/>
+              </a:rPr>
+              <a:t>Один преподаватель ведёт несколько курсов.</a:t>
+            </a:r>
+          </a:p>
+          <a:p>
+            <a:pPr marL="0" marR="0" lvl="0" indent="-342900" algn="l">
+              <a:spcBef>
+                <a:spcPts val="450"/>
+              </a:spcBef>
+              <a:spcAft>
+                <a:spcPts val="1200"/>
+              </a:spcAft>
+              <a:buFont typeface="Arial" panose="020B0604020202020204" pitchFamily="34" charset="0"/>
+              <a:buChar char="•"/>
+            </a:pPr>
+            <a:r>
+              <a:rPr lang="ru-RU" sz="1800" b="0" i="0" dirty="0">
+                <a:solidFill>
+                  <a:schemeClr val="tx1"/>
+                </a:solidFill>
+                <a:effectLst/>
+                <a:latin typeface="+mn-lt"/>
+              </a:rPr>
+              <a:t>На один курс записано много студентов (через </a:t>
+            </a:r>
+            <a:r>
+              <a:rPr lang="ru-RU" sz="1800" b="0" i="0" dirty="0" err="1">
+                <a:solidFill>
+                  <a:schemeClr val="tx1"/>
+                </a:solidFill>
+                <a:effectLst/>
+                <a:latin typeface="+mn-lt"/>
+              </a:rPr>
+              <a:t>enrollments</a:t>
+            </a:r>
+            <a:r>
+              <a:rPr lang="ru-RU" sz="1800" b="0" i="0" dirty="0">
+                <a:solidFill>
+                  <a:schemeClr val="tx1"/>
+                </a:solidFill>
+                <a:effectLst/>
+                <a:latin typeface="+mn-lt"/>
+              </a:rPr>
+              <a:t>).</a:t>
+            </a:r>
+          </a:p>
+          <a:p>
+            <a:pPr marL="0" marR="0" lvl="0" indent="-342900" algn="l">
+              <a:spcBef>
+                <a:spcPts val="450"/>
+              </a:spcBef>
+              <a:spcAft>
+                <a:spcPts val="1200"/>
+              </a:spcAft>
+              <a:buFont typeface="Arial" panose="020B0604020202020204" pitchFamily="34" charset="0"/>
+              <a:buChar char="•"/>
+            </a:pPr>
+            <a:r>
+              <a:rPr lang="ru-RU" sz="1800" b="0" i="0" dirty="0">
+                <a:solidFill>
+                  <a:schemeClr val="tx1"/>
+                </a:solidFill>
+                <a:effectLst/>
+                <a:latin typeface="+mn-lt"/>
+              </a:rPr>
+              <a:t>Один студент может быть записан на много курсов.</a:t>
+            </a:r>
+          </a:p>
+          <a:p>
+            <a:pPr marL="0" marR="0" lvl="0" indent="-342900" algn="l">
+              <a:spcBef>
+                <a:spcPts val="450"/>
+              </a:spcBef>
+              <a:spcAft>
+                <a:spcPts val="1200"/>
+              </a:spcAft>
+              <a:buFont typeface="Arial" panose="020B0604020202020204" pitchFamily="34" charset="0"/>
+              <a:buChar char="•"/>
+            </a:pPr>
+            <a:r>
+              <a:rPr lang="ru-RU" sz="1800" b="0" i="0" dirty="0">
+                <a:solidFill>
+                  <a:schemeClr val="tx1"/>
+                </a:solidFill>
+                <a:effectLst/>
+                <a:latin typeface="+mn-lt"/>
+              </a:rPr>
+              <a:t>У каждого студента по каждому курсу может быть одна или несколько оценок.</a:t>
+            </a:r>
+            <a:endParaRPr lang="ru-RU" sz="1200" b="0" i="0" dirty="0">
+              <a:solidFill>
+                <a:srgbClr val="F9FAFB"/>
+              </a:solidFill>
+              <a:effectLst/>
+              <a:latin typeface="quote-cjk-patch"/>
+            </a:endParaRPr>
+          </a:p>
+        </p:txBody>
+      </p:sp>
+    </p:spTree>
+    <p:extLst>
+      <p:ext uri="{BB962C8B-B14F-4D97-AF65-F5344CB8AC3E}">
+        <p14:creationId xmlns:p14="http://schemas.microsoft.com/office/powerpoint/2010/main" val="821556408"/>
+      </p:ext>
+    </p:extLst>
+  </p:cSld>
+  <p:clrMapOvr>
+    <a:masterClrMapping/>
+  </p:clrMapOvr>
+</p:sld>
+</file>
+
+<file path=ppt/slides/slide26.xml><?xml version="1.0" encoding="utf-8"?>
+<p:sld xmlns:a="http://schemas.openxmlformats.org/drawingml/2006/main" xmlns:r="http://schemas.openxmlformats.org/officeDocument/2006/relationships" xmlns:p="http://schemas.openxmlformats.org/presentationml/2006/main">
+  <p:cSld>
+    <p:spTree>
+      <p:nvGrpSpPr>
+        <p:cNvPr id="1" name="">
+          <a:extLst>
+            <a:ext uri="{FF2B5EF4-FFF2-40B4-BE49-F238E27FC236}">
+              <a16:creationId xmlns:a16="http://schemas.microsoft.com/office/drawing/2014/main" id="{0C41FB20-A190-61C3-7D30-D124307165FD}"/>
+            </a:ext>
+          </a:extLst>
+        </p:cNvPr>
+        <p:cNvGrpSpPr/>
+        <p:nvPr/>
+      </p:nvGrpSpPr>
+      <p:grpSpPr>
+        <a:xfrm>
+          <a:off x="0" y="0"/>
+          <a:ext cx="0" cy="0"/>
+          <a:chOff x="0" y="0"/>
+          <a:chExt cx="0" cy="0"/>
+        </a:xfrm>
+      </p:grpSpPr>
+      <p:sp>
+        <p:nvSpPr>
+          <p:cNvPr id="2" name="Title 1">
+            <a:extLst>
+              <a:ext uri="{FF2B5EF4-FFF2-40B4-BE49-F238E27FC236}">
+                <a16:creationId xmlns:a16="http://schemas.microsoft.com/office/drawing/2014/main" id="{AABA47F9-1224-8379-3B17-B255C1992387}"/>
+              </a:ext>
+            </a:extLst>
+          </p:cNvPr>
+          <p:cNvSpPr>
+            <a:spLocks noGrp="1"/>
+          </p:cNvSpPr>
+          <p:nvPr>
+            <p:ph type="title"/>
+          </p:nvPr>
+        </p:nvSpPr>
+        <p:spPr>
+          <a:xfrm>
+            <a:off x="808906" y="236622"/>
+            <a:ext cx="9072000" cy="332399"/>
+          </a:xfrm>
+        </p:spPr>
+        <p:txBody>
+          <a:bodyPr/>
+          <a:lstStyle/>
+          <a:p>
+            <a:r>
+              <a:rPr lang="ru-RU" dirty="0"/>
+              <a:t>Материал к лабораторной работе №1</a:t>
+            </a:r>
+            <a:endParaRPr lang="en-US" dirty="0"/>
+          </a:p>
+        </p:txBody>
+      </p:sp>
+      <p:sp>
+        <p:nvSpPr>
+          <p:cNvPr id="5" name="TextBox 4">
+            <a:extLst>
+              <a:ext uri="{FF2B5EF4-FFF2-40B4-BE49-F238E27FC236}">
+                <a16:creationId xmlns:a16="http://schemas.microsoft.com/office/drawing/2014/main" id="{67F46684-FE5E-C78D-13C9-492E440F98D6}"/>
+              </a:ext>
+            </a:extLst>
+          </p:cNvPr>
+          <p:cNvSpPr txBox="1"/>
+          <p:nvPr/>
+        </p:nvSpPr>
+        <p:spPr>
+          <a:xfrm>
+            <a:off x="365459" y="1058232"/>
+            <a:ext cx="3695200" cy="4431983"/>
+          </a:xfrm>
+          <a:prstGeom prst="rect">
+            <a:avLst/>
+          </a:prstGeom>
+          <a:noFill/>
+        </p:spPr>
+        <p:txBody>
+          <a:bodyPr wrap="square">
+            <a:spAutoFit/>
+          </a:bodyPr>
+          <a:lstStyle/>
+          <a:p>
+            <a:r>
+              <a:rPr lang="ru-RU" sz="600" dirty="0"/>
+              <a:t>-- Преподаватели</a:t>
+            </a:r>
+          </a:p>
+          <a:p>
+            <a:r>
+              <a:rPr lang="ru-RU" sz="600" dirty="0"/>
+              <a:t>CREATE TABLE </a:t>
+            </a:r>
+            <a:r>
+              <a:rPr lang="ru-RU" sz="600" dirty="0" err="1"/>
+              <a:t>teachers</a:t>
+            </a:r>
+            <a:r>
+              <a:rPr lang="ru-RU" sz="600" dirty="0"/>
+              <a:t> (</a:t>
+            </a:r>
+          </a:p>
+          <a:p>
+            <a:r>
+              <a:rPr lang="ru-RU" sz="600" dirty="0"/>
+              <a:t>    </a:t>
+            </a:r>
+            <a:r>
+              <a:rPr lang="ru-RU" sz="600" dirty="0" err="1"/>
+              <a:t>id</a:t>
+            </a:r>
+            <a:r>
+              <a:rPr lang="ru-RU" sz="600" dirty="0"/>
+              <a:t>          SERIAL PRIMARY KEY,</a:t>
+            </a:r>
+          </a:p>
+          <a:p>
+            <a:r>
+              <a:rPr lang="ru-RU" sz="600" dirty="0"/>
+              <a:t>    </a:t>
+            </a:r>
+            <a:r>
+              <a:rPr lang="ru-RU" sz="600" dirty="0" err="1"/>
+              <a:t>full_name</a:t>
+            </a:r>
+            <a:r>
+              <a:rPr lang="ru-RU" sz="600" dirty="0"/>
+              <a:t>   VARCHAR(150) NOT NULL,</a:t>
+            </a:r>
+          </a:p>
+          <a:p>
+            <a:r>
+              <a:rPr lang="ru-RU" sz="600" dirty="0"/>
+              <a:t>    </a:t>
+            </a:r>
+            <a:r>
+              <a:rPr lang="ru-RU" sz="600" dirty="0" err="1"/>
+              <a:t>department</a:t>
+            </a:r>
+            <a:r>
+              <a:rPr lang="ru-RU" sz="600" dirty="0"/>
+              <a:t>  VARCHAR(100) NOT NULL,</a:t>
+            </a:r>
+          </a:p>
+          <a:p>
+            <a:r>
+              <a:rPr lang="ru-RU" sz="600" dirty="0"/>
+              <a:t>    </a:t>
+            </a:r>
+            <a:r>
+              <a:rPr lang="ru-RU" sz="600" dirty="0" err="1"/>
+              <a:t>hire_date</a:t>
+            </a:r>
+            <a:r>
+              <a:rPr lang="ru-RU" sz="600" dirty="0"/>
+              <a:t>   DATE NOT NULL,</a:t>
+            </a:r>
+          </a:p>
+          <a:p>
+            <a:r>
+              <a:rPr lang="ru-RU" sz="600" dirty="0"/>
+              <a:t>    </a:t>
+            </a:r>
+            <a:r>
+              <a:rPr lang="ru-RU" sz="600" dirty="0" err="1"/>
+              <a:t>salary</a:t>
+            </a:r>
+            <a:r>
+              <a:rPr lang="ru-RU" sz="600" dirty="0"/>
+              <a:t>      NUMERIC(10, 2) NOT NULL CHECK (</a:t>
+            </a:r>
+            <a:r>
+              <a:rPr lang="ru-RU" sz="600" dirty="0" err="1"/>
+              <a:t>salary</a:t>
+            </a:r>
+            <a:r>
+              <a:rPr lang="ru-RU" sz="600" dirty="0"/>
+              <a:t> &gt; 0)</a:t>
+            </a:r>
+          </a:p>
+          <a:p>
+            <a:r>
+              <a:rPr lang="ru-RU" sz="600" dirty="0"/>
+              <a:t>);</a:t>
+            </a:r>
+          </a:p>
+          <a:p>
+            <a:endParaRPr lang="ru-RU" sz="600" dirty="0"/>
+          </a:p>
+          <a:p>
+            <a:r>
+              <a:rPr lang="ru-RU" sz="600" dirty="0"/>
+              <a:t>-- Студенты</a:t>
+            </a:r>
+          </a:p>
+          <a:p>
+            <a:r>
+              <a:rPr lang="ru-RU" sz="600" dirty="0"/>
+              <a:t>CREATE TABLE </a:t>
+            </a:r>
+            <a:r>
+              <a:rPr lang="ru-RU" sz="600" dirty="0" err="1"/>
+              <a:t>students</a:t>
+            </a:r>
+            <a:r>
+              <a:rPr lang="ru-RU" sz="600" dirty="0"/>
+              <a:t> (</a:t>
+            </a:r>
+          </a:p>
+          <a:p>
+            <a:r>
+              <a:rPr lang="ru-RU" sz="600" dirty="0"/>
+              <a:t>    </a:t>
+            </a:r>
+            <a:r>
+              <a:rPr lang="ru-RU" sz="600" dirty="0" err="1"/>
+              <a:t>id</a:t>
+            </a:r>
+            <a:r>
+              <a:rPr lang="ru-RU" sz="600" dirty="0"/>
+              <a:t>           SERIAL PRIMARY KEY,</a:t>
+            </a:r>
+          </a:p>
+          <a:p>
+            <a:r>
+              <a:rPr lang="ru-RU" sz="600" dirty="0"/>
+              <a:t>    </a:t>
+            </a:r>
+            <a:r>
+              <a:rPr lang="ru-RU" sz="600" dirty="0" err="1"/>
+              <a:t>full_name</a:t>
+            </a:r>
+            <a:r>
+              <a:rPr lang="ru-RU" sz="600" dirty="0"/>
+              <a:t>    VARCHAR(150) NOT NULL,</a:t>
+            </a:r>
+          </a:p>
+          <a:p>
+            <a:r>
+              <a:rPr lang="ru-RU" sz="600" dirty="0"/>
+              <a:t>    </a:t>
+            </a:r>
+            <a:r>
+              <a:rPr lang="ru-RU" sz="600" dirty="0" err="1"/>
+              <a:t>birth_date</a:t>
+            </a:r>
+            <a:r>
+              <a:rPr lang="ru-RU" sz="600" dirty="0"/>
+              <a:t>   DATE NOT NULL,</a:t>
+            </a:r>
+          </a:p>
+          <a:p>
+            <a:r>
+              <a:rPr lang="ru-RU" sz="600" dirty="0"/>
+              <a:t>    </a:t>
+            </a:r>
+            <a:r>
+              <a:rPr lang="ru-RU" sz="600" dirty="0" err="1"/>
+              <a:t>city</a:t>
+            </a:r>
+            <a:r>
+              <a:rPr lang="ru-RU" sz="600" dirty="0"/>
+              <a:t>         VARCHAR(100) NOT NULL,</a:t>
+            </a:r>
+          </a:p>
+          <a:p>
+            <a:r>
+              <a:rPr lang="ru-RU" sz="600" dirty="0"/>
+              <a:t>    </a:t>
+            </a:r>
+            <a:r>
+              <a:rPr lang="ru-RU" sz="600" dirty="0" err="1"/>
+              <a:t>email</a:t>
+            </a:r>
+            <a:r>
+              <a:rPr lang="ru-RU" sz="600" dirty="0"/>
+              <a:t>        VARCHAR(150) UNIQUE,</a:t>
+            </a:r>
+          </a:p>
+          <a:p>
+            <a:r>
+              <a:rPr lang="ru-RU" sz="600" dirty="0"/>
+              <a:t>    </a:t>
+            </a:r>
+            <a:r>
+              <a:rPr lang="ru-RU" sz="600" dirty="0" err="1"/>
+              <a:t>enrolled_at</a:t>
+            </a:r>
+            <a:r>
+              <a:rPr lang="ru-RU" sz="600" dirty="0"/>
+              <a:t>  DATE NOT NULL DEFAULT CURRENT_DATE,</a:t>
+            </a:r>
+          </a:p>
+          <a:p>
+            <a:r>
+              <a:rPr lang="ru-RU" sz="600" dirty="0"/>
+              <a:t>    </a:t>
+            </a:r>
+            <a:r>
+              <a:rPr lang="ru-RU" sz="600" dirty="0" err="1"/>
+              <a:t>is_active</a:t>
+            </a:r>
+            <a:r>
+              <a:rPr lang="ru-RU" sz="600" dirty="0"/>
+              <a:t>    BOOLEAN NOT NULL DEFAULT TRUE</a:t>
+            </a:r>
+          </a:p>
+          <a:p>
+            <a:r>
+              <a:rPr lang="ru-RU" sz="600" dirty="0"/>
+              <a:t>);</a:t>
+            </a:r>
+          </a:p>
+          <a:p>
+            <a:endParaRPr lang="ru-RU" sz="600" dirty="0"/>
+          </a:p>
+          <a:p>
+            <a:r>
+              <a:rPr lang="ru-RU" sz="600" dirty="0"/>
+              <a:t>-- Курсы</a:t>
+            </a:r>
+          </a:p>
+          <a:p>
+            <a:r>
+              <a:rPr lang="ru-RU" sz="600" dirty="0"/>
+              <a:t>CREATE TABLE </a:t>
+            </a:r>
+            <a:r>
+              <a:rPr lang="ru-RU" sz="600" dirty="0" err="1"/>
+              <a:t>courses</a:t>
+            </a:r>
+            <a:r>
+              <a:rPr lang="ru-RU" sz="600" dirty="0"/>
+              <a:t> (</a:t>
+            </a:r>
+          </a:p>
+          <a:p>
+            <a:r>
+              <a:rPr lang="ru-RU" sz="600" dirty="0"/>
+              <a:t>    </a:t>
+            </a:r>
+            <a:r>
+              <a:rPr lang="ru-RU" sz="600" dirty="0" err="1"/>
+              <a:t>id</a:t>
+            </a:r>
+            <a:r>
+              <a:rPr lang="ru-RU" sz="600" dirty="0"/>
+              <a:t>           SERIAL PRIMARY KEY,</a:t>
+            </a:r>
+          </a:p>
+          <a:p>
+            <a:r>
+              <a:rPr lang="ru-RU" sz="600" dirty="0"/>
+              <a:t>    </a:t>
+            </a:r>
+            <a:r>
+              <a:rPr lang="ru-RU" sz="600" dirty="0" err="1"/>
+              <a:t>title</a:t>
+            </a:r>
+            <a:r>
+              <a:rPr lang="ru-RU" sz="600" dirty="0"/>
+              <a:t>        VARCHAR(200) NOT NULL,</a:t>
+            </a:r>
+          </a:p>
+          <a:p>
+            <a:r>
+              <a:rPr lang="ru-RU" sz="600" dirty="0"/>
+              <a:t>    </a:t>
+            </a:r>
+            <a:r>
+              <a:rPr lang="ru-RU" sz="600" dirty="0" err="1"/>
+              <a:t>teacher_id</a:t>
+            </a:r>
+            <a:r>
+              <a:rPr lang="ru-RU" sz="600" dirty="0"/>
+              <a:t>   INT NOT NULL REFERENCES </a:t>
+            </a:r>
+            <a:r>
+              <a:rPr lang="ru-RU" sz="600" dirty="0" err="1"/>
+              <a:t>teachers</a:t>
+            </a:r>
+            <a:r>
+              <a:rPr lang="ru-RU" sz="600" dirty="0"/>
+              <a:t>(</a:t>
+            </a:r>
+            <a:r>
+              <a:rPr lang="ru-RU" sz="600" dirty="0" err="1"/>
+              <a:t>id</a:t>
+            </a:r>
+            <a:r>
+              <a:rPr lang="ru-RU" sz="600" dirty="0"/>
+              <a:t>) ON DELETE RESTRICT,</a:t>
+            </a:r>
+          </a:p>
+          <a:p>
+            <a:r>
+              <a:rPr lang="ru-RU" sz="600" dirty="0"/>
+              <a:t>    </a:t>
+            </a:r>
+            <a:r>
+              <a:rPr lang="ru-RU" sz="600" dirty="0" err="1"/>
+              <a:t>credits</a:t>
+            </a:r>
+            <a:r>
+              <a:rPr lang="ru-RU" sz="600" dirty="0"/>
+              <a:t>      INT NOT NULL CHECK (</a:t>
+            </a:r>
+            <a:r>
+              <a:rPr lang="ru-RU" sz="600" dirty="0" err="1"/>
+              <a:t>credits</a:t>
+            </a:r>
+            <a:r>
+              <a:rPr lang="ru-RU" sz="600" dirty="0"/>
+              <a:t> BETWEEN 1 AND 10),</a:t>
+            </a:r>
+          </a:p>
+          <a:p>
+            <a:r>
+              <a:rPr lang="ru-RU" sz="600" dirty="0"/>
+              <a:t>    </a:t>
+            </a:r>
+            <a:r>
+              <a:rPr lang="ru-RU" sz="600" dirty="0" err="1"/>
+              <a:t>year</a:t>
+            </a:r>
+            <a:r>
+              <a:rPr lang="ru-RU" sz="600" dirty="0"/>
+              <a:t>         INT NOT NULL CHECK (</a:t>
+            </a:r>
+            <a:r>
+              <a:rPr lang="ru-RU" sz="600" dirty="0" err="1"/>
+              <a:t>year</a:t>
+            </a:r>
+            <a:r>
+              <a:rPr lang="ru-RU" sz="600" dirty="0"/>
+              <a:t> BETWEEN 2000 AND 2100),</a:t>
+            </a:r>
+          </a:p>
+          <a:p>
+            <a:r>
+              <a:rPr lang="ru-RU" sz="600" dirty="0"/>
+              <a:t>    </a:t>
+            </a:r>
+            <a:r>
+              <a:rPr lang="ru-RU" sz="600" dirty="0" err="1"/>
+              <a:t>is_elective</a:t>
+            </a:r>
+            <a:r>
+              <a:rPr lang="ru-RU" sz="600" dirty="0"/>
+              <a:t>  BOOLEAN NOT NULL DEFAULT FALSE</a:t>
+            </a:r>
+          </a:p>
+          <a:p>
+            <a:r>
+              <a:rPr lang="ru-RU" sz="600" dirty="0"/>
+              <a:t>);</a:t>
+            </a:r>
+          </a:p>
+          <a:p>
+            <a:endParaRPr lang="ru-RU" sz="600" dirty="0"/>
+          </a:p>
+          <a:p>
+            <a:r>
+              <a:rPr lang="ru-RU" sz="600" dirty="0"/>
+              <a:t>-- Записи студентов на курсы</a:t>
+            </a:r>
+          </a:p>
+          <a:p>
+            <a:r>
+              <a:rPr lang="ru-RU" sz="600" dirty="0"/>
+              <a:t>CREATE TABLE </a:t>
+            </a:r>
+            <a:r>
+              <a:rPr lang="ru-RU" sz="600" dirty="0" err="1"/>
+              <a:t>enrollments</a:t>
+            </a:r>
+            <a:r>
+              <a:rPr lang="ru-RU" sz="600" dirty="0"/>
+              <a:t> (</a:t>
+            </a:r>
+          </a:p>
+          <a:p>
+            <a:r>
+              <a:rPr lang="ru-RU" sz="600" dirty="0"/>
+              <a:t>    </a:t>
+            </a:r>
+            <a:r>
+              <a:rPr lang="ru-RU" sz="600" dirty="0" err="1"/>
+              <a:t>id</a:t>
+            </a:r>
+            <a:r>
+              <a:rPr lang="ru-RU" sz="600" dirty="0"/>
+              <a:t>           SERIAL PRIMARY KEY,</a:t>
+            </a:r>
+          </a:p>
+          <a:p>
+            <a:r>
+              <a:rPr lang="ru-RU" sz="600" dirty="0"/>
+              <a:t>    </a:t>
+            </a:r>
+            <a:r>
+              <a:rPr lang="ru-RU" sz="600" dirty="0" err="1"/>
+              <a:t>student_id</a:t>
+            </a:r>
+            <a:r>
+              <a:rPr lang="ru-RU" sz="600" dirty="0"/>
+              <a:t>   INT NOT NULL REFERENCES </a:t>
+            </a:r>
+            <a:r>
+              <a:rPr lang="ru-RU" sz="600" dirty="0" err="1"/>
+              <a:t>students</a:t>
+            </a:r>
+            <a:r>
+              <a:rPr lang="ru-RU" sz="600" dirty="0"/>
+              <a:t>(</a:t>
+            </a:r>
+            <a:r>
+              <a:rPr lang="ru-RU" sz="600" dirty="0" err="1"/>
+              <a:t>id</a:t>
+            </a:r>
+            <a:r>
+              <a:rPr lang="ru-RU" sz="600" dirty="0"/>
+              <a:t>) ON DELETE CASCADE,</a:t>
+            </a:r>
+          </a:p>
+          <a:p>
+            <a:r>
+              <a:rPr lang="ru-RU" sz="600" dirty="0"/>
+              <a:t>    </a:t>
+            </a:r>
+            <a:r>
+              <a:rPr lang="ru-RU" sz="600" dirty="0" err="1"/>
+              <a:t>course_id</a:t>
+            </a:r>
+            <a:r>
+              <a:rPr lang="ru-RU" sz="600" dirty="0"/>
+              <a:t>    INT NOT NULL REFERENCES </a:t>
+            </a:r>
+            <a:r>
+              <a:rPr lang="ru-RU" sz="600" dirty="0" err="1"/>
+              <a:t>courses</a:t>
+            </a:r>
+            <a:r>
+              <a:rPr lang="ru-RU" sz="600" dirty="0"/>
+              <a:t>(</a:t>
+            </a:r>
+            <a:r>
+              <a:rPr lang="ru-RU" sz="600" dirty="0" err="1"/>
+              <a:t>id</a:t>
+            </a:r>
+            <a:r>
+              <a:rPr lang="ru-RU" sz="600" dirty="0"/>
+              <a:t>) ON DELETE CASCADE,</a:t>
+            </a:r>
+          </a:p>
+          <a:p>
+            <a:r>
+              <a:rPr lang="ru-RU" sz="600" dirty="0"/>
+              <a:t>    </a:t>
+            </a:r>
+            <a:r>
+              <a:rPr lang="ru-RU" sz="600" dirty="0" err="1"/>
+              <a:t>enrolled_on</a:t>
+            </a:r>
+            <a:r>
+              <a:rPr lang="ru-RU" sz="600" dirty="0"/>
+              <a:t>  DATE NOT NULL DEFAULT CURRENT_DATE,</a:t>
+            </a:r>
+          </a:p>
+          <a:p>
+            <a:r>
+              <a:rPr lang="ru-RU" sz="600" dirty="0"/>
+              <a:t>    UNIQUE (</a:t>
+            </a:r>
+            <a:r>
+              <a:rPr lang="ru-RU" sz="600" dirty="0" err="1"/>
+              <a:t>student_id</a:t>
+            </a:r>
+            <a:r>
+              <a:rPr lang="ru-RU" sz="600" dirty="0"/>
+              <a:t>, </a:t>
+            </a:r>
+            <a:r>
+              <a:rPr lang="ru-RU" sz="600" dirty="0" err="1"/>
+              <a:t>course_id</a:t>
+            </a:r>
+            <a:r>
+              <a:rPr lang="ru-RU" sz="600" dirty="0"/>
+              <a:t>)</a:t>
+            </a:r>
+          </a:p>
+          <a:p>
+            <a:r>
+              <a:rPr lang="ru-RU" sz="600" dirty="0"/>
+              <a:t>);</a:t>
+            </a:r>
+          </a:p>
+          <a:p>
+            <a:endParaRPr lang="ru-RU" sz="600" dirty="0"/>
+          </a:p>
+          <a:p>
+            <a:r>
+              <a:rPr lang="ru-RU" sz="600" dirty="0"/>
+              <a:t>-- Оценки</a:t>
+            </a:r>
+          </a:p>
+          <a:p>
+            <a:r>
+              <a:rPr lang="ru-RU" sz="600" dirty="0"/>
+              <a:t>CREATE TABLE </a:t>
+            </a:r>
+            <a:r>
+              <a:rPr lang="ru-RU" sz="600" dirty="0" err="1"/>
+              <a:t>grades</a:t>
+            </a:r>
+            <a:r>
+              <a:rPr lang="ru-RU" sz="600" dirty="0"/>
+              <a:t> (</a:t>
+            </a:r>
+          </a:p>
+          <a:p>
+            <a:r>
+              <a:rPr lang="ru-RU" sz="600" dirty="0"/>
+              <a:t>    </a:t>
+            </a:r>
+            <a:r>
+              <a:rPr lang="ru-RU" sz="600" dirty="0" err="1"/>
+              <a:t>id</a:t>
+            </a:r>
+            <a:r>
+              <a:rPr lang="ru-RU" sz="600" dirty="0"/>
+              <a:t>             SERIAL PRIMARY KEY,</a:t>
+            </a:r>
+          </a:p>
+          <a:p>
+            <a:r>
+              <a:rPr lang="ru-RU" sz="600" dirty="0"/>
+              <a:t>    </a:t>
+            </a:r>
+            <a:r>
+              <a:rPr lang="ru-RU" sz="600" dirty="0" err="1"/>
+              <a:t>enrollment_id</a:t>
+            </a:r>
+            <a:r>
+              <a:rPr lang="ru-RU" sz="600" dirty="0"/>
+              <a:t>  INT NOT NULL REFERENCES </a:t>
+            </a:r>
+            <a:r>
+              <a:rPr lang="ru-RU" sz="600" dirty="0" err="1"/>
+              <a:t>enrollments</a:t>
+            </a:r>
+            <a:r>
+              <a:rPr lang="ru-RU" sz="600" dirty="0"/>
+              <a:t>(</a:t>
+            </a:r>
+            <a:r>
+              <a:rPr lang="ru-RU" sz="600" dirty="0" err="1"/>
+              <a:t>id</a:t>
+            </a:r>
+            <a:r>
+              <a:rPr lang="ru-RU" sz="600" dirty="0"/>
+              <a:t>) ON DELETE CASCADE,</a:t>
+            </a:r>
+          </a:p>
+          <a:p>
+            <a:r>
+              <a:rPr lang="ru-RU" sz="600" dirty="0"/>
+              <a:t>    </a:t>
+            </a:r>
+            <a:r>
+              <a:rPr lang="ru-RU" sz="600" dirty="0" err="1"/>
+              <a:t>grade</a:t>
+            </a:r>
+            <a:r>
+              <a:rPr lang="ru-RU" sz="600" dirty="0"/>
+              <a:t>          INT NOT NULL CHECK (</a:t>
+            </a:r>
+            <a:r>
+              <a:rPr lang="ru-RU" sz="600" dirty="0" err="1"/>
+              <a:t>grade</a:t>
+            </a:r>
+            <a:r>
+              <a:rPr lang="ru-RU" sz="600" dirty="0"/>
+              <a:t> BETWEEN 2 AND 5),</a:t>
+            </a:r>
+          </a:p>
+          <a:p>
+            <a:r>
+              <a:rPr lang="ru-RU" sz="600" dirty="0"/>
+              <a:t>    </a:t>
+            </a:r>
+            <a:r>
+              <a:rPr lang="ru-RU" sz="600" dirty="0" err="1"/>
+              <a:t>graded_on</a:t>
+            </a:r>
+            <a:r>
+              <a:rPr lang="ru-RU" sz="600" dirty="0"/>
+              <a:t>      DATE NOT NULL DEFAULT CURRENT_DATE,</a:t>
+            </a:r>
+          </a:p>
+          <a:p>
+            <a:r>
+              <a:rPr lang="ru-RU" sz="600" dirty="0"/>
+              <a:t>    </a:t>
+            </a:r>
+            <a:r>
+              <a:rPr lang="ru-RU" sz="600" dirty="0" err="1"/>
+              <a:t>comment</a:t>
+            </a:r>
+            <a:r>
+              <a:rPr lang="ru-RU" sz="600" dirty="0"/>
+              <a:t>        TEXT</a:t>
+            </a:r>
+          </a:p>
+          <a:p>
+            <a:r>
+              <a:rPr lang="ru-RU" sz="600" dirty="0"/>
+              <a:t>);</a:t>
+            </a:r>
+          </a:p>
+        </p:txBody>
+      </p:sp>
+      <p:sp>
+        <p:nvSpPr>
+          <p:cNvPr id="8" name="TextBox 7">
+            <a:extLst>
+              <a:ext uri="{FF2B5EF4-FFF2-40B4-BE49-F238E27FC236}">
+                <a16:creationId xmlns:a16="http://schemas.microsoft.com/office/drawing/2014/main" id="{D3C36FCD-CC87-0B93-AE0F-39492ADE1482}"/>
+              </a:ext>
+            </a:extLst>
+          </p:cNvPr>
+          <p:cNvSpPr txBox="1"/>
+          <p:nvPr/>
+        </p:nvSpPr>
+        <p:spPr>
+          <a:xfrm>
+            <a:off x="3783904" y="906120"/>
+            <a:ext cx="6097002" cy="923330"/>
+          </a:xfrm>
+          <a:prstGeom prst="rect">
+            <a:avLst/>
+          </a:prstGeom>
+          <a:noFill/>
+        </p:spPr>
+        <p:txBody>
+          <a:bodyPr wrap="square">
+            <a:spAutoFit/>
+          </a:bodyPr>
+          <a:lstStyle/>
+          <a:p>
+            <a:pPr marL="0" marR="0" indent="0" algn="l" latinLnBrk="1">
+              <a:lnSpc>
+                <a:spcPct val="100000"/>
+              </a:lnSpc>
+              <a:buNone/>
+            </a:pPr>
+            <a:r>
+              <a:rPr lang="ru-RU" sz="600" b="0" dirty="0">
+                <a:solidFill>
+                  <a:schemeClr val="tx1"/>
+                </a:solidFill>
+                <a:effectLst/>
+                <a:latin typeface="+mn-lt"/>
+              </a:rPr>
+              <a:t>INSERT INTO </a:t>
+            </a:r>
+            <a:r>
+              <a:rPr lang="ru-RU" sz="600" b="0" dirty="0" err="1">
+                <a:solidFill>
+                  <a:schemeClr val="tx1"/>
+                </a:solidFill>
+                <a:effectLst/>
+                <a:latin typeface="+mn-lt"/>
+              </a:rPr>
+              <a:t>teachers</a:t>
+            </a:r>
+            <a:r>
+              <a:rPr lang="ru-RU" sz="600" b="0" dirty="0">
+                <a:solidFill>
+                  <a:schemeClr val="tx1"/>
+                </a:solidFill>
+                <a:effectLst/>
+                <a:latin typeface="+mn-lt"/>
+              </a:rPr>
+              <a:t> (</a:t>
+            </a:r>
+            <a:r>
+              <a:rPr lang="ru-RU" sz="600" b="0" dirty="0" err="1">
+                <a:solidFill>
+                  <a:schemeClr val="tx1"/>
+                </a:solidFill>
+                <a:effectLst/>
+                <a:latin typeface="+mn-lt"/>
+              </a:rPr>
+              <a:t>full_name</a:t>
+            </a:r>
+            <a:r>
+              <a:rPr lang="ru-RU" sz="600" b="0" dirty="0">
+                <a:solidFill>
+                  <a:schemeClr val="tx1"/>
+                </a:solidFill>
+                <a:effectLst/>
+                <a:latin typeface="+mn-lt"/>
+              </a:rPr>
+              <a:t>, </a:t>
+            </a:r>
+            <a:r>
+              <a:rPr lang="ru-RU" sz="600" b="0" dirty="0" err="1">
+                <a:solidFill>
+                  <a:schemeClr val="tx1"/>
+                </a:solidFill>
+                <a:effectLst/>
+                <a:latin typeface="+mn-lt"/>
+              </a:rPr>
+              <a:t>department</a:t>
+            </a:r>
+            <a:r>
+              <a:rPr lang="ru-RU" sz="600" b="0" dirty="0">
+                <a:solidFill>
+                  <a:schemeClr val="tx1"/>
+                </a:solidFill>
+                <a:effectLst/>
+                <a:latin typeface="+mn-lt"/>
+              </a:rPr>
+              <a:t>, </a:t>
+            </a:r>
+            <a:r>
+              <a:rPr lang="ru-RU" sz="600" b="0" dirty="0" err="1">
+                <a:solidFill>
+                  <a:schemeClr val="tx1"/>
+                </a:solidFill>
+                <a:effectLst/>
+                <a:latin typeface="+mn-lt"/>
+              </a:rPr>
+              <a:t>hire_date</a:t>
+            </a:r>
+            <a:r>
+              <a:rPr lang="ru-RU" sz="600" b="0" dirty="0">
+                <a:solidFill>
+                  <a:schemeClr val="tx1"/>
+                </a:solidFill>
+                <a:effectLst/>
+                <a:latin typeface="+mn-lt"/>
+              </a:rPr>
+              <a:t>, </a:t>
+            </a:r>
+            <a:r>
+              <a:rPr lang="ru-RU" sz="600" b="0" dirty="0" err="1">
+                <a:solidFill>
+                  <a:schemeClr val="tx1"/>
+                </a:solidFill>
+                <a:effectLst/>
+                <a:latin typeface="+mn-lt"/>
+              </a:rPr>
+              <a:t>salary</a:t>
+            </a:r>
+            <a:r>
+              <a:rPr lang="ru-RU" sz="600" b="0" dirty="0">
+                <a:solidFill>
+                  <a:schemeClr val="tx1"/>
+                </a:solidFill>
+                <a:effectLst/>
+                <a:latin typeface="+mn-lt"/>
+              </a:rPr>
+              <a:t>) VALUES</a:t>
+            </a:r>
+          </a:p>
+          <a:p>
+            <a:pPr marL="0" marR="0" indent="0" algn="l" latinLnBrk="1">
+              <a:lnSpc>
+                <a:spcPct val="100000"/>
+              </a:lnSpc>
+              <a:buNone/>
+            </a:pPr>
+            <a:r>
+              <a:rPr lang="ru-RU" sz="600" b="0" dirty="0">
+                <a:solidFill>
+                  <a:schemeClr val="tx1"/>
+                </a:solidFill>
+                <a:effectLst/>
+                <a:latin typeface="+mn-lt"/>
+              </a:rPr>
+              <a:t>    ('Иванов Пётр Сергеевич',      'Математика',      '2010-09-01', 95000.00),</a:t>
+            </a:r>
+          </a:p>
+          <a:p>
+            <a:pPr marL="0" marR="0" indent="0" algn="l" latinLnBrk="1">
+              <a:lnSpc>
+                <a:spcPct val="100000"/>
+              </a:lnSpc>
+              <a:buNone/>
+            </a:pPr>
+            <a:r>
+              <a:rPr lang="ru-RU" sz="600" b="0" dirty="0">
+                <a:solidFill>
+                  <a:schemeClr val="tx1"/>
+                </a:solidFill>
+                <a:effectLst/>
+                <a:latin typeface="+mn-lt"/>
+              </a:rPr>
+              <a:t>    ('Петрова Анна Викторовна',    'Информатика',     '2013-02-15', 110000.00),</a:t>
+            </a:r>
+          </a:p>
+          <a:p>
+            <a:pPr marL="0" marR="0" indent="0" algn="l" latinLnBrk="1">
+              <a:lnSpc>
+                <a:spcPct val="100000"/>
+              </a:lnSpc>
+              <a:buNone/>
+            </a:pPr>
+            <a:r>
+              <a:rPr lang="ru-RU" sz="600" b="0" dirty="0">
+                <a:solidFill>
+                  <a:schemeClr val="tx1"/>
+                </a:solidFill>
+                <a:effectLst/>
+                <a:latin typeface="+mn-lt"/>
+              </a:rPr>
+              <a:t>    ('Сидоров Николай Иванович',   'Физика',          '2008-03-10', 105000.00),</a:t>
+            </a:r>
+          </a:p>
+          <a:p>
+            <a:pPr marL="0" marR="0" indent="0" algn="l" latinLnBrk="1">
+              <a:lnSpc>
+                <a:spcPct val="100000"/>
+              </a:lnSpc>
+              <a:buNone/>
+            </a:pPr>
+            <a:r>
+              <a:rPr lang="ru-RU" sz="600" b="0" dirty="0">
+                <a:solidFill>
+                  <a:schemeClr val="tx1"/>
+                </a:solidFill>
+                <a:effectLst/>
+                <a:latin typeface="+mn-lt"/>
+              </a:rPr>
+              <a:t>    ('Кузнецова Ольга Дмитриевна', 'Информатика',     '2015-09-01', 98000.00),</a:t>
+            </a:r>
+          </a:p>
+          <a:p>
+            <a:pPr marL="0" marR="0" indent="0" algn="l" latinLnBrk="1">
+              <a:lnSpc>
+                <a:spcPct val="100000"/>
+              </a:lnSpc>
+              <a:buNone/>
+            </a:pPr>
+            <a:r>
+              <a:rPr lang="ru-RU" sz="600" b="0" dirty="0">
+                <a:solidFill>
+                  <a:schemeClr val="tx1"/>
+                </a:solidFill>
+                <a:effectLst/>
+                <a:latin typeface="+mn-lt"/>
+              </a:rPr>
+              <a:t>    ('Смирнов Алексей Петрович',   'Математика',      '2018-09-01', 87000.00),</a:t>
+            </a:r>
+          </a:p>
+          <a:p>
+            <a:pPr marL="0" marR="0" indent="0" algn="l" latinLnBrk="1">
+              <a:lnSpc>
+                <a:spcPct val="100000"/>
+              </a:lnSpc>
+              <a:buNone/>
+            </a:pPr>
+            <a:r>
+              <a:rPr lang="ru-RU" sz="600" b="0" dirty="0">
+                <a:solidFill>
+                  <a:schemeClr val="tx1"/>
+                </a:solidFill>
+                <a:effectLst/>
+                <a:latin typeface="+mn-lt"/>
+              </a:rPr>
+              <a:t>    ('Морозова Елена Андреевна',   'Лингвистика',     '2012-11-20', 92000.00),</a:t>
+            </a:r>
+          </a:p>
+          <a:p>
+            <a:pPr marL="0" marR="0" indent="0" algn="l" latinLnBrk="1">
+              <a:lnSpc>
+                <a:spcPct val="100000"/>
+              </a:lnSpc>
+              <a:buNone/>
+            </a:pPr>
+            <a:r>
+              <a:rPr lang="ru-RU" sz="600" b="0" dirty="0">
+                <a:solidFill>
+                  <a:schemeClr val="tx1"/>
+                </a:solidFill>
+                <a:effectLst/>
+                <a:latin typeface="+mn-lt"/>
+              </a:rPr>
+              <a:t>    ('Волков Дмитрий Олегович',    'Физика',          '2020-09-01', 78000.00),</a:t>
+            </a:r>
+          </a:p>
+          <a:p>
+            <a:pPr marL="0" marR="0" indent="0" algn="l" latinLnBrk="1">
+              <a:lnSpc>
+                <a:spcPct val="100000"/>
+              </a:lnSpc>
+              <a:buNone/>
+            </a:pPr>
+            <a:r>
+              <a:rPr lang="ru-RU" sz="600" b="0" dirty="0">
+                <a:solidFill>
+                  <a:schemeClr val="tx1"/>
+                </a:solidFill>
+                <a:effectLst/>
+                <a:latin typeface="+mn-lt"/>
+              </a:rPr>
+              <a:t>    ('Никитина Светлана Юрьевна',  'Информатика',     '2016-04-05', 101000.00);</a:t>
+            </a:r>
+            <a:endParaRPr lang="ru-RU" sz="600" b="0" dirty="0">
+              <a:solidFill>
+                <a:srgbClr val="F9FAFB"/>
+              </a:solidFill>
+              <a:effectLst/>
+              <a:latin typeface="Menlo"/>
+            </a:endParaRPr>
+          </a:p>
+        </p:txBody>
+      </p:sp>
+      <p:sp>
+        <p:nvSpPr>
+          <p:cNvPr id="12" name="TextBox 11">
+            <a:extLst>
+              <a:ext uri="{FF2B5EF4-FFF2-40B4-BE49-F238E27FC236}">
+                <a16:creationId xmlns:a16="http://schemas.microsoft.com/office/drawing/2014/main" id="{D7479432-F3B0-A714-1FC8-FAF9700F3EAA}"/>
+              </a:ext>
+            </a:extLst>
+          </p:cNvPr>
+          <p:cNvSpPr txBox="1"/>
+          <p:nvPr/>
+        </p:nvSpPr>
+        <p:spPr>
+          <a:xfrm>
+            <a:off x="3783904" y="1867362"/>
+            <a:ext cx="4421633" cy="1569660"/>
+          </a:xfrm>
+          <a:prstGeom prst="rect">
+            <a:avLst/>
+          </a:prstGeom>
+          <a:noFill/>
+        </p:spPr>
+        <p:txBody>
+          <a:bodyPr wrap="square">
+            <a:spAutoFit/>
+          </a:bodyPr>
+          <a:lstStyle/>
+          <a:p>
+            <a:r>
+              <a:rPr lang="ru-RU" sz="600" dirty="0"/>
+              <a:t>INSERT INTO </a:t>
+            </a:r>
+            <a:r>
+              <a:rPr lang="ru-RU" sz="600" dirty="0" err="1"/>
+              <a:t>students</a:t>
+            </a:r>
+            <a:r>
+              <a:rPr lang="ru-RU" sz="600" dirty="0"/>
+              <a:t> (</a:t>
+            </a:r>
+            <a:r>
+              <a:rPr lang="ru-RU" sz="600" dirty="0" err="1"/>
+              <a:t>full_name</a:t>
+            </a:r>
+            <a:r>
+              <a:rPr lang="ru-RU" sz="600" dirty="0"/>
+              <a:t>, </a:t>
+            </a:r>
+            <a:r>
+              <a:rPr lang="ru-RU" sz="600" dirty="0" err="1"/>
+              <a:t>birth_date</a:t>
+            </a:r>
+            <a:r>
+              <a:rPr lang="ru-RU" sz="600" dirty="0"/>
+              <a:t>, </a:t>
+            </a:r>
+            <a:r>
+              <a:rPr lang="ru-RU" sz="600" dirty="0" err="1"/>
+              <a:t>city</a:t>
+            </a:r>
+            <a:r>
+              <a:rPr lang="ru-RU" sz="600" dirty="0"/>
+              <a:t>, </a:t>
+            </a:r>
+            <a:r>
+              <a:rPr lang="ru-RU" sz="600" dirty="0" err="1"/>
+              <a:t>email</a:t>
+            </a:r>
+            <a:r>
+              <a:rPr lang="ru-RU" sz="600" dirty="0"/>
+              <a:t>, </a:t>
+            </a:r>
+            <a:r>
+              <a:rPr lang="ru-RU" sz="600" dirty="0" err="1"/>
+              <a:t>enrolled_at</a:t>
+            </a:r>
+            <a:r>
+              <a:rPr lang="ru-RU" sz="600" dirty="0"/>
+              <a:t>, </a:t>
+            </a:r>
+            <a:r>
+              <a:rPr lang="ru-RU" sz="600" dirty="0" err="1"/>
+              <a:t>is_active</a:t>
+            </a:r>
+            <a:r>
+              <a:rPr lang="ru-RU" sz="600" dirty="0"/>
+              <a:t>) VALUES</a:t>
+            </a:r>
+          </a:p>
+          <a:p>
+            <a:r>
+              <a:rPr lang="ru-RU" sz="600" dirty="0"/>
+              <a:t>    ('Анна Соколова',        '2003-05-12', 'Москва',           'anna.sokolova@example.com',  '2021-09-01', TRUE),</a:t>
+            </a:r>
+          </a:p>
+          <a:p>
+            <a:r>
+              <a:rPr lang="ru-RU" sz="600" dirty="0"/>
+              <a:t>    ('Иван Кузнецов',        '2002-11-30', 'Санкт-Петербург',  'ivan.kuznetsov@example.com','2020-09-01', TRUE),</a:t>
+            </a:r>
+          </a:p>
+          <a:p>
+            <a:r>
+              <a:rPr lang="ru-RU" sz="600" dirty="0"/>
+              <a:t>    ('Мария Лебедева',       '2004-02-18', 'Москва',           'maria.lebedeva@example.com','2022-09-01', TRUE),</a:t>
+            </a:r>
+          </a:p>
+          <a:p>
+            <a:r>
+              <a:rPr lang="ru-RU" sz="600" dirty="0"/>
+              <a:t>    ('Дмитрий Орлов',        '2001-07-05', 'Казань',           'dmitry.orlov@example.com',  '2019-09-01', FALSE),</a:t>
+            </a:r>
+          </a:p>
+          <a:p>
+            <a:r>
+              <a:rPr lang="ru-RU" sz="600" dirty="0"/>
+              <a:t>    ('Екатерина Новикова',   '2003-09-22', 'Новосибирск',      'ekaterina.n@example.com',   '2021-09-01', TRUE),</a:t>
+            </a:r>
+          </a:p>
+          <a:p>
+            <a:r>
+              <a:rPr lang="ru-RU" sz="600" dirty="0"/>
+              <a:t>    ('Алексей Соловьёв',     '2002-03-14', 'Москва',           'alexey.s@example.com',      '2020-09-01', TRUE),</a:t>
+            </a:r>
+          </a:p>
+          <a:p>
+            <a:r>
+              <a:rPr lang="ru-RU" sz="600" dirty="0"/>
+              <a:t>    ('Ольга Морозова',       '2004-12-01', 'Екатеринбург',     'olga.morozova@example.com', '2022-09-01', TRUE),</a:t>
+            </a:r>
+          </a:p>
+          <a:p>
+            <a:r>
+              <a:rPr lang="ru-RU" sz="600" dirty="0"/>
+              <a:t>    ('Сергей Павлов',        '2003-08-19', 'Казань',           NULL,                        '2021-09-01', TRUE),</a:t>
+            </a:r>
+          </a:p>
+          <a:p>
+            <a:r>
+              <a:rPr lang="ru-RU" sz="600" dirty="0"/>
+              <a:t>    ('Татьяна Захарова',     '2002-06-27', 'Санкт-Петербург',  'tatyana.z@example.com',     '2020-09-01', FALSE),</a:t>
+            </a:r>
+          </a:p>
+          <a:p>
+            <a:r>
+              <a:rPr lang="ru-RU" sz="600" dirty="0"/>
+              <a:t>    ('Никита Волков',        '2005-01-09', 'Москва',           'nikita.volkov@example.com', '2023-09-01', TRUE),</a:t>
+            </a:r>
+          </a:p>
+          <a:p>
+            <a:r>
+              <a:rPr lang="ru-RU" sz="600" dirty="0"/>
+              <a:t>    ('Юлия Романова',        '2004-04-16', 'Новосибирск',      'yulia.romanova@example.com','2022-09-01', TRUE),</a:t>
+            </a:r>
+          </a:p>
+          <a:p>
+            <a:r>
+              <a:rPr lang="ru-RU" sz="600" dirty="0"/>
+              <a:t>    ('Артём Фёдоров',        '2003-10-03', 'Екатеринбург',     'artem.f@example.com',       '2021-09-01', TRUE),</a:t>
+            </a:r>
+          </a:p>
+          <a:p>
+            <a:r>
+              <a:rPr lang="ru-RU" sz="600" dirty="0"/>
+              <a:t>    ('Ксения Белова',        '2002-02-11', 'Казань',           'ksenia.b@example.com',      '2020-09-01', TRUE),</a:t>
+            </a:r>
+          </a:p>
+          <a:p>
+            <a:r>
+              <a:rPr lang="ru-RU" sz="600" dirty="0"/>
+              <a:t>    ('Роман Тимофеев',       '2005-07-21', 'Санкт-Петербург',  'roman.t@example.com',       '2023-09-01', TRUE),</a:t>
+            </a:r>
+          </a:p>
+          <a:p>
+            <a:r>
+              <a:rPr lang="ru-RU" sz="600" dirty="0"/>
+              <a:t>    ('Алина Гусева',         '2004-11-08', 'Москва',           'alina.guseva@example.com',  '2022-09-01', TRUE);</a:t>
+            </a:r>
+          </a:p>
+        </p:txBody>
+      </p:sp>
+      <p:sp>
+        <p:nvSpPr>
+          <p:cNvPr id="15" name="TextBox 14">
+            <a:extLst>
+              <a:ext uri="{FF2B5EF4-FFF2-40B4-BE49-F238E27FC236}">
+                <a16:creationId xmlns:a16="http://schemas.microsoft.com/office/drawing/2014/main" id="{0C2E611B-5CB3-BAEF-81F7-4B06023DA203}"/>
+              </a:ext>
+            </a:extLst>
+          </p:cNvPr>
+          <p:cNvSpPr txBox="1"/>
+          <p:nvPr/>
+        </p:nvSpPr>
+        <p:spPr>
+          <a:xfrm>
+            <a:off x="3704222" y="3534609"/>
+            <a:ext cx="4314825" cy="1569660"/>
+          </a:xfrm>
+          <a:prstGeom prst="rect">
+            <a:avLst/>
+          </a:prstGeom>
+          <a:noFill/>
+        </p:spPr>
+        <p:txBody>
+          <a:bodyPr wrap="square">
+            <a:spAutoFit/>
+          </a:bodyPr>
+          <a:lstStyle/>
+          <a:p>
+            <a:r>
+              <a:rPr lang="ru-RU" sz="600" dirty="0"/>
+              <a:t>INSERT INTO </a:t>
+            </a:r>
+            <a:r>
+              <a:rPr lang="ru-RU" sz="600" dirty="0" err="1"/>
+              <a:t>students</a:t>
+            </a:r>
+            <a:r>
+              <a:rPr lang="ru-RU" sz="600" dirty="0"/>
+              <a:t> (</a:t>
+            </a:r>
+            <a:r>
+              <a:rPr lang="ru-RU" sz="600" dirty="0" err="1"/>
+              <a:t>full_name</a:t>
+            </a:r>
+            <a:r>
+              <a:rPr lang="ru-RU" sz="600" dirty="0"/>
+              <a:t>, </a:t>
+            </a:r>
+            <a:r>
+              <a:rPr lang="ru-RU" sz="600" dirty="0" err="1"/>
+              <a:t>birth_date</a:t>
+            </a:r>
+            <a:r>
+              <a:rPr lang="ru-RU" sz="600" dirty="0"/>
+              <a:t>, </a:t>
+            </a:r>
+            <a:r>
+              <a:rPr lang="ru-RU" sz="600" dirty="0" err="1"/>
+              <a:t>city</a:t>
+            </a:r>
+            <a:r>
+              <a:rPr lang="ru-RU" sz="600" dirty="0"/>
+              <a:t>, </a:t>
+            </a:r>
+            <a:r>
+              <a:rPr lang="ru-RU" sz="600" dirty="0" err="1"/>
+              <a:t>email</a:t>
+            </a:r>
+            <a:r>
+              <a:rPr lang="ru-RU" sz="600" dirty="0"/>
+              <a:t>, </a:t>
+            </a:r>
+            <a:r>
+              <a:rPr lang="ru-RU" sz="600" dirty="0" err="1"/>
+              <a:t>enrolled_at</a:t>
+            </a:r>
+            <a:r>
+              <a:rPr lang="ru-RU" sz="600" dirty="0"/>
+              <a:t>, </a:t>
+            </a:r>
+            <a:r>
+              <a:rPr lang="ru-RU" sz="600" dirty="0" err="1"/>
+              <a:t>is_active</a:t>
+            </a:r>
+            <a:r>
+              <a:rPr lang="ru-RU" sz="600" dirty="0"/>
+              <a:t>) VALUES</a:t>
+            </a:r>
+          </a:p>
+          <a:p>
+            <a:r>
+              <a:rPr lang="ru-RU" sz="600" dirty="0"/>
+              <a:t>    ('Анна Соколова',        '2003-05-12', 'Москва',           'anna.sokolova@example.com',  '2021-09-01', TRUE),</a:t>
+            </a:r>
+          </a:p>
+          <a:p>
+            <a:r>
+              <a:rPr lang="ru-RU" sz="600" dirty="0"/>
+              <a:t>    ('Иван Кузнецов',        '2002-11-30', 'Санкт-Петербург',  'ivan.kuznetsov@example.com','2020-09-01', TRUE),</a:t>
+            </a:r>
+          </a:p>
+          <a:p>
+            <a:r>
+              <a:rPr lang="ru-RU" sz="600" dirty="0"/>
+              <a:t>    ('Мария Лебедева',       '2004-02-18', 'Москва',           'maria.lebedeva@example.com','2022-09-01', TRUE),</a:t>
+            </a:r>
+          </a:p>
+          <a:p>
+            <a:r>
+              <a:rPr lang="ru-RU" sz="600" dirty="0"/>
+              <a:t>    ('Дмитрий Орлов',        '2001-07-05', 'Казань',           'dmitry.orlov@example.com',  '2019-09-01', FALSE),</a:t>
+            </a:r>
+          </a:p>
+          <a:p>
+            <a:r>
+              <a:rPr lang="ru-RU" sz="600" dirty="0"/>
+              <a:t>    ('Екатерина Новикова',   '2003-09-22', 'Новосибирск',      'ekaterina.n@example.com',   '2021-09-01', TRUE),</a:t>
+            </a:r>
+          </a:p>
+          <a:p>
+            <a:r>
+              <a:rPr lang="ru-RU" sz="600" dirty="0"/>
+              <a:t>    ('Алексей Соловьёв',     '2002-03-14', 'Москва',           'alexey.s@example.com',      '2020-09-01', TRUE),</a:t>
+            </a:r>
+          </a:p>
+          <a:p>
+            <a:r>
+              <a:rPr lang="ru-RU" sz="600" dirty="0"/>
+              <a:t>    ('Ольга Морозова',       '2004-12-01', 'Екатеринбург',     'olga.morozova@example.com', '2022-09-01', TRUE),</a:t>
+            </a:r>
+          </a:p>
+          <a:p>
+            <a:r>
+              <a:rPr lang="ru-RU" sz="600" dirty="0"/>
+              <a:t>    ('Сергей Павлов',        '2003-08-19', 'Казань',           NULL,                        '2021-09-01', TRUE),</a:t>
+            </a:r>
+          </a:p>
+          <a:p>
+            <a:r>
+              <a:rPr lang="ru-RU" sz="600" dirty="0"/>
+              <a:t>    ('Татьяна Захарова',     '2002-06-27', 'Санкт-Петербург',  'tatyana.z@example.com',     '2020-09-01', FALSE),</a:t>
+            </a:r>
+          </a:p>
+          <a:p>
+            <a:r>
+              <a:rPr lang="ru-RU" sz="600" dirty="0"/>
+              <a:t>    ('Никита Волков',        '2005-01-09', 'Москва',           'nikita.volkov@example.com', '2023-09-01', TRUE),</a:t>
+            </a:r>
+          </a:p>
+          <a:p>
+            <a:r>
+              <a:rPr lang="ru-RU" sz="600" dirty="0"/>
+              <a:t>    ('Юлия Романова',        '2004-04-16', 'Новосибирск',      'yulia.romanova@example.com','2022-09-01', TRUE),</a:t>
+            </a:r>
+          </a:p>
+          <a:p>
+            <a:r>
+              <a:rPr lang="ru-RU" sz="600" dirty="0"/>
+              <a:t>    ('Артём Фёдоров',        '2003-10-03', 'Екатеринбург',     'artem.f@example.com',       '2021-09-01', TRUE),</a:t>
+            </a:r>
+          </a:p>
+          <a:p>
+            <a:r>
+              <a:rPr lang="ru-RU" sz="600" dirty="0"/>
+              <a:t>    ('Ксения Белова',        '2002-02-11', 'Казань',           'ksenia.b@example.com',      '2020-09-01', TRUE),</a:t>
+            </a:r>
+          </a:p>
+          <a:p>
+            <a:r>
+              <a:rPr lang="ru-RU" sz="600" dirty="0"/>
+              <a:t>    ('Роман Тимофеев',       '2005-07-21', 'Санкт-Петербург',  'roman.t@example.com',       '2023-09-01', TRUE),</a:t>
+            </a:r>
+          </a:p>
+          <a:p>
+            <a:r>
+              <a:rPr lang="ru-RU" sz="600" dirty="0"/>
+              <a:t>    ('Алина Гусева',         '2004-11-08', 'Москва',           'alina.guseva@example.com',  '2022-09-01', TRUE);</a:t>
+            </a:r>
+          </a:p>
+        </p:txBody>
+      </p:sp>
+      <p:sp>
+        <p:nvSpPr>
+          <p:cNvPr id="17" name="TextBox 16">
+            <a:extLst>
+              <a:ext uri="{FF2B5EF4-FFF2-40B4-BE49-F238E27FC236}">
+                <a16:creationId xmlns:a16="http://schemas.microsoft.com/office/drawing/2014/main" id="{C1CD562E-7CF3-0EBC-4F74-26F2FD963802}"/>
+              </a:ext>
+            </a:extLst>
+          </p:cNvPr>
+          <p:cNvSpPr txBox="1"/>
+          <p:nvPr/>
+        </p:nvSpPr>
+        <p:spPr>
+          <a:xfrm>
+            <a:off x="3618483" y="5201856"/>
+            <a:ext cx="3352299" cy="1292662"/>
+          </a:xfrm>
+          <a:prstGeom prst="rect">
+            <a:avLst/>
+          </a:prstGeom>
+          <a:noFill/>
+        </p:spPr>
+        <p:txBody>
+          <a:bodyPr wrap="square">
+            <a:spAutoFit/>
+          </a:bodyPr>
+          <a:lstStyle/>
+          <a:p>
+            <a:r>
+              <a:rPr lang="ru-RU" sz="600" dirty="0"/>
+              <a:t>INSERT INTO </a:t>
+            </a:r>
+            <a:r>
+              <a:rPr lang="ru-RU" sz="600" dirty="0" err="1"/>
+              <a:t>courses</a:t>
+            </a:r>
+            <a:r>
+              <a:rPr lang="ru-RU" sz="600" dirty="0"/>
+              <a:t> (</a:t>
+            </a:r>
+            <a:r>
+              <a:rPr lang="ru-RU" sz="600" dirty="0" err="1"/>
+              <a:t>title</a:t>
+            </a:r>
+            <a:r>
+              <a:rPr lang="ru-RU" sz="600" dirty="0"/>
+              <a:t>, </a:t>
+            </a:r>
+            <a:r>
+              <a:rPr lang="ru-RU" sz="600" dirty="0" err="1"/>
+              <a:t>teacher_id</a:t>
+            </a:r>
+            <a:r>
+              <a:rPr lang="ru-RU" sz="600" dirty="0"/>
+              <a:t>, </a:t>
+            </a:r>
+            <a:r>
+              <a:rPr lang="ru-RU" sz="600" dirty="0" err="1"/>
+              <a:t>credits</a:t>
+            </a:r>
+            <a:r>
+              <a:rPr lang="ru-RU" sz="600" dirty="0"/>
+              <a:t>, </a:t>
+            </a:r>
+            <a:r>
+              <a:rPr lang="ru-RU" sz="600" dirty="0" err="1"/>
+              <a:t>year</a:t>
+            </a:r>
+            <a:r>
+              <a:rPr lang="ru-RU" sz="600" dirty="0"/>
+              <a:t>, </a:t>
+            </a:r>
+            <a:r>
+              <a:rPr lang="ru-RU" sz="600" dirty="0" err="1"/>
+              <a:t>is_elective</a:t>
+            </a:r>
+            <a:r>
+              <a:rPr lang="ru-RU" sz="600" dirty="0"/>
+              <a:t>) VALUES</a:t>
+            </a:r>
+          </a:p>
+          <a:p>
+            <a:r>
+              <a:rPr lang="ru-RU" sz="600" dirty="0"/>
+              <a:t>    ('Математический анализ',        1, 6, 2023, FALSE),</a:t>
+            </a:r>
+          </a:p>
+          <a:p>
+            <a:r>
+              <a:rPr lang="ru-RU" sz="600" dirty="0"/>
+              <a:t>    ('Линейная алгебра',             1, 4, 2023, FALSE),</a:t>
+            </a:r>
+          </a:p>
+          <a:p>
+            <a:r>
+              <a:rPr lang="ru-RU" sz="600" dirty="0"/>
+              <a:t>    ('Основы программирования',      2, 6, 2023, FALSE),</a:t>
+            </a:r>
+          </a:p>
+          <a:p>
+            <a:r>
+              <a:rPr lang="ru-RU" sz="600" dirty="0"/>
+              <a:t>    ('Базы данных',                  2, 5, 2023, TRUE),</a:t>
+            </a:r>
+          </a:p>
+          <a:p>
+            <a:r>
+              <a:rPr lang="ru-RU" sz="600" dirty="0"/>
+              <a:t>    ('Веб-разработка',               4, 4, 2023, TRUE),</a:t>
+            </a:r>
+          </a:p>
+          <a:p>
+            <a:r>
+              <a:rPr lang="ru-RU" sz="600" dirty="0"/>
+              <a:t>    ('Общая физика',                 3, 6, 2023, FALSE),</a:t>
+            </a:r>
+          </a:p>
+          <a:p>
+            <a:r>
+              <a:rPr lang="ru-RU" sz="600" dirty="0"/>
+              <a:t>    ('Квантовая механика',           7, 5, 2024, TRUE),</a:t>
+            </a:r>
+          </a:p>
+          <a:p>
+            <a:r>
+              <a:rPr lang="ru-RU" sz="600" dirty="0"/>
+              <a:t>    ('Алгоритмы и структуры данных', 8, 6, 2023, FALSE),</a:t>
+            </a:r>
+          </a:p>
+          <a:p>
+            <a:r>
+              <a:rPr lang="ru-RU" sz="600" dirty="0"/>
+              <a:t>    ('Машинное обучение',            4, 5, 2024, TRUE),</a:t>
+            </a:r>
+          </a:p>
+          <a:p>
+            <a:r>
+              <a:rPr lang="ru-RU" sz="600" dirty="0"/>
+              <a:t>    ('Английский язык',              6, 3, 2023, FALSE),</a:t>
+            </a:r>
+          </a:p>
+          <a:p>
+            <a:r>
+              <a:rPr lang="ru-RU" sz="600" dirty="0"/>
+              <a:t>    ('Дискретная математика',        5, 4, 2023, FALSE),</a:t>
+            </a:r>
+          </a:p>
+          <a:p>
+            <a:r>
+              <a:rPr lang="ru-RU" sz="600" dirty="0"/>
+              <a:t>    ('Теория вероятностей',          5, 5, 2024, FALSE);</a:t>
+            </a:r>
+          </a:p>
+        </p:txBody>
+      </p:sp>
+      <p:sp>
+        <p:nvSpPr>
+          <p:cNvPr id="19" name="TextBox 18">
+            <a:extLst>
+              <a:ext uri="{FF2B5EF4-FFF2-40B4-BE49-F238E27FC236}">
+                <a16:creationId xmlns:a16="http://schemas.microsoft.com/office/drawing/2014/main" id="{1BB3D89D-9711-38F7-D7C2-F70F05096408}"/>
+              </a:ext>
+            </a:extLst>
+          </p:cNvPr>
+          <p:cNvSpPr txBox="1"/>
+          <p:nvPr/>
+        </p:nvSpPr>
+        <p:spPr>
+          <a:xfrm>
+            <a:off x="7819022" y="569021"/>
+            <a:ext cx="4735931" cy="1569660"/>
+          </a:xfrm>
+          <a:prstGeom prst="rect">
+            <a:avLst/>
+          </a:prstGeom>
+          <a:noFill/>
+        </p:spPr>
+        <p:txBody>
+          <a:bodyPr wrap="square">
+            <a:spAutoFit/>
+          </a:bodyPr>
+          <a:lstStyle/>
+          <a:p>
+            <a:pPr marL="0" marR="0" indent="0" algn="l" latinLnBrk="1">
+              <a:lnSpc>
+                <a:spcPct val="100000"/>
+              </a:lnSpc>
+              <a:buNone/>
+            </a:pPr>
+            <a:r>
+              <a:rPr lang="ru-RU" sz="600" b="0" dirty="0">
+                <a:solidFill>
+                  <a:schemeClr val="tx1"/>
+                </a:solidFill>
+                <a:effectLst/>
+                <a:latin typeface="+mn-lt"/>
+              </a:rPr>
+              <a:t>INSERT INTO </a:t>
+            </a:r>
+            <a:r>
+              <a:rPr lang="ru-RU" sz="600" b="0" dirty="0" err="1">
+                <a:solidFill>
+                  <a:schemeClr val="tx1"/>
+                </a:solidFill>
+                <a:effectLst/>
+                <a:latin typeface="+mn-lt"/>
+              </a:rPr>
+              <a:t>enrollments</a:t>
+            </a:r>
+            <a:r>
+              <a:rPr lang="ru-RU" sz="600" b="0" dirty="0">
+                <a:solidFill>
+                  <a:schemeClr val="tx1"/>
+                </a:solidFill>
+                <a:effectLst/>
+                <a:latin typeface="+mn-lt"/>
+              </a:rPr>
+              <a:t> (</a:t>
+            </a:r>
+            <a:r>
+              <a:rPr lang="ru-RU" sz="600" b="0" dirty="0" err="1">
+                <a:solidFill>
+                  <a:schemeClr val="tx1"/>
+                </a:solidFill>
+                <a:effectLst/>
+                <a:latin typeface="+mn-lt"/>
+              </a:rPr>
+              <a:t>student_id</a:t>
+            </a:r>
+            <a:r>
+              <a:rPr lang="ru-RU" sz="600" b="0" dirty="0">
+                <a:solidFill>
+                  <a:schemeClr val="tx1"/>
+                </a:solidFill>
+                <a:effectLst/>
+                <a:latin typeface="+mn-lt"/>
+              </a:rPr>
+              <a:t>, </a:t>
+            </a:r>
+            <a:r>
+              <a:rPr lang="ru-RU" sz="600" b="0" dirty="0" err="1">
+                <a:solidFill>
+                  <a:schemeClr val="tx1"/>
+                </a:solidFill>
+                <a:effectLst/>
+                <a:latin typeface="+mn-lt"/>
+              </a:rPr>
+              <a:t>course_id</a:t>
+            </a:r>
+            <a:r>
+              <a:rPr lang="ru-RU" sz="600" b="0" dirty="0">
+                <a:solidFill>
+                  <a:schemeClr val="tx1"/>
+                </a:solidFill>
+                <a:effectLst/>
+                <a:latin typeface="+mn-lt"/>
+              </a:rPr>
+              <a:t>, </a:t>
+            </a:r>
+            <a:r>
+              <a:rPr lang="ru-RU" sz="600" b="0" dirty="0" err="1">
+                <a:solidFill>
+                  <a:schemeClr val="tx1"/>
+                </a:solidFill>
+                <a:effectLst/>
+                <a:latin typeface="+mn-lt"/>
+              </a:rPr>
+              <a:t>enrolled_on</a:t>
+            </a:r>
+            <a:r>
+              <a:rPr lang="ru-RU" sz="600" b="0" dirty="0">
+                <a:solidFill>
+                  <a:schemeClr val="tx1"/>
+                </a:solidFill>
+                <a:effectLst/>
+                <a:latin typeface="+mn-lt"/>
+              </a:rPr>
+              <a:t>) VALUES</a:t>
+            </a:r>
+          </a:p>
+          <a:p>
+            <a:pPr marL="0" marR="0" indent="0" algn="l" latinLnBrk="1">
+              <a:lnSpc>
+                <a:spcPct val="100000"/>
+              </a:lnSpc>
+              <a:buNone/>
+            </a:pPr>
+            <a:r>
+              <a:rPr lang="ru-RU" sz="600" b="0" dirty="0">
+                <a:solidFill>
+                  <a:schemeClr val="tx1"/>
+                </a:solidFill>
+                <a:effectLst/>
+                <a:latin typeface="+mn-lt"/>
+              </a:rPr>
+              <a:t>    (1, 1, '2023-09-01'), (1, 3, '2023-09-01'), (1, 4, '2023-09-05'),</a:t>
+            </a:r>
+          </a:p>
+          <a:p>
+            <a:pPr marL="0" marR="0" indent="0" algn="l" latinLnBrk="1">
+              <a:lnSpc>
+                <a:spcPct val="100000"/>
+              </a:lnSpc>
+              <a:buNone/>
+            </a:pPr>
+            <a:r>
+              <a:rPr lang="ru-RU" sz="600" b="0" dirty="0">
+                <a:solidFill>
+                  <a:schemeClr val="tx1"/>
+                </a:solidFill>
+                <a:effectLst/>
+                <a:latin typeface="+mn-lt"/>
+              </a:rPr>
+              <a:t>    (2, 1, '2023-09-01'), (2, 2, '2023-09-01'), (2, 6, '2023-09-01'),</a:t>
+            </a:r>
+          </a:p>
+          <a:p>
+            <a:pPr marL="0" marR="0" indent="0" algn="l" latinLnBrk="1">
+              <a:lnSpc>
+                <a:spcPct val="100000"/>
+              </a:lnSpc>
+              <a:buNone/>
+            </a:pPr>
+            <a:r>
+              <a:rPr lang="ru-RU" sz="600" b="0" dirty="0">
+                <a:solidFill>
+                  <a:schemeClr val="tx1"/>
+                </a:solidFill>
+                <a:effectLst/>
+                <a:latin typeface="+mn-lt"/>
+              </a:rPr>
+              <a:t>    (3, 3, '2023-09-02'), (3, 5, '2023-09-02'), (3, 8, '2023-09-02'),</a:t>
+            </a:r>
+          </a:p>
+          <a:p>
+            <a:pPr marL="0" marR="0" indent="0" algn="l" latinLnBrk="1">
+              <a:lnSpc>
+                <a:spcPct val="100000"/>
+              </a:lnSpc>
+              <a:buNone/>
+            </a:pPr>
+            <a:r>
+              <a:rPr lang="ru-RU" sz="600" b="0" dirty="0">
+                <a:solidFill>
+                  <a:schemeClr val="tx1"/>
+                </a:solidFill>
+                <a:effectLst/>
+                <a:latin typeface="+mn-lt"/>
+              </a:rPr>
+              <a:t>    (4, 1, '2023-09-01'), (4, 6, '2023-09-01'),</a:t>
+            </a:r>
+          </a:p>
+          <a:p>
+            <a:pPr marL="0" marR="0" indent="0" algn="l" latinLnBrk="1">
+              <a:lnSpc>
+                <a:spcPct val="100000"/>
+              </a:lnSpc>
+              <a:buNone/>
+            </a:pPr>
+            <a:r>
+              <a:rPr lang="ru-RU" sz="600" b="0" dirty="0">
+                <a:solidFill>
+                  <a:schemeClr val="tx1"/>
+                </a:solidFill>
+                <a:effectLst/>
+                <a:latin typeface="+mn-lt"/>
+              </a:rPr>
+              <a:t>    (5, 3, '2023-09-03'), (5, 4, '2023-09-03'), (5, 9, '2024-02-01'),</a:t>
+            </a:r>
+          </a:p>
+          <a:p>
+            <a:pPr marL="0" marR="0" indent="0" algn="l" latinLnBrk="1">
+              <a:lnSpc>
+                <a:spcPct val="100000"/>
+              </a:lnSpc>
+              <a:buNone/>
+            </a:pPr>
+            <a:r>
+              <a:rPr lang="ru-RU" sz="600" b="0" dirty="0">
+                <a:solidFill>
+                  <a:schemeClr val="tx1"/>
+                </a:solidFill>
+                <a:effectLst/>
+                <a:latin typeface="+mn-lt"/>
+              </a:rPr>
+              <a:t>    (6, 1, '2023-09-01'), (6, 2, '2023-09-01'), (6, 11,'2023-09-01'),</a:t>
+            </a:r>
+          </a:p>
+          <a:p>
+            <a:pPr marL="0" marR="0" indent="0" algn="l" latinLnBrk="1">
+              <a:lnSpc>
+                <a:spcPct val="100000"/>
+              </a:lnSpc>
+              <a:buNone/>
+            </a:pPr>
+            <a:r>
+              <a:rPr lang="ru-RU" sz="600" b="0" dirty="0">
+                <a:solidFill>
+                  <a:schemeClr val="tx1"/>
+                </a:solidFill>
+                <a:effectLst/>
+                <a:latin typeface="+mn-lt"/>
+              </a:rPr>
+              <a:t>    (7, 5, '2023-09-04'), (7, 9, '2024-02-01'),</a:t>
+            </a:r>
+          </a:p>
+          <a:p>
+            <a:pPr marL="0" marR="0" indent="0" algn="l" latinLnBrk="1">
+              <a:lnSpc>
+                <a:spcPct val="100000"/>
+              </a:lnSpc>
+              <a:buNone/>
+            </a:pPr>
+            <a:r>
+              <a:rPr lang="ru-RU" sz="600" b="0" dirty="0">
+                <a:solidFill>
+                  <a:schemeClr val="tx1"/>
+                </a:solidFill>
+                <a:effectLst/>
+                <a:latin typeface="+mn-lt"/>
+              </a:rPr>
+              <a:t>    (8, 3, '2023-09-05'), (8, 8, '2023-09-05'),</a:t>
+            </a:r>
+          </a:p>
+          <a:p>
+            <a:pPr marL="0" marR="0" indent="0" algn="l" latinLnBrk="1">
+              <a:lnSpc>
+                <a:spcPct val="100000"/>
+              </a:lnSpc>
+              <a:buNone/>
+            </a:pPr>
+            <a:r>
+              <a:rPr lang="ru-RU" sz="600" b="0" dirty="0">
+                <a:solidFill>
+                  <a:schemeClr val="tx1"/>
+                </a:solidFill>
+                <a:effectLst/>
+                <a:latin typeface="+mn-lt"/>
+              </a:rPr>
+              <a:t>    (9, 6, '2023-09-01'), (9, 7, '2024-02-01'),</a:t>
+            </a:r>
+          </a:p>
+          <a:p>
+            <a:pPr marL="0" marR="0" indent="0" algn="l" latinLnBrk="1">
+              <a:lnSpc>
+                <a:spcPct val="100000"/>
+              </a:lnSpc>
+              <a:buNone/>
+            </a:pPr>
+            <a:r>
+              <a:rPr lang="ru-RU" sz="600" b="0" dirty="0">
+                <a:solidFill>
+                  <a:schemeClr val="tx1"/>
+                </a:solidFill>
+                <a:effectLst/>
+                <a:latin typeface="+mn-lt"/>
+              </a:rPr>
+              <a:t>    (10, 3, '2023-09-06'), (10, 5, '2023-09-06'), (10, 9, '2024-02-01'),</a:t>
+            </a:r>
+          </a:p>
+          <a:p>
+            <a:pPr marL="0" marR="0" indent="0" algn="l" latinLnBrk="1">
+              <a:lnSpc>
+                <a:spcPct val="100000"/>
+              </a:lnSpc>
+              <a:buNone/>
+            </a:pPr>
+            <a:r>
+              <a:rPr lang="ru-RU" sz="600" b="0" dirty="0">
+                <a:solidFill>
+                  <a:schemeClr val="tx1"/>
+                </a:solidFill>
+                <a:effectLst/>
+                <a:latin typeface="+mn-lt"/>
+              </a:rPr>
+              <a:t>    (11, 4, '2023-09-07'), (11, 8, '2023-09-07'),</a:t>
+            </a:r>
+          </a:p>
+          <a:p>
+            <a:pPr marL="0" marR="0" indent="0" algn="l" latinLnBrk="1">
+              <a:lnSpc>
+                <a:spcPct val="100000"/>
+              </a:lnSpc>
+              <a:buNone/>
+            </a:pPr>
+            <a:r>
+              <a:rPr lang="ru-RU" sz="600" b="0" dirty="0">
+                <a:solidFill>
+                  <a:schemeClr val="tx1"/>
+                </a:solidFill>
+                <a:effectLst/>
+                <a:latin typeface="+mn-lt"/>
+              </a:rPr>
+              <a:t>    (12, 1, '2023-09-01'), (12, 2, '2023-09-01'), (12, 12,'2024-02-01'),</a:t>
+            </a:r>
+          </a:p>
+          <a:p>
+            <a:pPr marL="0" marR="0" indent="0" algn="l" latinLnBrk="1">
+              <a:lnSpc>
+                <a:spcPct val="100000"/>
+              </a:lnSpc>
+              <a:buNone/>
+            </a:pPr>
+            <a:r>
+              <a:rPr lang="ru-RU" sz="600" b="0" dirty="0">
+                <a:solidFill>
+                  <a:schemeClr val="tx1"/>
+                </a:solidFill>
+                <a:effectLst/>
+                <a:latin typeface="+mn-lt"/>
+              </a:rPr>
+              <a:t>    (13, 6, '2023-09-01'), (13, 10,'2023-09-01'),</a:t>
+            </a:r>
+          </a:p>
+          <a:p>
+            <a:pPr marL="0" marR="0" indent="0" algn="l" latinLnBrk="1">
+              <a:lnSpc>
+                <a:spcPct val="100000"/>
+              </a:lnSpc>
+              <a:buNone/>
+            </a:pPr>
+            <a:r>
+              <a:rPr lang="ru-RU" sz="600" b="0" dirty="0">
+                <a:solidFill>
+                  <a:schemeClr val="tx1"/>
+                </a:solidFill>
+                <a:effectLst/>
+                <a:latin typeface="+mn-lt"/>
+              </a:rPr>
+              <a:t>    (14, 3, '2023-09-08'), (14, 5, '2023-09-08'),</a:t>
+            </a:r>
+          </a:p>
+          <a:p>
+            <a:pPr marL="0" marR="0" indent="0" algn="l" latinLnBrk="1">
+              <a:lnSpc>
+                <a:spcPct val="100000"/>
+              </a:lnSpc>
+              <a:buNone/>
+            </a:pPr>
+            <a:r>
+              <a:rPr lang="ru-RU" sz="600" b="0" dirty="0">
+                <a:solidFill>
+                  <a:schemeClr val="tx1"/>
+                </a:solidFill>
+                <a:effectLst/>
+                <a:latin typeface="+mn-lt"/>
+              </a:rPr>
+              <a:t>    (15, 4, '2023-09-09'), (15, 9, '2024-02-01'), (15, 10,'2023-09-09');</a:t>
+            </a:r>
+            <a:endParaRPr lang="ru-RU" sz="600" b="0" dirty="0">
+              <a:solidFill>
+                <a:srgbClr val="F9FAFB"/>
+              </a:solidFill>
+              <a:effectLst/>
+              <a:latin typeface="Menlo"/>
+            </a:endParaRPr>
+          </a:p>
+        </p:txBody>
+      </p:sp>
+      <p:sp>
+        <p:nvSpPr>
+          <p:cNvPr id="21" name="TextBox 20">
+            <a:extLst>
+              <a:ext uri="{FF2B5EF4-FFF2-40B4-BE49-F238E27FC236}">
+                <a16:creationId xmlns:a16="http://schemas.microsoft.com/office/drawing/2014/main" id="{A2547584-8C11-53E0-5031-EC6330E6F26C}"/>
+              </a:ext>
+            </a:extLst>
+          </p:cNvPr>
+          <p:cNvSpPr txBox="1"/>
+          <p:nvPr/>
+        </p:nvSpPr>
+        <p:spPr>
+          <a:xfrm>
+            <a:off x="8131343" y="2565112"/>
+            <a:ext cx="4002005" cy="3508653"/>
+          </a:xfrm>
+          <a:prstGeom prst="rect">
+            <a:avLst/>
+          </a:prstGeom>
+          <a:noFill/>
+        </p:spPr>
+        <p:txBody>
+          <a:bodyPr wrap="square">
+            <a:spAutoFit/>
+          </a:bodyPr>
+          <a:lstStyle/>
+          <a:p>
+            <a:r>
+              <a:rPr lang="ru-RU" sz="600" dirty="0"/>
+              <a:t>INSERT INTO </a:t>
+            </a:r>
+            <a:r>
+              <a:rPr lang="ru-RU" sz="600" dirty="0" err="1"/>
+              <a:t>grades</a:t>
+            </a:r>
+            <a:r>
+              <a:rPr lang="ru-RU" sz="600" dirty="0"/>
+              <a:t> (</a:t>
+            </a:r>
+            <a:r>
+              <a:rPr lang="ru-RU" sz="600" dirty="0" err="1"/>
+              <a:t>enrollment_id</a:t>
+            </a:r>
+            <a:r>
+              <a:rPr lang="ru-RU" sz="600" dirty="0"/>
+              <a:t>, </a:t>
+            </a:r>
+            <a:r>
+              <a:rPr lang="ru-RU" sz="600" dirty="0" err="1"/>
+              <a:t>grade</a:t>
+            </a:r>
+            <a:r>
+              <a:rPr lang="ru-RU" sz="600" dirty="0"/>
+              <a:t>, </a:t>
+            </a:r>
+            <a:r>
+              <a:rPr lang="ru-RU" sz="600" dirty="0" err="1"/>
+              <a:t>graded_on</a:t>
+            </a:r>
+            <a:r>
+              <a:rPr lang="ru-RU" sz="600" dirty="0"/>
+              <a:t>, </a:t>
+            </a:r>
+            <a:r>
+              <a:rPr lang="ru-RU" sz="600" dirty="0" err="1"/>
+              <a:t>comment</a:t>
+            </a:r>
+            <a:r>
+              <a:rPr lang="ru-RU" sz="600" dirty="0"/>
+              <a:t>) VALUES</a:t>
+            </a:r>
+          </a:p>
+          <a:p>
+            <a:r>
+              <a:rPr lang="ru-RU" sz="600" dirty="0"/>
+              <a:t>    (1,  5, '2024-01-15', 'Отличная работа'),</a:t>
+            </a:r>
+          </a:p>
+          <a:p>
+            <a:r>
+              <a:rPr lang="ru-RU" sz="600" dirty="0"/>
+              <a:t>    (2,  4, '2024-01-20', NULL),</a:t>
+            </a:r>
+          </a:p>
+          <a:p>
+            <a:r>
+              <a:rPr lang="ru-RU" sz="600" dirty="0"/>
+              <a:t>    (3,  5, '2024-01-25', 'Лучший проект в группе'),</a:t>
+            </a:r>
+          </a:p>
+          <a:p>
+            <a:r>
+              <a:rPr lang="ru-RU" sz="600" dirty="0"/>
+              <a:t>    (4,  4, '2024-01-15', NULL),</a:t>
+            </a:r>
+          </a:p>
+          <a:p>
+            <a:r>
+              <a:rPr lang="ru-RU" sz="600" dirty="0"/>
+              <a:t>    (5,  3, '2024-01-16', 'Требуется доработка'),</a:t>
+            </a:r>
+          </a:p>
+          <a:p>
+            <a:r>
+              <a:rPr lang="ru-RU" sz="600" dirty="0"/>
+              <a:t>    (6,  5, '2024-01-17', NULL),</a:t>
+            </a:r>
+          </a:p>
+          <a:p>
+            <a:r>
+              <a:rPr lang="ru-RU" sz="600" dirty="0"/>
+              <a:t>    (7,  5, '2024-01-18', NULL),</a:t>
+            </a:r>
+          </a:p>
+          <a:p>
+            <a:r>
+              <a:rPr lang="ru-RU" sz="600" dirty="0"/>
+              <a:t>    (8,  4, '2024-01-19', NULL),</a:t>
+            </a:r>
+          </a:p>
+          <a:p>
+            <a:r>
+              <a:rPr lang="ru-RU" sz="600" dirty="0"/>
+              <a:t>    (9,  5, '2024-01-20', NULL),</a:t>
+            </a:r>
+          </a:p>
+          <a:p>
+            <a:r>
+              <a:rPr lang="ru-RU" sz="600" dirty="0"/>
+              <a:t>    (10, 3, '2024-01-15', 'Пропуски занятий'),</a:t>
+            </a:r>
+          </a:p>
+          <a:p>
+            <a:r>
+              <a:rPr lang="ru-RU" sz="600" dirty="0"/>
+              <a:t>    (11, 4, '2024-01-16', NULL),</a:t>
+            </a:r>
+          </a:p>
+          <a:p>
+            <a:r>
+              <a:rPr lang="ru-RU" sz="600" dirty="0"/>
+              <a:t>    (12, 5, '2024-01-18', NULL),</a:t>
+            </a:r>
+          </a:p>
+          <a:p>
+            <a:r>
+              <a:rPr lang="ru-RU" sz="600" dirty="0"/>
+              <a:t>    (13, 5, '2024-01-19', 'Отличный студент'),</a:t>
+            </a:r>
+          </a:p>
+          <a:p>
+            <a:r>
+              <a:rPr lang="ru-RU" sz="600" dirty="0"/>
+              <a:t>    (14, 4, '2024-01-20', NULL),</a:t>
+            </a:r>
+          </a:p>
+          <a:p>
+            <a:r>
+              <a:rPr lang="ru-RU" sz="600" dirty="0"/>
+              <a:t>    (16, 3, '2024-01-21', NULL),</a:t>
+            </a:r>
+          </a:p>
+          <a:p>
+            <a:r>
+              <a:rPr lang="ru-RU" sz="600" dirty="0"/>
+              <a:t>    (17, 4, '2024-01-22', NULL),</a:t>
+            </a:r>
+          </a:p>
+          <a:p>
+            <a:r>
+              <a:rPr lang="ru-RU" sz="600" dirty="0"/>
+              <a:t>    (18, 5, '2024-01-23', NULL),</a:t>
+            </a:r>
+          </a:p>
+          <a:p>
+            <a:r>
+              <a:rPr lang="ru-RU" sz="600" dirty="0"/>
+              <a:t>    (19, 4, '2024-01-24', NULL),</a:t>
+            </a:r>
+          </a:p>
+          <a:p>
+            <a:r>
+              <a:rPr lang="ru-RU" sz="600" dirty="0"/>
+              <a:t>    (20, 5, '2024-01-25', NULL),</a:t>
+            </a:r>
+          </a:p>
+          <a:p>
+            <a:r>
+              <a:rPr lang="ru-RU" sz="600" dirty="0"/>
+              <a:t>    (21, 5, '2024-01-26', 'Лучший результат'),</a:t>
+            </a:r>
+          </a:p>
+          <a:p>
+            <a:r>
+              <a:rPr lang="ru-RU" sz="600" dirty="0"/>
+              <a:t>    (22, 4, '2024-01-27', NULL),</a:t>
+            </a:r>
+          </a:p>
+          <a:p>
+            <a:r>
+              <a:rPr lang="ru-RU" sz="600" dirty="0"/>
+              <a:t>    (23, 4, '2024-01-28', NULL),</a:t>
+            </a:r>
+          </a:p>
+          <a:p>
+            <a:r>
+              <a:rPr lang="ru-RU" sz="600" dirty="0"/>
+              <a:t>    (24, 5, '2024-01-29', NULL),</a:t>
+            </a:r>
+          </a:p>
+          <a:p>
+            <a:r>
+              <a:rPr lang="ru-RU" sz="600" dirty="0"/>
+              <a:t>    (25, 3, '2024-01-30', 'Слабая подготовка'),</a:t>
+            </a:r>
+          </a:p>
+          <a:p>
+            <a:r>
+              <a:rPr lang="ru-RU" sz="600" dirty="0"/>
+              <a:t>    (26, 5, '2024-02-01', NULL),</a:t>
+            </a:r>
+          </a:p>
+          <a:p>
+            <a:r>
+              <a:rPr lang="ru-RU" sz="600" dirty="0"/>
+              <a:t>    (27, 4, '2024-02-02', NULL),</a:t>
+            </a:r>
+          </a:p>
+          <a:p>
+            <a:r>
+              <a:rPr lang="ru-RU" sz="600" dirty="0"/>
+              <a:t>    (28, 5, '2024-02-03', NULL),</a:t>
+            </a:r>
+          </a:p>
+          <a:p>
+            <a:r>
+              <a:rPr lang="ru-RU" sz="600" dirty="0"/>
+              <a:t>    (29, 4, '2024-02-04', NULL),</a:t>
+            </a:r>
+          </a:p>
+          <a:p>
+            <a:r>
+              <a:rPr lang="ru-RU" sz="600" dirty="0"/>
+              <a:t>    (30, 4, '2024-02-05', NULL),</a:t>
+            </a:r>
+          </a:p>
+          <a:p>
+            <a:r>
+              <a:rPr lang="ru-RU" sz="600" dirty="0"/>
+              <a:t>    (31, 5, '2024-02-06', NULL),</a:t>
+            </a:r>
+          </a:p>
+          <a:p>
+            <a:r>
+              <a:rPr lang="ru-RU" sz="600" dirty="0"/>
+              <a:t>    (32, 3, '2024-02-07', 'Не сдал вовремя'),</a:t>
+            </a:r>
+          </a:p>
+          <a:p>
+            <a:r>
+              <a:rPr lang="ru-RU" sz="600" dirty="0"/>
+              <a:t>    (33, 4, '2024-02-08', NULL),</a:t>
+            </a:r>
+          </a:p>
+          <a:p>
+            <a:r>
+              <a:rPr lang="ru-RU" sz="600" dirty="0"/>
+              <a:t>    (34, 5, '2024-02-09', NULL),</a:t>
+            </a:r>
+          </a:p>
+          <a:p>
+            <a:r>
+              <a:rPr lang="ru-RU" sz="600" dirty="0"/>
+              <a:t>    (35, 4, '2024-02-10', NULL),</a:t>
+            </a:r>
+          </a:p>
+          <a:p>
+            <a:r>
+              <a:rPr lang="ru-RU" sz="600" dirty="0"/>
+              <a:t>    (36, 5, '2024-02-11', NULL),</a:t>
+            </a:r>
+          </a:p>
+          <a:p>
+            <a:r>
+              <a:rPr lang="ru-RU" sz="600" dirty="0"/>
+              <a:t>    (37, 5, '2024-02-12', 'Отличная защита');</a:t>
+            </a:r>
+          </a:p>
+        </p:txBody>
+      </p:sp>
+    </p:spTree>
+    <p:extLst>
+      <p:ext uri="{BB962C8B-B14F-4D97-AF65-F5344CB8AC3E}">
+        <p14:creationId xmlns:p14="http://schemas.microsoft.com/office/powerpoint/2010/main" val="3431976814"/>
+      </p:ext>
+    </p:extLst>
+  </p:cSld>
+  <p:clrMapOvr>
+    <a:masterClrMapping/>
+  </p:clrMapOvr>
+</p:sld>
+</file>
+
+<file path=ppt/slides/slide27.xml><?xml version="1.0" encoding="utf-8"?>
+<p:sld xmlns:a="http://schemas.openxmlformats.org/drawingml/2006/main" xmlns:r="http://schemas.openxmlformats.org/officeDocument/2006/relationships" xmlns:p="http://schemas.openxmlformats.org/presentationml/2006/main">
+  <p:cSld>
+    <p:spTree>
+      <p:nvGrpSpPr>
+        <p:cNvPr id="1" name="">
+          <a:extLst>
+            <a:ext uri="{FF2B5EF4-FFF2-40B4-BE49-F238E27FC236}">
+              <a16:creationId xmlns:a16="http://schemas.microsoft.com/office/drawing/2014/main" id="{66FD8887-C871-121A-32CB-C99CE4B16559}"/>
+            </a:ext>
+          </a:extLst>
+        </p:cNvPr>
+        <p:cNvGrpSpPr/>
+        <p:nvPr/>
+      </p:nvGrpSpPr>
+      <p:grpSpPr>
+        <a:xfrm>
+          <a:off x="0" y="0"/>
+          <a:ext cx="0" cy="0"/>
+          <a:chOff x="0" y="0"/>
+          <a:chExt cx="0" cy="0"/>
+        </a:xfrm>
+      </p:grpSpPr>
+      <p:sp>
+        <p:nvSpPr>
+          <p:cNvPr id="2" name="Title 1">
+            <a:extLst>
+              <a:ext uri="{FF2B5EF4-FFF2-40B4-BE49-F238E27FC236}">
+                <a16:creationId xmlns:a16="http://schemas.microsoft.com/office/drawing/2014/main" id="{3419A6DB-E105-9FCD-F886-129701F126CA}"/>
+              </a:ext>
+            </a:extLst>
+          </p:cNvPr>
+          <p:cNvSpPr>
+            <a:spLocks noGrp="1"/>
+          </p:cNvSpPr>
+          <p:nvPr>
+            <p:ph type="title"/>
+          </p:nvPr>
+        </p:nvSpPr>
+        <p:spPr>
+          <a:xfrm>
+            <a:off x="808906" y="236622"/>
+            <a:ext cx="9072000" cy="332399"/>
+          </a:xfrm>
+        </p:spPr>
+        <p:txBody>
+          <a:bodyPr/>
+          <a:lstStyle/>
+          <a:p>
+            <a:r>
+              <a:rPr lang="ru-RU" dirty="0"/>
+              <a:t>Материал к лабораторной работе №1</a:t>
+            </a:r>
+            <a:endParaRPr lang="en-US" dirty="0"/>
+          </a:p>
+        </p:txBody>
+      </p:sp>
+      <p:sp>
+        <p:nvSpPr>
+          <p:cNvPr id="4" name="TextBox 3">
+            <a:extLst>
+              <a:ext uri="{FF2B5EF4-FFF2-40B4-BE49-F238E27FC236}">
+                <a16:creationId xmlns:a16="http://schemas.microsoft.com/office/drawing/2014/main" id="{01FEC71F-8FB9-DC78-239C-5AED2D6527F9}"/>
+              </a:ext>
+            </a:extLst>
+          </p:cNvPr>
+          <p:cNvSpPr txBox="1"/>
+          <p:nvPr/>
+        </p:nvSpPr>
+        <p:spPr>
+          <a:xfrm>
+            <a:off x="808906" y="834629"/>
+            <a:ext cx="6097002" cy="3693319"/>
+          </a:xfrm>
+          <a:prstGeom prst="rect">
+            <a:avLst/>
+          </a:prstGeom>
+          <a:noFill/>
+        </p:spPr>
+        <p:txBody>
+          <a:bodyPr wrap="square">
+            <a:spAutoFit/>
+          </a:bodyPr>
+          <a:lstStyle/>
+          <a:p>
+            <a:pPr marL="0" marR="0" indent="0" algn="l" latinLnBrk="1">
+              <a:lnSpc>
+                <a:spcPct val="100000"/>
+              </a:lnSpc>
+              <a:buNone/>
+            </a:pPr>
+            <a:r>
+              <a:rPr lang="ru-RU" sz="1800" b="0" dirty="0">
+                <a:solidFill>
+                  <a:schemeClr val="tx1"/>
+                </a:solidFill>
+                <a:effectLst/>
+                <a:latin typeface="+mn-lt"/>
+              </a:rPr>
+              <a:t>Проверяем наполнение:</a:t>
+            </a:r>
+            <a:br>
+              <a:rPr lang="ru-RU" sz="1800" b="0" dirty="0">
+                <a:solidFill>
+                  <a:schemeClr val="tx1"/>
+                </a:solidFill>
+                <a:effectLst/>
+                <a:latin typeface="+mn-lt"/>
+              </a:rPr>
+            </a:br>
+            <a:br>
+              <a:rPr lang="ru-RU" sz="1800" b="0" dirty="0">
+                <a:solidFill>
+                  <a:schemeClr val="tx1"/>
+                </a:solidFill>
+                <a:effectLst/>
+                <a:latin typeface="+mn-lt"/>
+              </a:rPr>
+            </a:br>
+            <a:r>
+              <a:rPr lang="ru-RU" sz="1800" b="0" dirty="0">
+                <a:solidFill>
+                  <a:schemeClr val="tx1"/>
+                </a:solidFill>
+                <a:effectLst/>
+                <a:latin typeface="+mn-lt"/>
+              </a:rPr>
+              <a:t>SELECT '</a:t>
+            </a:r>
+            <a:r>
+              <a:rPr lang="ru-RU" sz="1800" b="0" dirty="0" err="1">
+                <a:solidFill>
+                  <a:schemeClr val="tx1"/>
+                </a:solidFill>
+                <a:effectLst/>
+                <a:latin typeface="+mn-lt"/>
+              </a:rPr>
+              <a:t>teachers</a:t>
+            </a:r>
+            <a:r>
+              <a:rPr lang="ru-RU" sz="1800" b="0" dirty="0">
+                <a:solidFill>
+                  <a:schemeClr val="tx1"/>
+                </a:solidFill>
+                <a:effectLst/>
+                <a:latin typeface="+mn-lt"/>
+              </a:rPr>
+              <a:t>'    AS </a:t>
+            </a:r>
+            <a:r>
+              <a:rPr lang="ru-RU" sz="1800" b="0" dirty="0" err="1">
+                <a:solidFill>
+                  <a:schemeClr val="tx1"/>
+                </a:solidFill>
+                <a:effectLst/>
+                <a:latin typeface="+mn-lt"/>
+              </a:rPr>
+              <a:t>table_name</a:t>
+            </a:r>
+            <a:r>
+              <a:rPr lang="ru-RU" sz="1800" b="0" dirty="0">
+                <a:solidFill>
+                  <a:schemeClr val="tx1"/>
+                </a:solidFill>
+                <a:effectLst/>
+                <a:latin typeface="+mn-lt"/>
+              </a:rPr>
+              <a:t>, COUNT(*) FROM </a:t>
+            </a:r>
+            <a:r>
+              <a:rPr lang="ru-RU" sz="1800" b="0" dirty="0" err="1">
+                <a:solidFill>
+                  <a:schemeClr val="tx1"/>
+                </a:solidFill>
+                <a:effectLst/>
+                <a:latin typeface="+mn-lt"/>
+              </a:rPr>
+              <a:t>teachers</a:t>
+            </a:r>
+            <a:endParaRPr lang="ru-RU" sz="1800" b="0" dirty="0">
+              <a:solidFill>
+                <a:schemeClr val="tx1"/>
+              </a:solidFill>
+              <a:effectLst/>
+              <a:latin typeface="+mn-lt"/>
+            </a:endParaRPr>
+          </a:p>
+          <a:p>
+            <a:pPr marL="0" marR="0" indent="0" algn="l" latinLnBrk="1">
+              <a:lnSpc>
+                <a:spcPct val="100000"/>
+              </a:lnSpc>
+              <a:buNone/>
+            </a:pPr>
+            <a:r>
+              <a:rPr lang="ru-RU" sz="1800" b="0" dirty="0">
+                <a:solidFill>
+                  <a:schemeClr val="tx1"/>
+                </a:solidFill>
+                <a:effectLst/>
+                <a:latin typeface="+mn-lt"/>
+              </a:rPr>
+              <a:t>UNION ALL</a:t>
+            </a:r>
+          </a:p>
+          <a:p>
+            <a:pPr marL="0" marR="0" indent="0" algn="l" latinLnBrk="1">
+              <a:lnSpc>
+                <a:spcPct val="100000"/>
+              </a:lnSpc>
+              <a:buNone/>
+            </a:pPr>
+            <a:r>
+              <a:rPr lang="ru-RU" sz="1800" b="0" dirty="0">
+                <a:solidFill>
+                  <a:schemeClr val="tx1"/>
+                </a:solidFill>
+                <a:effectLst/>
+                <a:latin typeface="+mn-lt"/>
+              </a:rPr>
+              <a:t>SELECT '</a:t>
+            </a:r>
+            <a:r>
+              <a:rPr lang="ru-RU" sz="1800" b="0" dirty="0" err="1">
+                <a:solidFill>
+                  <a:schemeClr val="tx1"/>
+                </a:solidFill>
+                <a:effectLst/>
+                <a:latin typeface="+mn-lt"/>
+              </a:rPr>
+              <a:t>students</a:t>
+            </a:r>
+            <a:r>
+              <a:rPr lang="ru-RU" sz="1800" b="0" dirty="0">
+                <a:solidFill>
+                  <a:schemeClr val="tx1"/>
+                </a:solidFill>
+                <a:effectLst/>
+                <a:latin typeface="+mn-lt"/>
+              </a:rPr>
+              <a:t>',                  COUNT(*) FROM </a:t>
+            </a:r>
+            <a:r>
+              <a:rPr lang="ru-RU" sz="1800" b="0" dirty="0" err="1">
+                <a:solidFill>
+                  <a:schemeClr val="tx1"/>
+                </a:solidFill>
+                <a:effectLst/>
+                <a:latin typeface="+mn-lt"/>
+              </a:rPr>
+              <a:t>students</a:t>
+            </a:r>
+            <a:endParaRPr lang="ru-RU" sz="1800" b="0" dirty="0">
+              <a:solidFill>
+                <a:schemeClr val="tx1"/>
+              </a:solidFill>
+              <a:effectLst/>
+              <a:latin typeface="+mn-lt"/>
+            </a:endParaRPr>
+          </a:p>
+          <a:p>
+            <a:pPr marL="0" marR="0" indent="0" algn="l" latinLnBrk="1">
+              <a:lnSpc>
+                <a:spcPct val="100000"/>
+              </a:lnSpc>
+              <a:buNone/>
+            </a:pPr>
+            <a:r>
+              <a:rPr lang="ru-RU" sz="1800" b="0" dirty="0">
+                <a:solidFill>
+                  <a:schemeClr val="tx1"/>
+                </a:solidFill>
+                <a:effectLst/>
+                <a:latin typeface="+mn-lt"/>
+              </a:rPr>
+              <a:t>UNION ALL</a:t>
+            </a:r>
+          </a:p>
+          <a:p>
+            <a:pPr marL="0" marR="0" indent="0" algn="l" latinLnBrk="1">
+              <a:lnSpc>
+                <a:spcPct val="100000"/>
+              </a:lnSpc>
+              <a:buNone/>
+            </a:pPr>
+            <a:r>
+              <a:rPr lang="ru-RU" sz="1800" b="0" dirty="0">
+                <a:solidFill>
+                  <a:schemeClr val="tx1"/>
+                </a:solidFill>
+                <a:effectLst/>
+                <a:latin typeface="+mn-lt"/>
+              </a:rPr>
+              <a:t>SELECT '</a:t>
+            </a:r>
+            <a:r>
+              <a:rPr lang="ru-RU" sz="1800" b="0" dirty="0" err="1">
+                <a:solidFill>
+                  <a:schemeClr val="tx1"/>
+                </a:solidFill>
+                <a:effectLst/>
+                <a:latin typeface="+mn-lt"/>
+              </a:rPr>
+              <a:t>courses</a:t>
+            </a:r>
+            <a:r>
+              <a:rPr lang="ru-RU" sz="1800" b="0" dirty="0">
+                <a:solidFill>
+                  <a:schemeClr val="tx1"/>
+                </a:solidFill>
+                <a:effectLst/>
+                <a:latin typeface="+mn-lt"/>
+              </a:rPr>
+              <a:t>',                   COUNT(*) FROM </a:t>
+            </a:r>
+            <a:r>
+              <a:rPr lang="ru-RU" sz="1800" b="0" dirty="0" err="1">
+                <a:solidFill>
+                  <a:schemeClr val="tx1"/>
+                </a:solidFill>
+                <a:effectLst/>
+                <a:latin typeface="+mn-lt"/>
+              </a:rPr>
+              <a:t>courses</a:t>
+            </a:r>
+            <a:endParaRPr lang="ru-RU" sz="1800" b="0" dirty="0">
+              <a:solidFill>
+                <a:schemeClr val="tx1"/>
+              </a:solidFill>
+              <a:effectLst/>
+              <a:latin typeface="+mn-lt"/>
+            </a:endParaRPr>
+          </a:p>
+          <a:p>
+            <a:pPr marL="0" marR="0" indent="0" algn="l" latinLnBrk="1">
+              <a:lnSpc>
+                <a:spcPct val="100000"/>
+              </a:lnSpc>
+              <a:buNone/>
+            </a:pPr>
+            <a:r>
+              <a:rPr lang="ru-RU" sz="1800" b="0" dirty="0">
+                <a:solidFill>
+                  <a:schemeClr val="tx1"/>
+                </a:solidFill>
+                <a:effectLst/>
+                <a:latin typeface="+mn-lt"/>
+              </a:rPr>
+              <a:t>UNION ALL</a:t>
+            </a:r>
+          </a:p>
+          <a:p>
+            <a:pPr marL="0" marR="0" indent="0" algn="l" latinLnBrk="1">
+              <a:lnSpc>
+                <a:spcPct val="100000"/>
+              </a:lnSpc>
+              <a:buNone/>
+            </a:pPr>
+            <a:r>
+              <a:rPr lang="ru-RU" sz="1800" b="0" dirty="0">
+                <a:solidFill>
+                  <a:schemeClr val="tx1"/>
+                </a:solidFill>
+                <a:effectLst/>
+                <a:latin typeface="+mn-lt"/>
+              </a:rPr>
+              <a:t>SELECT '</a:t>
+            </a:r>
+            <a:r>
+              <a:rPr lang="ru-RU" sz="1800" b="0" dirty="0" err="1">
+                <a:solidFill>
+                  <a:schemeClr val="tx1"/>
+                </a:solidFill>
+                <a:effectLst/>
+                <a:latin typeface="+mn-lt"/>
+              </a:rPr>
+              <a:t>enrollments</a:t>
+            </a:r>
+            <a:r>
+              <a:rPr lang="ru-RU" sz="1800" b="0" dirty="0">
+                <a:solidFill>
+                  <a:schemeClr val="tx1"/>
+                </a:solidFill>
+                <a:effectLst/>
+                <a:latin typeface="+mn-lt"/>
+              </a:rPr>
+              <a:t>',               COUNT(*) FROM </a:t>
+            </a:r>
+            <a:r>
+              <a:rPr lang="ru-RU" sz="1800" b="0" dirty="0" err="1">
+                <a:solidFill>
+                  <a:schemeClr val="tx1"/>
+                </a:solidFill>
+                <a:effectLst/>
+                <a:latin typeface="+mn-lt"/>
+              </a:rPr>
+              <a:t>enrollments</a:t>
+            </a:r>
+            <a:endParaRPr lang="ru-RU" sz="1800" b="0" dirty="0">
+              <a:solidFill>
+                <a:schemeClr val="tx1"/>
+              </a:solidFill>
+              <a:effectLst/>
+              <a:latin typeface="+mn-lt"/>
+            </a:endParaRPr>
+          </a:p>
+          <a:p>
+            <a:pPr marL="0" marR="0" indent="0" algn="l" latinLnBrk="1">
+              <a:lnSpc>
+                <a:spcPct val="100000"/>
+              </a:lnSpc>
+              <a:buNone/>
+            </a:pPr>
+            <a:r>
+              <a:rPr lang="ru-RU" sz="1800" b="0" dirty="0">
+                <a:solidFill>
+                  <a:schemeClr val="tx1"/>
+                </a:solidFill>
+                <a:effectLst/>
+                <a:latin typeface="+mn-lt"/>
+              </a:rPr>
+              <a:t>UNION ALL</a:t>
+            </a:r>
+          </a:p>
+          <a:p>
+            <a:pPr marL="0" marR="0" indent="0" algn="l" latinLnBrk="1">
+              <a:lnSpc>
+                <a:spcPct val="100000"/>
+              </a:lnSpc>
+              <a:buNone/>
+            </a:pPr>
+            <a:r>
+              <a:rPr lang="ru-RU" sz="1800" b="0" dirty="0">
+                <a:solidFill>
+                  <a:schemeClr val="tx1"/>
+                </a:solidFill>
+                <a:effectLst/>
+                <a:latin typeface="+mn-lt"/>
+              </a:rPr>
+              <a:t>SELECT '</a:t>
+            </a:r>
+            <a:r>
+              <a:rPr lang="ru-RU" sz="1800" b="0" dirty="0" err="1">
+                <a:solidFill>
+                  <a:schemeClr val="tx1"/>
+                </a:solidFill>
+                <a:effectLst/>
+                <a:latin typeface="+mn-lt"/>
+              </a:rPr>
+              <a:t>grades</a:t>
+            </a:r>
+            <a:r>
+              <a:rPr lang="ru-RU" sz="1800" b="0" dirty="0">
+                <a:solidFill>
+                  <a:schemeClr val="tx1"/>
+                </a:solidFill>
+                <a:effectLst/>
+                <a:latin typeface="+mn-lt"/>
+              </a:rPr>
+              <a:t>',                    COUNT(*) FROM </a:t>
+            </a:r>
+            <a:r>
+              <a:rPr lang="ru-RU" sz="1800" b="0" dirty="0" err="1">
+                <a:solidFill>
+                  <a:schemeClr val="tx1"/>
+                </a:solidFill>
+                <a:effectLst/>
+                <a:latin typeface="+mn-lt"/>
+              </a:rPr>
+              <a:t>grades</a:t>
+            </a:r>
+            <a:r>
+              <a:rPr lang="ru-RU" sz="1800" b="0" dirty="0">
+                <a:solidFill>
+                  <a:schemeClr val="tx1"/>
+                </a:solidFill>
+                <a:effectLst/>
+                <a:latin typeface="+mn-lt"/>
+              </a:rPr>
+              <a:t>;</a:t>
+            </a:r>
+            <a:endParaRPr lang="ru-RU" sz="975" b="0" dirty="0">
+              <a:solidFill>
+                <a:srgbClr val="F9FAFB"/>
+              </a:solidFill>
+              <a:effectLst/>
+              <a:latin typeface="Menlo"/>
+            </a:endParaRPr>
+          </a:p>
+        </p:txBody>
+      </p:sp>
+      <p:sp>
+        <p:nvSpPr>
+          <p:cNvPr id="7" name="TextBox 6">
+            <a:extLst>
+              <a:ext uri="{FF2B5EF4-FFF2-40B4-BE49-F238E27FC236}">
+                <a16:creationId xmlns:a16="http://schemas.microsoft.com/office/drawing/2014/main" id="{F5420015-9EDA-A664-EAA8-96F6D7DE0B83}"/>
+              </a:ext>
+            </a:extLst>
+          </p:cNvPr>
+          <p:cNvSpPr txBox="1"/>
+          <p:nvPr/>
+        </p:nvSpPr>
+        <p:spPr>
+          <a:xfrm>
+            <a:off x="1478380" y="5383996"/>
+            <a:ext cx="6097002" cy="276999"/>
+          </a:xfrm>
+          <a:prstGeom prst="rect">
+            <a:avLst/>
+          </a:prstGeom>
+          <a:noFill/>
+        </p:spPr>
+        <p:txBody>
+          <a:bodyPr wrap="square">
+            <a:spAutoFit/>
+          </a:bodyPr>
+          <a:lstStyle/>
+          <a:p>
+            <a:r>
+              <a:rPr lang="ru-RU" sz="1800" b="0" i="0" dirty="0">
+                <a:solidFill>
+                  <a:schemeClr val="tx1"/>
+                </a:solidFill>
+                <a:effectLst/>
+                <a:latin typeface="+mn-lt"/>
+              </a:rPr>
+              <a:t>Ожидаемый результат: 8, 15, 12, 36, 37.</a:t>
+            </a:r>
+            <a:endParaRPr lang="ru-RU" dirty="0"/>
+          </a:p>
+        </p:txBody>
+      </p:sp>
+    </p:spTree>
+    <p:extLst>
+      <p:ext uri="{BB962C8B-B14F-4D97-AF65-F5344CB8AC3E}">
+        <p14:creationId xmlns:p14="http://schemas.microsoft.com/office/powerpoint/2010/main" val="2491464406"/>
+      </p:ext>
+    </p:extLst>
+  </p:cSld>
+  <p:clrMapOvr>
+    <a:masterClrMapping/>
+  </p:clrMapOvr>
+</p:sld>
+</file>
+
+<file path=ppt/slides/slide28.xml><?xml version="1.0" encoding="utf-8"?>
+<p:sld xmlns:a="http://schemas.openxmlformats.org/drawingml/2006/main" xmlns:r="http://schemas.openxmlformats.org/officeDocument/2006/relationships" xmlns:p="http://schemas.openxmlformats.org/presentationml/2006/main">
+  <p:cSld>
+    <p:spTree>
+      <p:nvGrpSpPr>
+        <p:cNvPr id="1" name="">
+          <a:extLst>
+            <a:ext uri="{FF2B5EF4-FFF2-40B4-BE49-F238E27FC236}">
+              <a16:creationId xmlns:a16="http://schemas.microsoft.com/office/drawing/2014/main" id="{C24B8933-EBE6-13A8-F58F-538BC9743571}"/>
+            </a:ext>
+          </a:extLst>
+        </p:cNvPr>
+        <p:cNvGrpSpPr/>
+        <p:nvPr/>
+      </p:nvGrpSpPr>
+      <p:grpSpPr>
+        <a:xfrm>
+          <a:off x="0" y="0"/>
+          <a:ext cx="0" cy="0"/>
+          <a:chOff x="0" y="0"/>
+          <a:chExt cx="0" cy="0"/>
+        </a:xfrm>
+      </p:grpSpPr>
+      <p:sp>
+        <p:nvSpPr>
+          <p:cNvPr id="2" name="Title 1">
+            <a:extLst>
+              <a:ext uri="{FF2B5EF4-FFF2-40B4-BE49-F238E27FC236}">
+                <a16:creationId xmlns:a16="http://schemas.microsoft.com/office/drawing/2014/main" id="{3BAE777A-9025-6688-0E08-7BCB64B5B652}"/>
+              </a:ext>
+            </a:extLst>
+          </p:cNvPr>
+          <p:cNvSpPr>
+            <a:spLocks noGrp="1"/>
+          </p:cNvSpPr>
+          <p:nvPr>
+            <p:ph type="title"/>
+          </p:nvPr>
+        </p:nvSpPr>
+        <p:spPr>
+          <a:xfrm>
+            <a:off x="808906" y="236622"/>
+            <a:ext cx="9072000" cy="332399"/>
+          </a:xfrm>
+        </p:spPr>
+        <p:txBody>
+          <a:bodyPr/>
+          <a:lstStyle/>
+          <a:p>
+            <a:r>
+              <a:rPr lang="ru-RU" dirty="0"/>
+              <a:t>Материал к лабораторной работе №1</a:t>
+            </a:r>
+            <a:endParaRPr lang="en-US" dirty="0"/>
+          </a:p>
+        </p:txBody>
+      </p:sp>
+      <p:sp>
+        <p:nvSpPr>
+          <p:cNvPr id="4" name="TextBox 3">
+            <a:extLst>
+              <a:ext uri="{FF2B5EF4-FFF2-40B4-BE49-F238E27FC236}">
+                <a16:creationId xmlns:a16="http://schemas.microsoft.com/office/drawing/2014/main" id="{09F004FA-A5A9-729D-8346-E1FEB6C8421C}"/>
+              </a:ext>
+            </a:extLst>
+          </p:cNvPr>
+          <p:cNvSpPr txBox="1"/>
+          <p:nvPr/>
+        </p:nvSpPr>
+        <p:spPr>
+          <a:xfrm>
+            <a:off x="678280" y="1331561"/>
+            <a:ext cx="6097002" cy="1451679"/>
+          </a:xfrm>
+          <a:prstGeom prst="rect">
+            <a:avLst/>
+          </a:prstGeom>
+          <a:noFill/>
+        </p:spPr>
+        <p:txBody>
+          <a:bodyPr wrap="square">
+            <a:spAutoFit/>
+          </a:bodyPr>
+          <a:lstStyle/>
+          <a:p>
+            <a:pPr marL="0" marR="0" lvl="0" indent="-342900" algn="l">
+              <a:spcBef>
+                <a:spcPts val="1200"/>
+              </a:spcBef>
+              <a:spcAft>
+                <a:spcPts val="1200"/>
+              </a:spcAft>
+              <a:buFont typeface="Arial" panose="020B0604020202020204" pitchFamily="34" charset="0"/>
+              <a:buChar char="•"/>
+            </a:pPr>
+            <a:r>
+              <a:rPr lang="ru-RU" sz="1800" b="0" i="0" dirty="0">
+                <a:solidFill>
+                  <a:schemeClr val="tx1"/>
+                </a:solidFill>
+                <a:effectLst/>
+                <a:latin typeface="+mn-lt"/>
+              </a:rPr>
+              <a:t>Для расчёта возраста используйте AGE(</a:t>
+            </a:r>
+            <a:r>
+              <a:rPr lang="ru-RU" sz="1800" b="0" i="0" dirty="0" err="1">
+                <a:solidFill>
+                  <a:schemeClr val="tx1"/>
+                </a:solidFill>
+                <a:effectLst/>
+                <a:latin typeface="+mn-lt"/>
+              </a:rPr>
+              <a:t>birth_date</a:t>
+            </a:r>
+            <a:r>
+              <a:rPr lang="ru-RU" sz="1800" b="0" i="0" dirty="0">
+                <a:solidFill>
+                  <a:schemeClr val="tx1"/>
+                </a:solidFill>
+                <a:effectLst/>
+                <a:latin typeface="+mn-lt"/>
+              </a:rPr>
+              <a:t>) или EXTRACT(YEAR FROM AGE(</a:t>
+            </a:r>
+            <a:r>
+              <a:rPr lang="ru-RU" sz="1800" b="0" i="0" dirty="0" err="1">
+                <a:solidFill>
+                  <a:schemeClr val="tx1"/>
+                </a:solidFill>
+                <a:effectLst/>
+                <a:latin typeface="+mn-lt"/>
+              </a:rPr>
+              <a:t>birth_date</a:t>
+            </a:r>
+            <a:r>
+              <a:rPr lang="ru-RU" sz="1800" b="0" i="0" dirty="0">
+                <a:solidFill>
+                  <a:schemeClr val="tx1"/>
+                </a:solidFill>
+                <a:effectLst/>
+                <a:latin typeface="+mn-lt"/>
+              </a:rPr>
+              <a:t>)).</a:t>
+            </a:r>
+          </a:p>
+          <a:p>
+            <a:pPr marL="0" marR="0" lvl="0" indent="-342900" algn="l">
+              <a:spcBef>
+                <a:spcPts val="450"/>
+              </a:spcBef>
+              <a:spcAft>
+                <a:spcPts val="1200"/>
+              </a:spcAft>
+              <a:buFont typeface="Arial" panose="020B0604020202020204" pitchFamily="34" charset="0"/>
+              <a:buChar char="•"/>
+            </a:pPr>
+            <a:r>
+              <a:rPr lang="ru-RU" sz="1800" b="0" i="0" dirty="0">
+                <a:solidFill>
+                  <a:schemeClr val="tx1"/>
+                </a:solidFill>
+                <a:effectLst/>
+                <a:latin typeface="+mn-lt"/>
+              </a:rPr>
+              <a:t>Для форматирования среднего значения удобно ROUND(AVG(...), 2).</a:t>
+            </a:r>
+          </a:p>
+        </p:txBody>
+      </p:sp>
+    </p:spTree>
+    <p:extLst>
+      <p:ext uri="{BB962C8B-B14F-4D97-AF65-F5344CB8AC3E}">
+        <p14:creationId xmlns:p14="http://schemas.microsoft.com/office/powerpoint/2010/main" val="4011884829"/>
+      </p:ext>
+    </p:extLst>
+  </p:cSld>
+  <p:clrMapOvr>
+    <a:masterClrMapping/>
+  </p:clrMapOvr>
+</p:sld>
+</file>
+
+<file path=ppt/slides/slide29.xml><?xml version="1.0" encoding="utf-8"?>
+<p:sld xmlns:a="http://schemas.openxmlformats.org/drawingml/2006/main" xmlns:r="http://schemas.openxmlformats.org/officeDocument/2006/relationships" xmlns:p="http://schemas.openxmlformats.org/presentationml/2006/main">
+  <p:cSld>
+    <p:spTree>
+      <p:nvGrpSpPr>
+        <p:cNvPr id="1" name="">
+          <a:extLst>
+            <a:ext uri="{FF2B5EF4-FFF2-40B4-BE49-F238E27FC236}">
+              <a16:creationId xmlns:a16="http://schemas.microsoft.com/office/drawing/2014/main" id="{F8B652F9-AAED-AFCB-FCDF-622EB9E9FE7E}"/>
+            </a:ext>
+          </a:extLst>
+        </p:cNvPr>
+        <p:cNvGrpSpPr/>
+        <p:nvPr/>
+      </p:nvGrpSpPr>
+      <p:grpSpPr>
+        <a:xfrm>
+          <a:off x="0" y="0"/>
+          <a:ext cx="0" cy="0"/>
+          <a:chOff x="0" y="0"/>
+          <a:chExt cx="0" cy="0"/>
+        </a:xfrm>
+      </p:grpSpPr>
+      <p:sp>
+        <p:nvSpPr>
+          <p:cNvPr id="2" name="Title 1">
+            <a:extLst>
+              <a:ext uri="{FF2B5EF4-FFF2-40B4-BE49-F238E27FC236}">
+                <a16:creationId xmlns:a16="http://schemas.microsoft.com/office/drawing/2014/main" id="{AB3ADB84-911D-1D74-464C-9055D3590FCA}"/>
+              </a:ext>
+            </a:extLst>
+          </p:cNvPr>
+          <p:cNvSpPr>
+            <a:spLocks noGrp="1"/>
+          </p:cNvSpPr>
+          <p:nvPr>
+            <p:ph type="title"/>
+          </p:nvPr>
+        </p:nvSpPr>
+        <p:spPr>
+          <a:xfrm>
+            <a:off x="808906" y="236622"/>
+            <a:ext cx="9072000" cy="332399"/>
+          </a:xfrm>
+        </p:spPr>
+        <p:txBody>
+          <a:bodyPr/>
+          <a:lstStyle/>
+          <a:p>
+            <a:r>
+              <a:rPr lang="ru-RU" dirty="0"/>
+              <a:t>Требования к отчетности</a:t>
+            </a:r>
+            <a:endParaRPr lang="en-US" dirty="0"/>
+          </a:p>
+        </p:txBody>
+      </p:sp>
+      <p:sp>
+        <p:nvSpPr>
+          <p:cNvPr id="4" name="TextBox 3">
+            <a:extLst>
+              <a:ext uri="{FF2B5EF4-FFF2-40B4-BE49-F238E27FC236}">
+                <a16:creationId xmlns:a16="http://schemas.microsoft.com/office/drawing/2014/main" id="{F59FE4FB-5652-C4C5-0123-3DBB6DDDE867}"/>
+              </a:ext>
+            </a:extLst>
+          </p:cNvPr>
+          <p:cNvSpPr txBox="1"/>
+          <p:nvPr/>
+        </p:nvSpPr>
+        <p:spPr>
+          <a:xfrm>
+            <a:off x="894848" y="968223"/>
+            <a:ext cx="6097002" cy="2993127"/>
+          </a:xfrm>
+          <a:prstGeom prst="rect">
+            <a:avLst/>
+          </a:prstGeom>
+          <a:noFill/>
+        </p:spPr>
+        <p:txBody>
+          <a:bodyPr wrap="square">
+            <a:spAutoFit/>
+          </a:bodyPr>
+          <a:lstStyle/>
+          <a:p>
+            <a:pPr marL="0" marR="0" indent="0" algn="l">
+              <a:spcBef>
+                <a:spcPts val="1200"/>
+              </a:spcBef>
+              <a:spcAft>
+                <a:spcPts val="1200"/>
+              </a:spcAft>
+              <a:buNone/>
+            </a:pPr>
+            <a:r>
+              <a:rPr lang="ru-RU" sz="1800" b="0" i="0" dirty="0">
+                <a:solidFill>
+                  <a:schemeClr val="tx1"/>
+                </a:solidFill>
+                <a:effectLst/>
+                <a:latin typeface="+mn-lt"/>
+              </a:rPr>
+              <a:t>Отчёт по лабораторной работе должен содержать:</a:t>
+            </a:r>
+          </a:p>
+          <a:p>
+            <a:pPr marL="0" marR="0" lvl="0" indent="-342900" algn="l">
+              <a:spcBef>
+                <a:spcPts val="1200"/>
+              </a:spcBef>
+              <a:spcAft>
+                <a:spcPts val="1200"/>
+              </a:spcAft>
+              <a:buFont typeface="+mj-lt"/>
+              <a:buAutoNum type="arabicPeriod"/>
+            </a:pPr>
+            <a:r>
+              <a:rPr lang="ru-RU" sz="1800" b="1" i="0" dirty="0">
+                <a:solidFill>
+                  <a:schemeClr val="tx1"/>
+                </a:solidFill>
+                <a:effectLst/>
+                <a:latin typeface="+mn-lt"/>
+              </a:rPr>
+              <a:t>Титульный лист</a:t>
+            </a:r>
+            <a:r>
+              <a:rPr lang="ru-RU" sz="1800" b="0" i="0" dirty="0">
+                <a:solidFill>
+                  <a:schemeClr val="tx1"/>
+                </a:solidFill>
+                <a:effectLst/>
+                <a:latin typeface="+mn-lt"/>
+              </a:rPr>
+              <a:t> (ФИО, группа, номер работы).</a:t>
+            </a:r>
+          </a:p>
+          <a:p>
+            <a:pPr marL="0" marR="0" lvl="0" indent="-342900" algn="l">
+              <a:spcBef>
+                <a:spcPts val="450"/>
+              </a:spcBef>
+              <a:spcAft>
+                <a:spcPts val="1200"/>
+              </a:spcAft>
+              <a:buFont typeface="+mj-lt"/>
+              <a:buAutoNum type="arabicPeriod"/>
+            </a:pPr>
+            <a:r>
+              <a:rPr lang="ru-RU" sz="1800" b="1" i="0" dirty="0">
+                <a:solidFill>
+                  <a:schemeClr val="tx1"/>
+                </a:solidFill>
+                <a:effectLst/>
+                <a:latin typeface="+mn-lt"/>
+              </a:rPr>
+              <a:t>SQL-скрипты</a:t>
+            </a:r>
+            <a:r>
+              <a:rPr lang="ru-RU" sz="1800" b="0" i="0" dirty="0">
+                <a:solidFill>
+                  <a:schemeClr val="tx1"/>
+                </a:solidFill>
+                <a:effectLst/>
+                <a:latin typeface="+mn-lt"/>
+              </a:rPr>
+              <a:t> создания БД и наполнения таблиц.</a:t>
+            </a:r>
+          </a:p>
+          <a:p>
+            <a:pPr marL="0" marR="0" lvl="0" indent="-342900" algn="l">
+              <a:spcBef>
+                <a:spcPts val="450"/>
+              </a:spcBef>
+              <a:spcAft>
+                <a:spcPts val="1200"/>
+              </a:spcAft>
+              <a:buFont typeface="+mj-lt"/>
+              <a:buAutoNum type="arabicPeriod"/>
+            </a:pPr>
+            <a:r>
+              <a:rPr lang="ru-RU" sz="1800" b="1" i="0" dirty="0">
+                <a:solidFill>
+                  <a:schemeClr val="tx1"/>
+                </a:solidFill>
+                <a:effectLst/>
+                <a:latin typeface="+mn-lt"/>
+              </a:rPr>
+              <a:t>Для каждой задачи</a:t>
+            </a:r>
+            <a:r>
+              <a:rPr lang="ru-RU" sz="1800" b="0" i="0" dirty="0">
+                <a:solidFill>
+                  <a:schemeClr val="tx1"/>
+                </a:solidFill>
+                <a:effectLst/>
+                <a:latin typeface="+mn-lt"/>
+              </a:rPr>
+              <a:t> — формулировку, SQL-запрос и результат его выполнения (таблица или вывод </a:t>
+            </a:r>
+            <a:r>
+              <a:rPr lang="ru-RU" sz="1800" b="0" i="0" dirty="0" err="1">
+                <a:solidFill>
+                  <a:schemeClr val="tx1"/>
+                </a:solidFill>
+                <a:effectLst/>
+                <a:latin typeface="+mn-lt"/>
+              </a:rPr>
+              <a:t>psql</a:t>
+            </a:r>
+            <a:r>
+              <a:rPr lang="ru-RU" sz="1800" b="0" i="0" dirty="0">
+                <a:solidFill>
+                  <a:schemeClr val="tx1"/>
+                </a:solidFill>
+                <a:effectLst/>
+                <a:latin typeface="+mn-lt"/>
+              </a:rPr>
+              <a:t>).</a:t>
+            </a:r>
+          </a:p>
+          <a:p>
+            <a:pPr marL="0" marR="0" lvl="0" indent="-342900" algn="l">
+              <a:spcBef>
+                <a:spcPts val="450"/>
+              </a:spcBef>
+              <a:spcAft>
+                <a:spcPts val="1200"/>
+              </a:spcAft>
+              <a:buFont typeface="+mj-lt"/>
+              <a:buAutoNum type="arabicPeriod"/>
+            </a:pPr>
+            <a:r>
+              <a:rPr lang="ru-RU" sz="1800" b="1" i="0" dirty="0">
+                <a:solidFill>
+                  <a:schemeClr val="tx1"/>
+                </a:solidFill>
+                <a:effectLst/>
+                <a:latin typeface="+mn-lt"/>
+              </a:rPr>
+              <a:t>Комментарии</a:t>
+            </a:r>
+            <a:r>
+              <a:rPr lang="ru-RU" sz="1800" b="0" i="0" dirty="0">
+                <a:solidFill>
+                  <a:schemeClr val="tx1"/>
+                </a:solidFill>
+                <a:effectLst/>
+                <a:latin typeface="+mn-lt"/>
+              </a:rPr>
+              <a:t> к сложным запросам - объясните, почему выбрали такой подход.</a:t>
+            </a:r>
+            <a:endParaRPr lang="ru-RU" sz="1200" b="0" i="0" dirty="0">
+              <a:solidFill>
+                <a:srgbClr val="F9FAFB"/>
+              </a:solidFill>
+              <a:effectLst/>
+              <a:latin typeface="quote-cjk-patch"/>
+            </a:endParaRPr>
+          </a:p>
+        </p:txBody>
+      </p:sp>
+      <p:sp>
+        <p:nvSpPr>
+          <p:cNvPr id="7" name="TextBox 6">
+            <a:extLst>
+              <a:ext uri="{FF2B5EF4-FFF2-40B4-BE49-F238E27FC236}">
+                <a16:creationId xmlns:a16="http://schemas.microsoft.com/office/drawing/2014/main" id="{B81021E7-C9E7-BCEC-7918-D2B0BDFA2AD8}"/>
+              </a:ext>
+            </a:extLst>
+          </p:cNvPr>
+          <p:cNvSpPr txBox="1"/>
+          <p:nvPr/>
+        </p:nvSpPr>
+        <p:spPr>
+          <a:xfrm>
+            <a:off x="894848" y="5025007"/>
+            <a:ext cx="6097002" cy="369332"/>
+          </a:xfrm>
+          <a:prstGeom prst="rect">
+            <a:avLst/>
+          </a:prstGeom>
+          <a:noFill/>
+        </p:spPr>
+        <p:txBody>
+          <a:bodyPr wrap="square">
+            <a:spAutoFit/>
+          </a:bodyPr>
+          <a:lstStyle/>
+          <a:p>
+            <a:r>
+              <a:rPr lang="ru-RU" sz="1800" b="0" i="0" dirty="0">
+                <a:solidFill>
+                  <a:schemeClr val="tx1"/>
+                </a:solidFill>
+                <a:effectLst/>
+                <a:latin typeface="+mn-lt"/>
+              </a:rPr>
+              <a:t>Формат сдачи: файл </a:t>
+            </a:r>
+            <a:r>
+              <a:rPr lang="ru-RU" b="0" i="0" dirty="0">
+                <a:solidFill>
+                  <a:schemeClr val="tx1"/>
+                </a:solidFill>
+                <a:effectLst/>
+                <a:latin typeface="+mn-lt"/>
+              </a:rPr>
+              <a:t>.</a:t>
+            </a:r>
+            <a:r>
+              <a:rPr lang="ru-RU" b="0" i="0" dirty="0" err="1">
+                <a:solidFill>
+                  <a:schemeClr val="tx1"/>
+                </a:solidFill>
+                <a:effectLst/>
+                <a:latin typeface="+mn-lt"/>
+              </a:rPr>
+              <a:t>sql</a:t>
+            </a:r>
+            <a:r>
+              <a:rPr lang="ru-RU" sz="1800" b="0" i="0" dirty="0">
+                <a:solidFill>
+                  <a:schemeClr val="tx1"/>
+                </a:solidFill>
+                <a:effectLst/>
+                <a:latin typeface="+mn-lt"/>
+              </a:rPr>
+              <a:t> со всеми запросами и файл </a:t>
+            </a:r>
+            <a:r>
+              <a:rPr lang="ru-RU" b="0" i="0" dirty="0">
+                <a:solidFill>
+                  <a:schemeClr val="tx1"/>
+                </a:solidFill>
+                <a:effectLst/>
+                <a:latin typeface="+mn-lt"/>
+              </a:rPr>
+              <a:t>.</a:t>
+            </a:r>
+            <a:r>
+              <a:rPr lang="ru-RU" b="0" i="0" dirty="0" err="1">
+                <a:solidFill>
+                  <a:schemeClr val="tx1"/>
+                </a:solidFill>
+                <a:effectLst/>
+                <a:latin typeface="+mn-lt"/>
+              </a:rPr>
+              <a:t>pdf</a:t>
+            </a:r>
+            <a:r>
+              <a:rPr lang="ru-RU" sz="1800" b="0" i="0" dirty="0">
+                <a:solidFill>
+                  <a:schemeClr val="tx1"/>
+                </a:solidFill>
+                <a:effectLst/>
+                <a:latin typeface="+mn-lt"/>
+              </a:rPr>
+              <a:t> (или </a:t>
+            </a:r>
+            <a:r>
+              <a:rPr lang="ru-RU" b="0" i="0" dirty="0">
+                <a:solidFill>
+                  <a:schemeClr val="tx1"/>
+                </a:solidFill>
+                <a:effectLst/>
+                <a:latin typeface="+mn-lt"/>
+              </a:rPr>
+              <a:t>.</a:t>
+            </a:r>
+            <a:r>
+              <a:rPr lang="ru-RU" b="0" i="0" dirty="0" err="1">
+                <a:solidFill>
+                  <a:schemeClr val="tx1"/>
+                </a:solidFill>
+                <a:effectLst/>
+                <a:latin typeface="+mn-lt"/>
+              </a:rPr>
+              <a:t>docx</a:t>
+            </a:r>
+            <a:r>
+              <a:rPr lang="ru-RU" sz="1800" b="0" i="0" dirty="0">
+                <a:solidFill>
+                  <a:schemeClr val="tx1"/>
+                </a:solidFill>
+                <a:effectLst/>
+                <a:latin typeface="+mn-lt"/>
+              </a:rPr>
+              <a:t>) с отчётом.</a:t>
+            </a:r>
+            <a:endParaRPr lang="ru-RU" dirty="0"/>
+          </a:p>
+        </p:txBody>
+      </p:sp>
+    </p:spTree>
+    <p:extLst>
+      <p:ext uri="{BB962C8B-B14F-4D97-AF65-F5344CB8AC3E}">
+        <p14:creationId xmlns:p14="http://schemas.microsoft.com/office/powerpoint/2010/main" val="739988093"/>
+      </p:ext>
+    </p:extLst>
+  </p:cSld>
+  <p:clrMapOvr>
+    <a:masterClrMapping/>
+  </p:clrMapOvr>
+</p:sld>
+</file>
+
 <file path=ppt/slides/slide3.xml><?xml version="1.0" encoding="utf-8"?>
 <p:sld xmlns:a="http://schemas.openxmlformats.org/drawingml/2006/main" xmlns:r="http://schemas.openxmlformats.org/officeDocument/2006/relationships" xmlns:p="http://schemas.openxmlformats.org/presentationml/2006/main">
   <p:cSld>
@@ -29127,14 +36272,14 @@
           <p:nvPr>
             <p:extLst>
               <p:ext uri="{D42A27DB-BD31-4B8C-83A1-F6EECF244321}">
-                <p14:modId xmlns:p14="http://schemas.microsoft.com/office/powerpoint/2010/main" val="1974395732"/>
+                <p14:modId xmlns:p14="http://schemas.microsoft.com/office/powerpoint/2010/main" val="245123484"/>
               </p:ext>
             </p:extLst>
           </p:nvPr>
         </p:nvGraphicFramePr>
         <p:xfrm>
-          <a:off x="645694" y="1840864"/>
-          <a:ext cx="10515600" cy="2029145"/>
+          <a:off x="637674" y="1840864"/>
+          <a:ext cx="10523620" cy="2029145"/>
         </p:xfrm>
         <a:graphic>
           <a:graphicData uri="http://schemas.openxmlformats.org/drawingml/2006/table">
@@ -29143,7 +36288,7 @@
                 <a:tableStyleId>{5C22544A-7EE6-4342-B048-85BDC9FD1C3A}</a:tableStyleId>
               </a:tblPr>
               <a:tblGrid>
-                <a:gridCol w="2247285">
+                <a:gridCol w="2255305">
                   <a:extLst>
                     <a:ext uri="{9D8B030D-6E8A-4147-A177-3AD203B41FA5}">
                       <a16:colId xmlns:a16="http://schemas.microsoft.com/office/drawing/2014/main" val="3627222087"/>
@@ -29859,6 +37004,774 @@
     <p:extLst>
       <p:ext uri="{BB962C8B-B14F-4D97-AF65-F5344CB8AC3E}">
         <p14:creationId xmlns:p14="http://schemas.microsoft.com/office/powerpoint/2010/main" val="1563891834"/>
+      </p:ext>
+    </p:extLst>
+  </p:cSld>
+  <p:clrMapOvr>
+    <a:masterClrMapping/>
+  </p:clrMapOvr>
+</p:sld>
+</file>
+
+<file path=ppt/slides/slide30.xml><?xml version="1.0" encoding="utf-8"?>
+<p:sld xmlns:a="http://schemas.openxmlformats.org/drawingml/2006/main" xmlns:r="http://schemas.openxmlformats.org/officeDocument/2006/relationships" xmlns:p="http://schemas.openxmlformats.org/presentationml/2006/main">
+  <p:cSld>
+    <p:spTree>
+      <p:nvGrpSpPr>
+        <p:cNvPr id="1" name="">
+          <a:extLst>
+            <a:ext uri="{FF2B5EF4-FFF2-40B4-BE49-F238E27FC236}">
+              <a16:creationId xmlns:a16="http://schemas.microsoft.com/office/drawing/2014/main" id="{E275413C-A189-9910-ACD6-632268C2F360}"/>
+            </a:ext>
+          </a:extLst>
+        </p:cNvPr>
+        <p:cNvGrpSpPr/>
+        <p:nvPr/>
+      </p:nvGrpSpPr>
+      <p:grpSpPr>
+        <a:xfrm>
+          <a:off x="0" y="0"/>
+          <a:ext cx="0" cy="0"/>
+          <a:chOff x="0" y="0"/>
+          <a:chExt cx="0" cy="0"/>
+        </a:xfrm>
+      </p:grpSpPr>
+      <p:sp>
+        <p:nvSpPr>
+          <p:cNvPr id="2" name="Title 1">
+            <a:extLst>
+              <a:ext uri="{FF2B5EF4-FFF2-40B4-BE49-F238E27FC236}">
+                <a16:creationId xmlns:a16="http://schemas.microsoft.com/office/drawing/2014/main" id="{468D1F83-0279-8A99-7A7C-64B99FBD049A}"/>
+              </a:ext>
+            </a:extLst>
+          </p:cNvPr>
+          <p:cNvSpPr>
+            <a:spLocks noGrp="1"/>
+          </p:cNvSpPr>
+          <p:nvPr>
+            <p:ph type="title"/>
+          </p:nvPr>
+        </p:nvSpPr>
+        <p:spPr>
+          <a:xfrm>
+            <a:off x="808906" y="236622"/>
+            <a:ext cx="9072000" cy="664797"/>
+          </a:xfrm>
+        </p:spPr>
+        <p:txBody>
+          <a:bodyPr/>
+          <a:lstStyle/>
+          <a:p>
+            <a:r>
+              <a:rPr lang="ru-RU" dirty="0"/>
+              <a:t>Блок1: простые выборки и фильтрация (</a:t>
+            </a:r>
+            <a:r>
+              <a:rPr lang="en-US" dirty="0"/>
+              <a:t>like, </a:t>
+            </a:r>
+            <a:r>
+              <a:rPr lang="en-US" dirty="0" err="1"/>
+              <a:t>ilike</a:t>
+            </a:r>
+            <a:r>
+              <a:rPr lang="en-US" dirty="0"/>
+              <a:t>, age </a:t>
+            </a:r>
+            <a:r>
+              <a:rPr lang="ru-RU" dirty="0"/>
+              <a:t>изучить самостоятельно)</a:t>
+            </a:r>
+            <a:endParaRPr lang="en-US" dirty="0"/>
+          </a:p>
+        </p:txBody>
+      </p:sp>
+      <p:sp>
+        <p:nvSpPr>
+          <p:cNvPr id="5" name="TextBox 4">
+            <a:extLst>
+              <a:ext uri="{FF2B5EF4-FFF2-40B4-BE49-F238E27FC236}">
+                <a16:creationId xmlns:a16="http://schemas.microsoft.com/office/drawing/2014/main" id="{9A33CFB5-ED38-0100-EB3E-FF62BD526938}"/>
+              </a:ext>
+            </a:extLst>
+          </p:cNvPr>
+          <p:cNvSpPr txBox="1"/>
+          <p:nvPr/>
+        </p:nvSpPr>
+        <p:spPr>
+          <a:xfrm>
+            <a:off x="625642" y="840968"/>
+            <a:ext cx="8079205" cy="6017032"/>
+          </a:xfrm>
+          <a:prstGeom prst="rect">
+            <a:avLst/>
+          </a:prstGeom>
+          <a:noFill/>
+        </p:spPr>
+        <p:txBody>
+          <a:bodyPr wrap="square">
+            <a:spAutoFit/>
+          </a:bodyPr>
+          <a:lstStyle/>
+          <a:p>
+            <a:pPr marL="0" marR="0" indent="0" algn="l">
+              <a:spcBef>
+                <a:spcPts val="1200"/>
+              </a:spcBef>
+              <a:spcAft>
+                <a:spcPts val="1200"/>
+              </a:spcAft>
+              <a:buNone/>
+            </a:pPr>
+            <a:r>
+              <a:rPr lang="ru-RU" sz="700" b="0" i="0" dirty="0">
+                <a:solidFill>
+                  <a:schemeClr val="tx1"/>
+                </a:solidFill>
+                <a:effectLst/>
+                <a:latin typeface="+mn-lt"/>
+              </a:rPr>
+              <a:t>1.1. Вывести всех студентов с их полными именами и городами.</a:t>
+            </a:r>
+          </a:p>
+          <a:p>
+            <a:pPr marL="0" marR="0" indent="0" algn="l">
+              <a:spcBef>
+                <a:spcPts val="1200"/>
+              </a:spcBef>
+              <a:spcAft>
+                <a:spcPts val="1200"/>
+              </a:spcAft>
+              <a:buNone/>
+            </a:pPr>
+            <a:r>
+              <a:rPr lang="ru-RU" sz="700" b="0" i="0" dirty="0">
+                <a:solidFill>
+                  <a:schemeClr val="tx1"/>
+                </a:solidFill>
+                <a:effectLst/>
+                <a:latin typeface="+mn-lt"/>
+              </a:rPr>
+              <a:t>1.2. Вывести только активных студентов (</a:t>
+            </a:r>
+            <a:r>
+              <a:rPr lang="ru-RU" sz="700" b="0" i="0" dirty="0" err="1">
+                <a:solidFill>
+                  <a:schemeClr val="tx1"/>
+                </a:solidFill>
+                <a:effectLst/>
+                <a:latin typeface="+mn-lt"/>
+              </a:rPr>
+              <a:t>is_active</a:t>
+            </a:r>
+            <a:r>
+              <a:rPr lang="ru-RU" sz="700" b="0" i="0" dirty="0">
+                <a:solidFill>
+                  <a:schemeClr val="tx1"/>
+                </a:solidFill>
+                <a:effectLst/>
+                <a:latin typeface="+mn-lt"/>
+              </a:rPr>
+              <a:t> = TRUE), отсортированных по имени по алфавиту.</a:t>
+            </a:r>
+          </a:p>
+          <a:p>
+            <a:pPr marL="0" marR="0" indent="0" algn="l">
+              <a:spcBef>
+                <a:spcPts val="1200"/>
+              </a:spcBef>
+              <a:spcAft>
+                <a:spcPts val="1200"/>
+              </a:spcAft>
+              <a:buNone/>
+            </a:pPr>
+            <a:r>
+              <a:rPr lang="ru-RU" sz="700" b="0" i="0" dirty="0">
+                <a:solidFill>
+                  <a:schemeClr val="tx1"/>
+                </a:solidFill>
+                <a:effectLst/>
+                <a:latin typeface="+mn-lt"/>
+              </a:rPr>
+              <a:t>1.3. Вывести список преподавателей, работающих в департаменте «Информатика», с их зарплатами.</a:t>
+            </a:r>
+          </a:p>
+          <a:p>
+            <a:pPr marL="0" marR="0" indent="0" algn="l">
+              <a:spcBef>
+                <a:spcPts val="1200"/>
+              </a:spcBef>
+              <a:spcAft>
+                <a:spcPts val="1200"/>
+              </a:spcAft>
+              <a:buNone/>
+            </a:pPr>
+            <a:r>
+              <a:rPr lang="ru-RU" sz="700" b="0" i="0" dirty="0">
+                <a:solidFill>
+                  <a:schemeClr val="tx1"/>
+                </a:solidFill>
+                <a:effectLst/>
+                <a:latin typeface="+mn-lt"/>
+              </a:rPr>
+              <a:t>1.4. Найти всех студентов, родившихся после 1 января 2003 года.</a:t>
+            </a:r>
+          </a:p>
+          <a:p>
+            <a:pPr marL="0" marR="0" indent="0" algn="l">
+              <a:spcBef>
+                <a:spcPts val="1200"/>
+              </a:spcBef>
+              <a:spcAft>
+                <a:spcPts val="1200"/>
+              </a:spcAft>
+              <a:buNone/>
+            </a:pPr>
+            <a:r>
+              <a:rPr lang="ru-RU" sz="700" b="0" i="0" dirty="0">
+                <a:solidFill>
+                  <a:schemeClr val="tx1"/>
+                </a:solidFill>
+                <a:effectLst/>
+                <a:latin typeface="+mn-lt"/>
+              </a:rPr>
+              <a:t>1.5. Вывести названия всех курсов, которые являются факультативами (</a:t>
+            </a:r>
+            <a:r>
+              <a:rPr lang="ru-RU" sz="700" b="0" i="0" dirty="0" err="1">
+                <a:solidFill>
+                  <a:schemeClr val="tx1"/>
+                </a:solidFill>
+                <a:effectLst/>
+                <a:latin typeface="+mn-lt"/>
+              </a:rPr>
+              <a:t>is_elective</a:t>
+            </a:r>
+            <a:r>
+              <a:rPr lang="ru-RU" sz="700" b="0" i="0" dirty="0">
+                <a:solidFill>
+                  <a:schemeClr val="tx1"/>
+                </a:solidFill>
+                <a:effectLst/>
+                <a:latin typeface="+mn-lt"/>
+              </a:rPr>
+              <a:t> = TRUE).</a:t>
+            </a:r>
+          </a:p>
+          <a:p>
+            <a:pPr marL="0" marR="0" indent="0" algn="l">
+              <a:spcBef>
+                <a:spcPts val="1200"/>
+              </a:spcBef>
+              <a:spcAft>
+                <a:spcPts val="1200"/>
+              </a:spcAft>
+              <a:buNone/>
+            </a:pPr>
+            <a:r>
+              <a:rPr lang="ru-RU" sz="700" b="0" i="0" dirty="0">
+                <a:solidFill>
+                  <a:schemeClr val="tx1"/>
+                </a:solidFill>
+                <a:effectLst/>
+                <a:latin typeface="+mn-lt"/>
+              </a:rPr>
+              <a:t>1.6. Найти всех студентов, у которых не указан </a:t>
+            </a:r>
+            <a:r>
+              <a:rPr lang="ru-RU" sz="700" b="0" i="0" dirty="0" err="1">
+                <a:solidFill>
+                  <a:schemeClr val="tx1"/>
+                </a:solidFill>
+                <a:effectLst/>
+                <a:latin typeface="+mn-lt"/>
+              </a:rPr>
+              <a:t>email</a:t>
+            </a:r>
+            <a:r>
+              <a:rPr lang="ru-RU" sz="700" b="0" i="0" dirty="0">
+                <a:solidFill>
+                  <a:schemeClr val="tx1"/>
+                </a:solidFill>
+                <a:effectLst/>
+                <a:latin typeface="+mn-lt"/>
+              </a:rPr>
+              <a:t>.</a:t>
+            </a:r>
+          </a:p>
+          <a:p>
+            <a:pPr marL="0" marR="0" indent="0" algn="l">
+              <a:spcBef>
+                <a:spcPts val="1200"/>
+              </a:spcBef>
+              <a:spcAft>
+                <a:spcPts val="1200"/>
+              </a:spcAft>
+              <a:buNone/>
+            </a:pPr>
+            <a:r>
+              <a:rPr lang="ru-RU" sz="700" b="0" i="0" dirty="0">
+                <a:solidFill>
+                  <a:schemeClr val="tx1"/>
+                </a:solidFill>
+                <a:effectLst/>
+                <a:latin typeface="+mn-lt"/>
+              </a:rPr>
+              <a:t>1.7. Вывести студентов из Москвы или Казани, отсортированных по городу, а внутри города — по имени.</a:t>
+            </a:r>
+          </a:p>
+          <a:p>
+            <a:pPr marL="0" marR="0" indent="0" algn="l">
+              <a:spcBef>
+                <a:spcPts val="1200"/>
+              </a:spcBef>
+              <a:spcAft>
+                <a:spcPts val="1200"/>
+              </a:spcAft>
+              <a:buNone/>
+            </a:pPr>
+            <a:r>
+              <a:rPr lang="ru-RU" sz="700" b="0" i="0" dirty="0">
+                <a:solidFill>
+                  <a:schemeClr val="tx1"/>
+                </a:solidFill>
+                <a:effectLst/>
+                <a:latin typeface="+mn-lt"/>
+              </a:rPr>
+              <a:t>1.8. Вывести преподавателей, принятых на работу в период с 2010 по 2015 год включительно.</a:t>
+            </a:r>
+          </a:p>
+          <a:p>
+            <a:pPr marL="0" marR="0" indent="0" algn="l">
+              <a:spcBef>
+                <a:spcPts val="1200"/>
+              </a:spcBef>
+              <a:spcAft>
+                <a:spcPts val="1200"/>
+              </a:spcAft>
+              <a:buNone/>
+            </a:pPr>
+            <a:r>
+              <a:rPr lang="ru-RU" sz="700" b="0" i="0" dirty="0">
+                <a:solidFill>
+                  <a:schemeClr val="tx1"/>
+                </a:solidFill>
+                <a:effectLst/>
+                <a:latin typeface="+mn-lt"/>
+              </a:rPr>
+              <a:t>1.9. Вывести курсы с количеством кредитов от 4 до 6 включительно, отсортированные по убыванию кредитов.</a:t>
+            </a:r>
+          </a:p>
+          <a:p>
+            <a:pPr marL="0" marR="0" indent="0" algn="l">
+              <a:spcBef>
+                <a:spcPts val="1200"/>
+              </a:spcBef>
+              <a:spcAft>
+                <a:spcPts val="1200"/>
+              </a:spcAft>
+              <a:buNone/>
+            </a:pPr>
+            <a:r>
+              <a:rPr lang="ru-RU" sz="700" b="0" i="0" dirty="0">
+                <a:solidFill>
+                  <a:schemeClr val="tx1"/>
+                </a:solidFill>
+                <a:effectLst/>
+                <a:latin typeface="+mn-lt"/>
+              </a:rPr>
+              <a:t>1.10. Найти всех студентов, чьё имя начинается на «А» (используйте LIKE).</a:t>
+            </a:r>
+          </a:p>
+          <a:p>
+            <a:pPr marL="0" marR="0" indent="0" algn="l">
+              <a:spcBef>
+                <a:spcPts val="1200"/>
+              </a:spcBef>
+              <a:spcAft>
+                <a:spcPts val="1200"/>
+              </a:spcAft>
+              <a:buNone/>
+            </a:pPr>
+            <a:r>
+              <a:rPr lang="ru-RU" sz="700" b="0" i="0" dirty="0">
+                <a:solidFill>
+                  <a:schemeClr val="tx1"/>
+                </a:solidFill>
+                <a:effectLst/>
+                <a:latin typeface="+mn-lt"/>
+              </a:rPr>
+              <a:t>1.11. Найти всех студентов, в чьём имени есть буквосочетание «</a:t>
+            </a:r>
+            <a:r>
+              <a:rPr lang="ru-RU" sz="700" b="0" i="0" dirty="0" err="1">
+                <a:solidFill>
+                  <a:schemeClr val="tx1"/>
+                </a:solidFill>
+                <a:effectLst/>
+                <a:latin typeface="+mn-lt"/>
+              </a:rPr>
+              <a:t>ов</a:t>
+            </a:r>
+            <a:r>
+              <a:rPr lang="ru-RU" sz="700" b="0" i="0" dirty="0">
+                <a:solidFill>
+                  <a:schemeClr val="tx1"/>
+                </a:solidFill>
+                <a:effectLst/>
+                <a:latin typeface="+mn-lt"/>
+              </a:rPr>
+              <a:t>» или «ев» (регистр не важен — используйте ILIKE).</a:t>
+            </a:r>
+          </a:p>
+          <a:p>
+            <a:pPr marL="0" marR="0" indent="0" algn="l">
+              <a:spcBef>
+                <a:spcPts val="1200"/>
+              </a:spcBef>
+              <a:spcAft>
+                <a:spcPts val="1200"/>
+              </a:spcAft>
+              <a:buNone/>
+            </a:pPr>
+            <a:r>
+              <a:rPr lang="ru-RU" sz="700" b="0" i="0" dirty="0">
+                <a:solidFill>
+                  <a:schemeClr val="tx1"/>
+                </a:solidFill>
+                <a:effectLst/>
+                <a:latin typeface="+mn-lt"/>
+              </a:rPr>
+              <a:t>1.12. Вывести первых пять студентов по дате зачисления (самых ранних).</a:t>
+            </a:r>
+          </a:p>
+          <a:p>
+            <a:pPr marL="0" marR="0" indent="0" algn="l">
+              <a:spcBef>
+                <a:spcPts val="1200"/>
+              </a:spcBef>
+              <a:spcAft>
+                <a:spcPts val="1200"/>
+              </a:spcAft>
+              <a:buNone/>
+            </a:pPr>
+            <a:r>
+              <a:rPr lang="ru-RU" sz="700" b="0" i="0" dirty="0">
+                <a:solidFill>
+                  <a:schemeClr val="tx1"/>
+                </a:solidFill>
+                <a:effectLst/>
+                <a:latin typeface="+mn-lt"/>
+              </a:rPr>
+              <a:t>1.13. Вывести преподавателей с зарплатой выше 100000, отсортированных по убыванию зарплаты.</a:t>
+            </a:r>
+          </a:p>
+          <a:p>
+            <a:pPr marL="0" marR="0" indent="0" algn="l">
+              <a:spcBef>
+                <a:spcPts val="1200"/>
+              </a:spcBef>
+              <a:spcAft>
+                <a:spcPts val="1200"/>
+              </a:spcAft>
+              <a:buNone/>
+            </a:pPr>
+            <a:r>
+              <a:rPr lang="ru-RU" sz="700" b="0" i="0" dirty="0">
+                <a:solidFill>
+                  <a:schemeClr val="tx1"/>
+                </a:solidFill>
+                <a:effectLst/>
+                <a:latin typeface="+mn-lt"/>
+              </a:rPr>
+              <a:t>1.14. Найти курсы, проходившие в 2024 году.</a:t>
+            </a:r>
+          </a:p>
+          <a:p>
+            <a:pPr marL="0" marR="0" indent="0" algn="l">
+              <a:spcBef>
+                <a:spcPts val="1200"/>
+              </a:spcBef>
+              <a:spcAft>
+                <a:spcPts val="1200"/>
+              </a:spcAft>
+              <a:buNone/>
+            </a:pPr>
+            <a:r>
+              <a:rPr lang="ru-RU" sz="700" b="0" i="0" dirty="0">
+                <a:solidFill>
+                  <a:schemeClr val="tx1"/>
+                </a:solidFill>
+                <a:effectLst/>
+                <a:latin typeface="+mn-lt"/>
+              </a:rPr>
+              <a:t>1.15. Вывести всех студентов, чей возраст на текущий момент меньше 21 года (используйте AGE() или разницу дат).</a:t>
+            </a:r>
+            <a:endParaRPr lang="ru-RU" sz="400" b="0" i="0" dirty="0">
+              <a:solidFill>
+                <a:srgbClr val="F9FAFB"/>
+              </a:solidFill>
+              <a:effectLst/>
+              <a:latin typeface="quote-cjk-patch"/>
+            </a:endParaRPr>
+          </a:p>
+        </p:txBody>
+      </p:sp>
+    </p:spTree>
+    <p:extLst>
+      <p:ext uri="{BB962C8B-B14F-4D97-AF65-F5344CB8AC3E}">
+        <p14:creationId xmlns:p14="http://schemas.microsoft.com/office/powerpoint/2010/main" val="1988162125"/>
+      </p:ext>
+    </p:extLst>
+  </p:cSld>
+  <p:clrMapOvr>
+    <a:masterClrMapping/>
+  </p:clrMapOvr>
+</p:sld>
+</file>
+
+<file path=ppt/slides/slide31.xml><?xml version="1.0" encoding="utf-8"?>
+<p:sld xmlns:a="http://schemas.openxmlformats.org/drawingml/2006/main" xmlns:r="http://schemas.openxmlformats.org/officeDocument/2006/relationships" xmlns:p="http://schemas.openxmlformats.org/presentationml/2006/main">
+  <p:cSld>
+    <p:spTree>
+      <p:nvGrpSpPr>
+        <p:cNvPr id="1" name="">
+          <a:extLst>
+            <a:ext uri="{FF2B5EF4-FFF2-40B4-BE49-F238E27FC236}">
+              <a16:creationId xmlns:a16="http://schemas.microsoft.com/office/drawing/2014/main" id="{D9E4A8DF-B151-063B-9480-39822865997B}"/>
+            </a:ext>
+          </a:extLst>
+        </p:cNvPr>
+        <p:cNvGrpSpPr/>
+        <p:nvPr/>
+      </p:nvGrpSpPr>
+      <p:grpSpPr>
+        <a:xfrm>
+          <a:off x="0" y="0"/>
+          <a:ext cx="0" cy="0"/>
+          <a:chOff x="0" y="0"/>
+          <a:chExt cx="0" cy="0"/>
+        </a:xfrm>
+      </p:grpSpPr>
+      <p:sp>
+        <p:nvSpPr>
+          <p:cNvPr id="2" name="Title 1">
+            <a:extLst>
+              <a:ext uri="{FF2B5EF4-FFF2-40B4-BE49-F238E27FC236}">
+                <a16:creationId xmlns:a16="http://schemas.microsoft.com/office/drawing/2014/main" id="{32906393-E44B-0981-7667-408D7E83D135}"/>
+              </a:ext>
+            </a:extLst>
+          </p:cNvPr>
+          <p:cNvSpPr>
+            <a:spLocks noGrp="1"/>
+          </p:cNvSpPr>
+          <p:nvPr>
+            <p:ph type="title"/>
+          </p:nvPr>
+        </p:nvSpPr>
+        <p:spPr>
+          <a:xfrm>
+            <a:off x="808906" y="236622"/>
+            <a:ext cx="9072000" cy="332399"/>
+          </a:xfrm>
+        </p:spPr>
+        <p:txBody>
+          <a:bodyPr/>
+          <a:lstStyle/>
+          <a:p>
+            <a:r>
+              <a:rPr lang="ru-RU" dirty="0"/>
+              <a:t>Блок</a:t>
+            </a:r>
+            <a:r>
+              <a:rPr lang="en-US" dirty="0"/>
+              <a:t>2</a:t>
+            </a:r>
+            <a:r>
+              <a:rPr lang="ru-RU" dirty="0"/>
+              <a:t>: агрегация и группировка</a:t>
+            </a:r>
+            <a:endParaRPr lang="en-US" dirty="0"/>
+          </a:p>
+        </p:txBody>
+      </p:sp>
+      <p:sp>
+        <p:nvSpPr>
+          <p:cNvPr id="5" name="TextBox 4">
+            <a:extLst>
+              <a:ext uri="{FF2B5EF4-FFF2-40B4-BE49-F238E27FC236}">
+                <a16:creationId xmlns:a16="http://schemas.microsoft.com/office/drawing/2014/main" id="{B40B57ED-6662-3E84-A4E8-490D56DBC777}"/>
+              </a:ext>
+            </a:extLst>
+          </p:cNvPr>
+          <p:cNvSpPr txBox="1"/>
+          <p:nvPr/>
+        </p:nvSpPr>
+        <p:spPr>
+          <a:xfrm>
+            <a:off x="625642" y="840968"/>
+            <a:ext cx="8079205" cy="5478423"/>
+          </a:xfrm>
+          <a:prstGeom prst="rect">
+            <a:avLst/>
+          </a:prstGeom>
+          <a:noFill/>
+        </p:spPr>
+        <p:txBody>
+          <a:bodyPr wrap="square">
+            <a:spAutoFit/>
+          </a:bodyPr>
+          <a:lstStyle/>
+          <a:p>
+            <a:r>
+              <a:rPr lang="ru-RU" sz="1400" dirty="0"/>
+              <a:t>2.1. Посчитать общее количество студентов в базе.</a:t>
+            </a:r>
+          </a:p>
+          <a:p>
+            <a:r>
+              <a:rPr lang="ru-RU" sz="1400" dirty="0"/>
+              <a:t>2.2. Посчитать количество активных и неактивных студентов отдельно.</a:t>
+            </a:r>
+          </a:p>
+          <a:p>
+            <a:r>
+              <a:rPr lang="ru-RU" sz="1400" dirty="0"/>
+              <a:t>2.3. Найти среднюю зарплату преподавателей.</a:t>
+            </a:r>
+          </a:p>
+          <a:p>
+            <a:r>
+              <a:rPr lang="ru-RU" sz="1400" dirty="0"/>
+              <a:t>2.4. Найти минимальную и максимальную зарплату преподавателей.</a:t>
+            </a:r>
+          </a:p>
+          <a:p>
+            <a:r>
+              <a:rPr lang="ru-RU" sz="1400" dirty="0"/>
+              <a:t>2.5. Посчитать количество студентов в каждом городе, отсортированных по убыванию количества.</a:t>
+            </a:r>
+          </a:p>
+          <a:p>
+            <a:r>
+              <a:rPr lang="ru-RU" sz="1400" dirty="0"/>
+              <a:t>2.6. Найти средний возраст студентов по городам.</a:t>
+            </a:r>
+          </a:p>
+          <a:p>
+            <a:r>
+              <a:rPr lang="ru-RU" sz="1400" dirty="0"/>
+              <a:t>2.7. Для каждого департамента посчитать количество преподавателей и среднюю зарплату.</a:t>
+            </a:r>
+          </a:p>
+          <a:p>
+            <a:r>
+              <a:rPr lang="ru-RU" sz="1400" dirty="0"/>
+              <a:t>2.8. Вывести города, в которых больше двух студентов, с указанием количества.</a:t>
+            </a:r>
+          </a:p>
+          <a:p>
+            <a:r>
+              <a:rPr lang="ru-RU" sz="1400" dirty="0"/>
+              <a:t>2.9. Посчитать общее количество записей на курсы.</a:t>
+            </a:r>
+          </a:p>
+          <a:p>
+            <a:r>
+              <a:rPr lang="ru-RU" sz="1400" dirty="0"/>
+              <a:t>2.10. Для каждого курса посчитать количество записавшихся студентов, отсортированных по убыванию популярности.</a:t>
+            </a:r>
+          </a:p>
+          <a:p>
+            <a:r>
+              <a:rPr lang="ru-RU" sz="1400" dirty="0"/>
+              <a:t>2.11. Посчитать средний балл по каждому курсу (по таблице </a:t>
+            </a:r>
+            <a:r>
+              <a:rPr lang="ru-RU" sz="1400" dirty="0" err="1"/>
+              <a:t>grades</a:t>
+            </a:r>
+            <a:r>
+              <a:rPr lang="ru-RU" sz="1400" dirty="0"/>
+              <a:t> через </a:t>
+            </a:r>
+            <a:r>
+              <a:rPr lang="ru-RU" sz="1400" dirty="0" err="1"/>
+              <a:t>enrollments</a:t>
+            </a:r>
+            <a:r>
+              <a:rPr lang="ru-RU" sz="1400" dirty="0"/>
+              <a:t>).</a:t>
+            </a:r>
+          </a:p>
+          <a:p>
+            <a:r>
+              <a:rPr lang="ru-RU" sz="1400" dirty="0"/>
+              <a:t>2.12. Вывести курсы, средний балл по которым выше 4.5.</a:t>
+            </a:r>
+          </a:p>
+          <a:p>
+            <a:r>
+              <a:rPr lang="ru-RU" sz="1400" dirty="0"/>
+              <a:t>2.13. Для каждого преподавателя посчитать количество курсов, которые он ведёт.</a:t>
+            </a:r>
+          </a:p>
+          <a:p>
+            <a:r>
+              <a:rPr lang="ru-RU" sz="1400" dirty="0"/>
+              <a:t>2.14. Вывести преподавателей, ведущих более одного курса.</a:t>
+            </a:r>
+          </a:p>
+          <a:p>
+            <a:r>
+              <a:rPr lang="ru-RU" sz="1400" dirty="0"/>
+              <a:t>2.15. Посчитать суммарное количество кредитов по каждому департаменту (через курсы и преподавателей).</a:t>
+            </a:r>
+          </a:p>
+          <a:p>
+            <a:r>
+              <a:rPr lang="ru-RU" sz="1400" dirty="0"/>
+              <a:t>2.16. Найти самый популярный курс (по количеству записей).</a:t>
+            </a:r>
+          </a:p>
+          <a:p>
+            <a:r>
+              <a:rPr lang="ru-RU" sz="1400" dirty="0"/>
+              <a:t>2.17. Для каждого студента посчитать количество курсов, на которые он записан, отсортированных по убыванию.</a:t>
+            </a:r>
+          </a:p>
+          <a:p>
+            <a:r>
+              <a:rPr lang="ru-RU" sz="1400" dirty="0"/>
+              <a:t>2.18. Вывести студентов, записанных более чем на два курса.</a:t>
+            </a:r>
+          </a:p>
+          <a:p>
+            <a:r>
+              <a:rPr lang="ru-RU" sz="1400" dirty="0"/>
+              <a:t>2.19. Посчитать количество оценок «5», «4», «3», «2» отдельно (используйте GROUP BY </a:t>
+            </a:r>
+            <a:r>
+              <a:rPr lang="ru-RU" sz="1400" dirty="0" err="1"/>
+              <a:t>grade</a:t>
+            </a:r>
+            <a:r>
+              <a:rPr lang="ru-RU" sz="1400" dirty="0"/>
+              <a:t>).</a:t>
+            </a:r>
+          </a:p>
+          <a:p>
+            <a:r>
+              <a:rPr lang="ru-RU" sz="1400" dirty="0"/>
+              <a:t>2.20. Найти средний балл каждого студента по всем его курсам.</a:t>
+            </a:r>
+          </a:p>
+        </p:txBody>
+      </p:sp>
+    </p:spTree>
+    <p:extLst>
+      <p:ext uri="{BB962C8B-B14F-4D97-AF65-F5344CB8AC3E}">
+        <p14:creationId xmlns:p14="http://schemas.microsoft.com/office/powerpoint/2010/main" val="781321294"/>
       </p:ext>
     </p:extLst>
   </p:cSld>

--- a/Лекция2_Основы_SQL.pptx
+++ b/Лекция2_Основы_SQL.pptx
@@ -263,7 +263,7 @@
           <a:p>
             <a:fld id="{05400FBA-3B4D-594C-9C95-852DB6F34EF1}" type="datetimeFigureOut">
               <a:rPr lang="ru-RU" smtClean="0"/>
-              <a:t>12.10.2026</a:t>
+              <a:t>13.10.2026</a:t>
             </a:fld>
             <a:endParaRPr lang="ru-RU"/>
           </a:p>
@@ -24104,7 +24104,7 @@
           <a:p>
             <a:fld id="{7684163B-8EE3-4356-93B8-70F784CB301D}" type="datetimeFigureOut">
               <a:rPr lang="en-US" smtClean="0"/>
-              <a:t>10/12/2026</a:t>
+              <a:t>10/13/2026</a:t>
             </a:fld>
             <a:endParaRPr lang="en-US"/>
           </a:p>
@@ -35566,7 +35566,7 @@
         <p:spPr>
           <a:xfrm>
             <a:off x="1478380" y="5383996"/>
-            <a:ext cx="6097002" cy="276999"/>
+            <a:ext cx="6097002" cy="369332"/>
           </a:xfrm>
           <a:prstGeom prst="rect">
             <a:avLst/>
@@ -35587,7 +35587,47 @@
                 <a:effectLst/>
                 <a:latin typeface="+mn-lt"/>
               </a:rPr>
-              <a:t>Ожидаемый результат: 8, 15, 12, 36, 37.</a:t>
+              <a:t>Ожидаемый результат: 8, 15, 12, 3</a:t>
+            </a:r>
+            <a:r>
+              <a:rPr lang="en-US" sz="1800" b="0" i="0" dirty="0">
+                <a:solidFill>
+                  <a:schemeClr val="tx1"/>
+                </a:solidFill>
+                <a:effectLst/>
+                <a:latin typeface="+mn-lt"/>
+              </a:rPr>
+              <a:t>8</a:t>
+            </a:r>
+            <a:r>
+              <a:rPr lang="ru-RU" sz="1800" b="0" i="0" dirty="0">
+                <a:solidFill>
+                  <a:schemeClr val="tx1"/>
+                </a:solidFill>
+                <a:effectLst/>
+                <a:latin typeface="+mn-lt"/>
+              </a:rPr>
+              <a:t>, 3</a:t>
+            </a:r>
+            <a:r>
+              <a:rPr lang="en-US" sz="1800" b="0" i="0" dirty="0">
+                <a:solidFill>
+                  <a:schemeClr val="tx1"/>
+                </a:solidFill>
+                <a:effectLst/>
+                <a:latin typeface="+mn-lt"/>
+              </a:rPr>
+              <a:t>6</a:t>
+            </a:r>
+            <a:r>
+              <a:rPr lang="ru-RU" sz="1800" b="0" i="0" dirty="0">
+                <a:solidFill>
+                  <a:schemeClr val="tx1"/>
+                </a:solidFill>
+                <a:effectLst/>
+                <a:latin typeface="+mn-lt"/>
+              </a:rPr>
+              <a:t>.</a:t>
             </a:r>
             <a:endParaRPr lang="ru-RU" dirty="0"/>
           </a:p>
@@ -42749,12 +42789,24 @@
                         <a:buNone/>
                       </a:pPr>
                       <a:r>
-                        <a:rPr lang="ru-RU" sz="975">
+                        <a:rPr lang="ru-RU" sz="975" dirty="0">
                           <a:effectLst/>
                         </a:rPr>
-                        <a:t>WHERE age = 20</a:t>
+                        <a:t>WHERE </a:t>
                       </a:r>
-                      <a:endParaRPr lang="ru-RU" sz="1125" b="0" i="0">
+                      <a:r>
+                        <a:rPr lang="ru-RU" sz="975" dirty="0" err="1">
+                          <a:effectLst/>
+                        </a:rPr>
+                        <a:t>age</a:t>
+                      </a:r>
+                      <a:r>
+                        <a:rPr lang="ru-RU" sz="975" dirty="0">
+                          <a:effectLst/>
+                        </a:rPr>
+                        <a:t> = 20</a:t>
+                      </a:r>
+                      <a:endParaRPr lang="ru-RU" sz="1125" b="0" i="0" dirty="0">
                         <a:solidFill>
                           <a:srgbClr val="F9FAFB"/>
                         </a:solidFill>
@@ -42852,12 +42904,24 @@
                         <a:buNone/>
                       </a:pPr>
                       <a:r>
-                        <a:rPr lang="ru-RU" sz="975">
+                        <a:rPr lang="ru-RU" sz="975" dirty="0">
                           <a:effectLst/>
                         </a:rPr>
-                        <a:t>WHERE city &lt;&gt; 'Москва'</a:t>
+                        <a:t>WHERE </a:t>
                       </a:r>
-                      <a:endParaRPr lang="ru-RU" sz="1125" b="0" i="0">
+                      <a:r>
+                        <a:rPr lang="ru-RU" sz="975" dirty="0" err="1">
+                          <a:effectLst/>
+                        </a:rPr>
+                        <a:t>city</a:t>
+                      </a:r>
+                      <a:r>
+                        <a:rPr lang="ru-RU" sz="975" dirty="0">
+                          <a:effectLst/>
+                        </a:rPr>
+                        <a:t> &lt;&gt; 'Москва'</a:t>
+                      </a:r>
+                      <a:endParaRPr lang="ru-RU" sz="1125" b="0" i="0" dirty="0">
                         <a:solidFill>
                           <a:srgbClr val="F9FAFB"/>
                         </a:solidFill>
@@ -42979,12 +43043,24 @@
                         <a:buNone/>
                       </a:pPr>
                       <a:r>
-                        <a:rPr lang="ru-RU" sz="975">
+                        <a:rPr lang="ru-RU" sz="975" dirty="0">
                           <a:effectLst/>
                         </a:rPr>
-                        <a:t>WHERE age &gt;= 18</a:t>
+                        <a:t>WHERE </a:t>
                       </a:r>
-                      <a:endParaRPr lang="ru-RU" sz="1125" b="0" i="0">
+                      <a:r>
+                        <a:rPr lang="ru-RU" sz="975" dirty="0" err="1">
+                          <a:effectLst/>
+                        </a:rPr>
+                        <a:t>age</a:t>
+                      </a:r>
+                      <a:r>
+                        <a:rPr lang="ru-RU" sz="975" dirty="0">
+                          <a:effectLst/>
+                        </a:rPr>
+                        <a:t> &gt;= 18</a:t>
+                      </a:r>
+                      <a:endParaRPr lang="ru-RU" sz="1125" b="0" i="0" dirty="0">
                         <a:solidFill>
                           <a:srgbClr val="F9FAFB"/>
                         </a:solidFill>
@@ -43094,12 +43170,36 @@
                         <a:buNone/>
                       </a:pPr>
                       <a:r>
-                        <a:rPr lang="ru-RU" sz="975">
+                        <a:rPr lang="ru-RU" sz="975" dirty="0">
                           <a:effectLst/>
                         </a:rPr>
-                        <a:t>WHERE age &gt; 18 AND city = 'Москва'</a:t>
+                        <a:t>WHERE </a:t>
                       </a:r>
-                      <a:endParaRPr lang="ru-RU" sz="1125" b="0" i="0">
+                      <a:r>
+                        <a:rPr lang="ru-RU" sz="975" dirty="0" err="1">
+                          <a:effectLst/>
+                        </a:rPr>
+                        <a:t>age</a:t>
+                      </a:r>
+                      <a:r>
+                        <a:rPr lang="ru-RU" sz="975" dirty="0">
+                          <a:effectLst/>
+                        </a:rPr>
+                        <a:t> &gt; 18 AND </a:t>
+                      </a:r>
+                      <a:r>
+                        <a:rPr lang="ru-RU" sz="975" dirty="0" err="1">
+                          <a:effectLst/>
+                        </a:rPr>
+                        <a:t>city</a:t>
+                      </a:r>
+                      <a:r>
+                        <a:rPr lang="ru-RU" sz="975" dirty="0">
+                          <a:effectLst/>
+                        </a:rPr>
+                        <a:t> = 'Москва'</a:t>
+                      </a:r>
+                      <a:endParaRPr lang="ru-RU" sz="1125" b="0" i="0" dirty="0">
                         <a:solidFill>
                           <a:srgbClr val="F9FAFB"/>
                         </a:solidFill>
@@ -43185,12 +43285,24 @@
                         <a:buNone/>
                       </a:pPr>
                       <a:r>
-                        <a:rPr lang="ru-RU" sz="975">
+                        <a:rPr lang="ru-RU" sz="975" dirty="0">
                           <a:effectLst/>
                         </a:rPr>
-                        <a:t>WHERE age BETWEEN 18 AND 25</a:t>
+                        <a:t>WHERE </a:t>
                       </a:r>
-                      <a:endParaRPr lang="ru-RU" sz="1125" b="0" i="0">
+                      <a:r>
+                        <a:rPr lang="ru-RU" sz="975" dirty="0" err="1">
+                          <a:effectLst/>
+                        </a:rPr>
+                        <a:t>age</a:t>
+                      </a:r>
+                      <a:r>
+                        <a:rPr lang="ru-RU" sz="975" dirty="0">
+                          <a:effectLst/>
+                        </a:rPr>
+                        <a:t> BETWEEN 18 AND 25</a:t>
+                      </a:r>
+                      <a:endParaRPr lang="ru-RU" sz="1125" b="0" i="0" dirty="0">
                         <a:solidFill>
                           <a:srgbClr val="F9FAFB"/>
                         </a:solidFill>
@@ -43276,12 +43388,24 @@
                         <a:buNone/>
                       </a:pPr>
                       <a:r>
-                        <a:rPr lang="ru-RU" sz="975">
+                        <a:rPr lang="ru-RU" sz="975" dirty="0">
                           <a:effectLst/>
                         </a:rPr>
-                        <a:t>WHERE city IN ('Москва', 'Казань')</a:t>
+                        <a:t>WHERE </a:t>
                       </a:r>
-                      <a:endParaRPr lang="ru-RU" sz="1125" b="0" i="0">
+                      <a:r>
+                        <a:rPr lang="ru-RU" sz="975" dirty="0" err="1">
+                          <a:effectLst/>
+                        </a:rPr>
+                        <a:t>city</a:t>
+                      </a:r>
+                      <a:r>
+                        <a:rPr lang="ru-RU" sz="975" dirty="0">
+                          <a:effectLst/>
+                        </a:rPr>
+                        <a:t> IN ('Москва', 'Казань')</a:t>
+                      </a:r>
+                      <a:endParaRPr lang="ru-RU" sz="1125" b="0" i="0" dirty="0">
                         <a:solidFill>
                           <a:srgbClr val="F9FAFB"/>
                         </a:solidFill>
@@ -43367,12 +43491,24 @@
                         <a:buNone/>
                       </a:pPr>
                       <a:r>
-                        <a:rPr lang="ru-RU" sz="975">
+                        <a:rPr lang="ru-RU" sz="975" dirty="0">
                           <a:effectLst/>
                         </a:rPr>
-                        <a:t>WHERE name LIKE 'А%'</a:t>
+                        <a:t>WHERE </a:t>
                       </a:r>
-                      <a:endParaRPr lang="ru-RU" sz="1125" b="0" i="0">
+                      <a:r>
+                        <a:rPr lang="ru-RU" sz="975" dirty="0" err="1">
+                          <a:effectLst/>
+                        </a:rPr>
+                        <a:t>name</a:t>
+                      </a:r>
+                      <a:r>
+                        <a:rPr lang="ru-RU" sz="975" dirty="0">
+                          <a:effectLst/>
+                        </a:rPr>
+                        <a:t> LIKE 'А%'</a:t>
+                      </a:r>
+                      <a:endParaRPr lang="ru-RU" sz="1125" b="0" i="0" dirty="0">
                         <a:solidFill>
                           <a:srgbClr val="F9FAFB"/>
                         </a:solidFill>
@@ -43458,12 +43594,24 @@
                         <a:buNone/>
                       </a:pPr>
                       <a:r>
-                        <a:rPr lang="ru-RU" sz="975">
+                        <a:rPr lang="ru-RU" sz="975" dirty="0">
                           <a:effectLst/>
                         </a:rPr>
-                        <a:t>WHERE name ILIKE 'анна'</a:t>
+                        <a:t>WHERE </a:t>
                       </a:r>
-                      <a:endParaRPr lang="ru-RU" sz="1125" b="0" i="0">
+                      <a:r>
+                        <a:rPr lang="ru-RU" sz="975" dirty="0" err="1">
+                          <a:effectLst/>
+                        </a:rPr>
+                        <a:t>name</a:t>
+                      </a:r>
+                      <a:r>
+                        <a:rPr lang="ru-RU" sz="975" dirty="0">
+                          <a:effectLst/>
+                        </a:rPr>
+                        <a:t> ILIKE 'анна'</a:t>
+                      </a:r>
+                      <a:endParaRPr lang="ru-RU" sz="1125" b="0" i="0" dirty="0">
                         <a:solidFill>
                           <a:srgbClr val="F9FAFB"/>
                         </a:solidFill>
